--- a/edsl_workshop_slides.pptx
+++ b/edsl_workshop_slides.pptx
@@ -4,6 +4,9 @@
   <p:sldMasterIdLst>
     <p:sldMasterId id="2147483648" r:id="rId1"/>
   </p:sldMasterIdLst>
+  <p:notesMasterIdLst>
+    <p:notesMasterId r:id="rId15"/>
+  </p:notesMasterIdLst>
   <p:sldIdLst>
     <p:sldId id="256" r:id="rId2"/>
     <p:sldId id="257" r:id="rId3"/>
@@ -19,10 +22,7 @@
     <p:sldId id="267" r:id="rId13"/>
     <p:sldId id="268" r:id="rId14"/>
   </p:sldIdLst>
-  <p:notesMasterIdLst>
-    <p:notesMasterId r:id="rId15"/>
-  </p:notesMasterIdLst>
-  <p:sldSz cx="9144000" cy="5143500"/>
+  <p:sldSz cx="9144000" cy="5143500" type="screen16x9"/>
   <p:notesSz cx="5143500" cy="9144000"/>
   <p:defaultTextStyle>
     <a:lvl1pPr marL="0" algn="l" defTabSz="914400" rtl="0" eaLnBrk="1" latinLnBrk="0" hangingPunct="1">
@@ -116,6 +116,11 @@
       </a:defRPr>
     </a:lvl9pPr>
   </p:defaultTextStyle>
+  <p:extLst>
+    <p:ext uri="{EFAFB233-063F-42B5-8137-9DF3F51BA10A}">
+      <p15:sldGuideLst xmlns:p15="http://schemas.microsoft.com/office/powerpoint/2012/main"/>
+    </p:ext>
+  </p:extLst>
 </p:presentation>
 </file>
 
@@ -141,234 +146,10 @@
           <a:chExt cx="0" cy="0"/>
         </a:xfrm>
       </p:grpSpPr>
-      <p:sp>
-        <p:nvSpPr>
-          <p:cNvPr id="2" name="Header Placeholder 1"/>
-          <p:cNvSpPr>
-            <a:spLocks noGrp="1"/>
-          </p:cNvSpPr>
-          <p:nvPr>
-            <p:ph type="hdr" sz="quarter"/>
-          </p:nvPr>
-        </p:nvSpPr>
-        <p:spPr>
-          <a:xfrm>
-            <a:off x="0" y="0"/>
-            <a:ext cx="2971800" cy="458788"/>
-          </a:xfrm>
-          <a:prstGeom prst="rect">
-            <a:avLst/>
-          </a:prstGeom>
-        </p:spPr>
-        <p:txBody>
-          <a:bodyPr vert="horz" lIns="91440" tIns="45720" rIns="91440" bIns="45720" rtlCol="0"/>
-          <a:lstStyle>
-            <a:lvl1pPr algn="l">
-              <a:defRPr sz="1200"/>
-            </a:lvl1pPr>
-          </a:lstStyle>
-          <a:p>
-            <a:endParaRPr lang="en-US"/>
-          </a:p>
-        </p:txBody>
-      </p:sp>
-      <p:sp>
-        <p:nvSpPr>
-          <p:cNvPr id="3" name="Date Placeholder 2"/>
-          <p:cNvSpPr>
-            <a:spLocks noGrp="1"/>
-          </p:cNvSpPr>
-          <p:nvPr>
-            <p:ph type="dt" idx="1"/>
-          </p:nvPr>
-        </p:nvSpPr>
-        <p:spPr>
-          <a:xfrm>
-            <a:off x="3884613" y="0"/>
-            <a:ext cx="2971800" cy="458788"/>
-          </a:xfrm>
-          <a:prstGeom prst="rect">
-            <a:avLst/>
-          </a:prstGeom>
-        </p:spPr>
-        <p:txBody>
-          <a:bodyPr vert="horz" lIns="91440" tIns="45720" rIns="91440" bIns="45720" rtlCol="0"/>
-          <a:lstStyle>
-            <a:lvl1pPr algn="r">
-              <a:defRPr sz="1200"/>
-            </a:lvl1pPr>
-          </a:lstStyle>
-          <a:p>
-            <a:fld id="{5282F153-3F37-0F45-9E97-73ACFA13230C}" type="datetimeFigureOut">
-              <a:rPr lang="en-US"/>
-              <a:t>7/23/19</a:t>
-            </a:fld>
-            <a:endParaRPr lang="en-US"/>
-          </a:p>
-        </p:txBody>
-      </p:sp>
-      <p:sp>
-        <p:nvSpPr>
-          <p:cNvPr id="4" name="Slide Image Placeholder 3"/>
-          <p:cNvSpPr>
-            <a:spLocks noGrp="1" noRot="1" noChangeAspect="1"/>
-          </p:cNvSpPr>
-          <p:nvPr>
-            <p:ph type="sldImg" idx="2"/>
-          </p:nvPr>
-        </p:nvSpPr>
-        <p:spPr>
-          <a:xfrm>
-            <a:off x="685800" y="1143000"/>
-            <a:ext cx="5486400" cy="3086100"/>
-          </a:xfrm>
-          <a:prstGeom prst="rect">
-            <a:avLst/>
-          </a:prstGeom>
-          <a:noFill/>
-          <a:ln w="12700">
-            <a:solidFill>
-              <a:prstClr val="black"/>
-            </a:solidFill>
-          </a:ln>
-        </p:spPr>
-        <p:txBody>
-          <a:bodyPr vert="horz" lIns="91440" tIns="45720" rIns="91440" bIns="45720" rtlCol="0" anchor="ctr"/>
-          <a:lstStyle/>
-          <a:p>
-            <a:endParaRPr lang="en-US"/>
-          </a:p>
-        </p:txBody>
-      </p:sp>
-      <p:sp>
-        <p:nvSpPr>
-          <p:cNvPr id="5" name="Notes Placeholder 4"/>
-          <p:cNvSpPr>
-            <a:spLocks noGrp="1"/>
-          </p:cNvSpPr>
-          <p:nvPr>
-            <p:ph type="body" sz="quarter" idx="3"/>
-          </p:nvPr>
-        </p:nvSpPr>
-        <p:spPr>
-          <a:xfrm>
-            <a:off x="685800" y="4400550"/>
-            <a:ext cx="5486400" cy="3600450"/>
-          </a:xfrm>
-          <a:prstGeom prst="rect">
-            <a:avLst/>
-          </a:prstGeom>
-        </p:spPr>
-        <p:txBody>
-          <a:bodyPr vert="horz" lIns="91440" tIns="45720" rIns="91440" bIns="45720" rtlCol="0"/>
-          <a:lstStyle/>
-          <a:p>
-            <a:pPr lvl="0"/>
-            <a:r>
-              <a:rPr lang="en-US"/>
-              <a:t>Click to edit Master text styles</a:t>
-            </a:r>
-          </a:p>
-          <a:p>
-            <a:pPr lvl="1"/>
-            <a:r>
-              <a:rPr lang="en-US"/>
-              <a:t>Second level</a:t>
-            </a:r>
-          </a:p>
-          <a:p>
-            <a:pPr lvl="2"/>
-            <a:r>
-              <a:rPr lang="en-US"/>
-              <a:t>Third level</a:t>
-            </a:r>
-          </a:p>
-          <a:p>
-            <a:pPr lvl="3"/>
-            <a:r>
-              <a:rPr lang="en-US"/>
-              <a:t>Fourth level</a:t>
-            </a:r>
-          </a:p>
-          <a:p>
-            <a:pPr lvl="4"/>
-            <a:r>
-              <a:rPr lang="en-US"/>
-              <a:t>Fifth level</a:t>
-            </a:r>
-          </a:p>
-        </p:txBody>
-      </p:sp>
-      <p:sp>
-        <p:nvSpPr>
-          <p:cNvPr id="6" name="Footer Placeholder 5"/>
-          <p:cNvSpPr>
-            <a:spLocks noGrp="1"/>
-          </p:cNvSpPr>
-          <p:nvPr>
-            <p:ph type="ftr" sz="quarter" idx="4"/>
-          </p:nvPr>
-        </p:nvSpPr>
-        <p:spPr>
-          <a:xfrm>
-            <a:off x="0" y="8685213"/>
-            <a:ext cx="2971800" cy="458787"/>
-          </a:xfrm>
-          <a:prstGeom prst="rect">
-            <a:avLst/>
-          </a:prstGeom>
-        </p:spPr>
-        <p:txBody>
-          <a:bodyPr vert="horz" lIns="91440" tIns="45720" rIns="91440" bIns="45720" rtlCol="0" anchor="b"/>
-          <a:lstStyle>
-            <a:lvl1pPr algn="l">
-              <a:defRPr sz="1200"/>
-            </a:lvl1pPr>
-          </a:lstStyle>
-          <a:p>
-            <a:endParaRPr lang="en-US"/>
-          </a:p>
-        </p:txBody>
-      </p:sp>
-      <p:sp>
-        <p:nvSpPr>
-          <p:cNvPr id="7" name="Slide Number Placeholder 6"/>
-          <p:cNvSpPr>
-            <a:spLocks noGrp="1"/>
-          </p:cNvSpPr>
-          <p:nvPr>
-            <p:ph type="sldNum" sz="quarter" idx="5"/>
-          </p:nvPr>
-        </p:nvSpPr>
-        <p:spPr>
-          <a:xfrm>
-            <a:off x="3884613" y="8685213"/>
-            <a:ext cx="2971800" cy="458787"/>
-          </a:xfrm>
-          <a:prstGeom prst="rect">
-            <a:avLst/>
-          </a:prstGeom>
-        </p:spPr>
-        <p:txBody>
-          <a:bodyPr vert="horz" lIns="91440" tIns="45720" rIns="91440" bIns="45720" rtlCol="0" anchor="b"/>
-          <a:lstStyle>
-            <a:lvl1pPr algn="r">
-              <a:defRPr sz="1200"/>
-            </a:lvl1pPr>
-          </a:lstStyle>
-          <a:p>
-            <a:fld id="{CE5E9CC1-C706-0F49-92D6-E571CC5EEA8F}" type="slidenum">
-              <a:rPr lang="en-US"/>
-              <a:t>‹#›</a:t>
-            </a:fld>
-            <a:endParaRPr lang="en-US"/>
-          </a:p>
-        </p:txBody>
-      </p:sp>
     </p:spTree>
     <p:extLst>
       <p:ext uri="{BB962C8B-B14F-4D97-AF65-F5344CB8AC3E}">
-        <p14:creationId xmlns:p14="http://schemas.microsoft.com/office/powerpoint/2010/main" val="1024086991"/>
+        <p14:creationId xmlns:p14="http://schemas.microsoft.com/office/powerpoint/2010/main" val="2290385827"/>
       </p:ext>
     </p:extLst>
   </p:cSld>
@@ -512,10 +293,6 @@
           <a:bodyPr/>
           <a:lstStyle/>
           <a:p>
-            <a:r>
-              <a:rPr lang="en-US" dirty="0"/>
-              <a:t/>
-            </a:r>
             <a:endParaRPr lang="en-US" dirty="0"/>
           </a:p>
         </p:txBody>
@@ -600,10 +377,6 @@
           <a:bodyPr/>
           <a:lstStyle/>
           <a:p>
-            <a:r>
-              <a:rPr lang="en-US" dirty="0"/>
-              <a:t/>
-            </a:r>
             <a:endParaRPr lang="en-US" dirty="0"/>
           </a:p>
         </p:txBody>
@@ -688,10 +461,6 @@
           <a:bodyPr/>
           <a:lstStyle/>
           <a:p>
-            <a:r>
-              <a:rPr lang="en-US" dirty="0"/>
-              <a:t/>
-            </a:r>
             <a:endParaRPr lang="en-US" dirty="0"/>
           </a:p>
         </p:txBody>
@@ -776,10 +545,6 @@
           <a:bodyPr/>
           <a:lstStyle/>
           <a:p>
-            <a:r>
-              <a:rPr lang="en-US" dirty="0"/>
-              <a:t/>
-            </a:r>
             <a:endParaRPr lang="en-US" dirty="0"/>
           </a:p>
         </p:txBody>
@@ -864,10 +629,6 @@
           <a:bodyPr/>
           <a:lstStyle/>
           <a:p>
-            <a:r>
-              <a:rPr lang="en-US" dirty="0"/>
-              <a:t/>
-            </a:r>
             <a:endParaRPr lang="en-US" dirty="0"/>
           </a:p>
         </p:txBody>
@@ -952,10 +713,6 @@
           <a:bodyPr/>
           <a:lstStyle/>
           <a:p>
-            <a:r>
-              <a:rPr lang="en-US" dirty="0"/>
-              <a:t/>
-            </a:r>
             <a:endParaRPr lang="en-US" dirty="0"/>
           </a:p>
         </p:txBody>
@@ -1040,10 +797,6 @@
           <a:bodyPr/>
           <a:lstStyle/>
           <a:p>
-            <a:r>
-              <a:rPr lang="en-US" dirty="0"/>
-              <a:t/>
-            </a:r>
             <a:endParaRPr lang="en-US" dirty="0"/>
           </a:p>
         </p:txBody>
@@ -1128,10 +881,6 @@
           <a:bodyPr/>
           <a:lstStyle/>
           <a:p>
-            <a:r>
-              <a:rPr lang="en-US" dirty="0"/>
-              <a:t/>
-            </a:r>
             <a:endParaRPr lang="en-US" dirty="0"/>
           </a:p>
         </p:txBody>
@@ -1216,10 +965,6 @@
           <a:bodyPr/>
           <a:lstStyle/>
           <a:p>
-            <a:r>
-              <a:rPr lang="en-US" dirty="0"/>
-              <a:t/>
-            </a:r>
             <a:endParaRPr lang="en-US" dirty="0"/>
           </a:p>
         </p:txBody>
@@ -1304,10 +1049,6 @@
           <a:bodyPr/>
           <a:lstStyle/>
           <a:p>
-            <a:r>
-              <a:rPr lang="en-US" dirty="0"/>
-              <a:t/>
-            </a:r>
             <a:endParaRPr lang="en-US" dirty="0"/>
           </a:p>
         </p:txBody>
@@ -1392,10 +1133,6 @@
           <a:bodyPr/>
           <a:lstStyle/>
           <a:p>
-            <a:r>
-              <a:rPr lang="en-US" dirty="0"/>
-              <a:t/>
-            </a:r>
             <a:endParaRPr lang="en-US" dirty="0"/>
           </a:p>
         </p:txBody>
@@ -1480,10 +1217,6 @@
           <a:bodyPr/>
           <a:lstStyle/>
           <a:p>
-            <a:r>
-              <a:rPr lang="en-US" dirty="0"/>
-              <a:t/>
-            </a:r>
             <a:endParaRPr lang="en-US" dirty="0"/>
           </a:p>
         </p:txBody>
@@ -1568,10 +1301,6 @@
           <a:bodyPr/>
           <a:lstStyle/>
           <a:p>
-            <a:r>
-              <a:rPr lang="en-US" dirty="0"/>
-              <a:t/>
-            </a:r>
             <a:endParaRPr lang="en-US" dirty="0"/>
           </a:p>
         </p:txBody>
@@ -1645,6 +1374,11 @@
 <file path=ppt/slideMasters/slideMaster1.xml><?xml version="1.0" encoding="utf-8"?>
 <p:sldMaster xmlns:a="http://schemas.openxmlformats.org/drawingml/2006/main" xmlns:r="http://schemas.openxmlformats.org/officeDocument/2006/relationships" xmlns:p="http://schemas.openxmlformats.org/presentationml/2006/main">
   <p:cSld>
+    <p:bg>
+      <p:bgRef idx="1001">
+        <a:schemeClr val="bg1"/>
+      </p:bgRef>
+    </p:bg>
     <p:spTree>
       <p:nvGrpSpPr>
         <p:cNvPr id="1" name=""/>
@@ -1927,6 +1661,7 @@
         <a:solidFill>
           <a:srgbClr val="1B2A4A"/>
         </a:solidFill>
+        <a:effectLst/>
       </p:bgPr>
     </p:bg>
     <p:spTree>
@@ -1967,6 +1702,13 @@
             <a:prstDash val="solid"/>
           </a:ln>
         </p:spPr>
+        <p:txBody>
+          <a:bodyPr/>
+          <a:lstStyle/>
+          <a:p>
+            <a:endParaRPr lang="en-US"/>
+          </a:p>
+        </p:txBody>
       </p:sp>
       <p:sp>
         <p:nvSpPr>
@@ -1989,7 +1731,7 @@
           <a:bodyPr wrap="square" lIns="0" tIns="0" rIns="0" bIns="0" rtlCol="0" anchor="ctr"/>
           <a:lstStyle/>
           <a:p>
-            <a:pPr indent="0" marL="0">
+            <a:pPr marL="0" indent="0">
               <a:buNone/>
             </a:pPr>
             <a:r>
@@ -2028,7 +1770,7 @@
           <a:bodyPr wrap="square" lIns="0" tIns="0" rIns="0" bIns="0" rtlCol="0" anchor="ctr"/>
           <a:lstStyle/>
           <a:p>
-            <a:pPr indent="0" marL="0">
+            <a:pPr marL="0" indent="0">
               <a:buNone/>
             </a:pPr>
             <a:r>
@@ -2067,7 +1809,7 @@
           <a:bodyPr wrap="square" lIns="0" tIns="0" rIns="0" bIns="0" rtlCol="0" anchor="ctr"/>
           <a:lstStyle/>
           <a:p>
-            <a:pPr indent="0" marL="0">
+            <a:pPr marL="0" indent="0">
               <a:buNone/>
             </a:pPr>
             <a:r>
@@ -2109,6 +1851,13 @@
             <a:prstDash val="solid"/>
           </a:ln>
         </p:spPr>
+        <p:txBody>
+          <a:bodyPr/>
+          <a:lstStyle/>
+          <a:p>
+            <a:endParaRPr lang="en-US"/>
+          </a:p>
+        </p:txBody>
       </p:sp>
       <p:sp>
         <p:nvSpPr>
@@ -2131,7 +1880,7 @@
           <a:bodyPr wrap="square" lIns="0" tIns="0" rIns="0" bIns="0" rtlCol="0" anchor="ctr"/>
           <a:lstStyle/>
           <a:p>
-            <a:pPr indent="0" marL="0">
+            <a:pPr marL="0" indent="0">
               <a:buNone/>
             </a:pPr>
             <a:r>
@@ -2143,7 +1892,40 @@
                 <a:ea typeface="Calibri" pitchFamily="34" charset="-122"/>
                 <a:cs typeface="Calibri" pitchFamily="34" charset="-120"/>
               </a:rPr>
-              <a:t>Week 5 Lab  ·  Graduate Workshop  ·  80 minutes</a:t>
+              <a:t>Week 5 Lab  ·  MACS30755 Workshop </a:t>
+            </a:r>
+            <a:r>
+              <a:rPr lang="en-US" altLang="zh-CN" sz="1300" dirty="0">
+                <a:solidFill>
+                  <a:srgbClr val="CBD5E1"/>
+                </a:solidFill>
+                <a:latin typeface="Calibri" pitchFamily="34" charset="0"/>
+                <a:ea typeface="Calibri" pitchFamily="34" charset="-122"/>
+                <a:cs typeface="Calibri" pitchFamily="34" charset="-120"/>
+              </a:rPr>
+              <a:t>·</a:t>
+            </a:r>
+            <a:r>
+              <a:rPr lang="zh-CN" altLang="en-US" sz="1300" dirty="0">
+                <a:solidFill>
+                  <a:srgbClr val="CBD5E1"/>
+                </a:solidFill>
+                <a:latin typeface="Calibri" pitchFamily="34" charset="0"/>
+                <a:ea typeface="Calibri" pitchFamily="34" charset="-122"/>
+                <a:cs typeface="Calibri" pitchFamily="34" charset="-120"/>
+              </a:rPr>
+              <a:t> </a:t>
+            </a:r>
+            <a:r>
+              <a:rPr lang="en-US" altLang="zh-CN" sz="1300" dirty="0">
+                <a:solidFill>
+                  <a:srgbClr val="CBD5E1"/>
+                </a:solidFill>
+                <a:latin typeface="Calibri" pitchFamily="34" charset="0"/>
+                <a:ea typeface="Calibri" pitchFamily="34" charset="-122"/>
+                <a:cs typeface="Calibri" pitchFamily="34" charset="-120"/>
+              </a:rPr>
+              <a:t>Vera Mao</a:t>
             </a:r>
             <a:endParaRPr lang="en-US" sz="1300" dirty="0"/>
           </a:p>
@@ -2170,7 +1952,7 @@
           <a:bodyPr wrap="square" lIns="0" tIns="0" rIns="0" bIns="0" rtlCol="0" anchor="ctr"/>
           <a:lstStyle/>
           <a:p>
-            <a:pPr indent="0" marL="0">
+            <a:pPr marL="0" indent="0">
               <a:buNone/>
             </a:pPr>
             <a:r>
@@ -2204,6 +1986,7 @@
         <a:solidFill>
           <a:srgbClr val="1B2A4A"/>
         </a:solidFill>
+        <a:effectLst/>
       </p:bgPr>
     </p:bg>
     <p:spTree>
@@ -2244,6 +2027,13 @@
             <a:prstDash val="solid"/>
           </a:ln>
         </p:spPr>
+        <p:txBody>
+          <a:bodyPr/>
+          <a:lstStyle/>
+          <a:p>
+            <a:endParaRPr lang="en-US"/>
+          </a:p>
+        </p:txBody>
       </p:sp>
       <p:sp>
         <p:nvSpPr>
@@ -2266,7 +2056,7 @@
           <a:bodyPr wrap="square" lIns="0" tIns="0" rIns="0" bIns="0" rtlCol="0" anchor="ctr"/>
           <a:lstStyle/>
           <a:p>
-            <a:pPr indent="0" marL="0">
+            <a:pPr marL="0" indent="0">
               <a:buNone/>
             </a:pPr>
             <a:r>
@@ -2305,7 +2095,7 @@
           <a:bodyPr wrap="square" lIns="0" tIns="0" rIns="0" bIns="0" rtlCol="0" anchor="ctr"/>
           <a:lstStyle/>
           <a:p>
-            <a:pPr indent="0" marL="0">
+            <a:pPr marL="0" indent="0">
               <a:buNone/>
             </a:pPr>
             <a:r>
@@ -2347,6 +2137,13 @@
             <a:prstDash val="solid"/>
           </a:ln>
         </p:spPr>
+        <p:txBody>
+          <a:bodyPr/>
+          <a:lstStyle/>
+          <a:p>
+            <a:endParaRPr lang="en-US"/>
+          </a:p>
+        </p:txBody>
       </p:sp>
       <p:sp>
         <p:nvSpPr>
@@ -2369,7 +2166,7 @@
           <a:bodyPr wrap="square" lIns="0" tIns="0" rIns="0" bIns="0" rtlCol="0" anchor="ctr"/>
           <a:lstStyle/>
           <a:p>
-            <a:pPr algn="ctr" indent="0" marL="0">
+            <a:pPr marL="0" indent="0" algn="ctr">
               <a:buNone/>
             </a:pPr>
             <a:r>
@@ -2408,7 +2205,7 @@
           <a:bodyPr wrap="square" lIns="0" tIns="0" rIns="0" bIns="0" rtlCol="0" anchor="ctr"/>
           <a:lstStyle/>
           <a:p>
-            <a:pPr indent="0" marL="0">
+            <a:pPr marL="0" indent="0">
               <a:buNone/>
             </a:pPr>
             <a:r>
@@ -2421,45 +2218,6 @@
                 <a:cs typeface="Calibri" pitchFamily="34" charset="-120"/>
               </a:rPr>
               <a:t>Identify   —   Find a published survey dataset with demographic breakdowns (GSS, Pew, etc.)</a:t>
-            </a:r>
-            <a:endParaRPr lang="en-US" sz="1100" dirty="0"/>
-          </a:p>
-        </p:txBody>
-      </p:sp>
-      <p:sp>
-        <p:nvSpPr>
-          <p:cNvPr id="8" name="Text 6"/>
-          <p:cNvSpPr/>
-          <p:nvPr/>
-        </p:nvSpPr>
-        <p:spPr>
-          <a:xfrm>
-            <a:off x="1261872" y="2039112"/>
-            <a:ext cx="1005840" cy="320040"/>
-          </a:xfrm>
-          <a:prstGeom prst="rect">
-            <a:avLst/>
-          </a:prstGeom>
-          <a:noFill/>
-          <a:ln/>
-        </p:spPr>
-        <p:txBody>
-          <a:bodyPr wrap="square" lIns="0" tIns="0" rIns="0" bIns="0" rtlCol="0" anchor="ctr"/>
-          <a:lstStyle/>
-          <a:p>
-            <a:pPr indent="0" marL="0">
-              <a:buNone/>
-            </a:pPr>
-            <a:r>
-              <a:rPr lang="en-US" sz="1100" b="1" dirty="0">
-                <a:solidFill>
-                  <a:srgbClr val="A8D8EA"/>
-                </a:solidFill>
-                <a:latin typeface="Calibri" pitchFamily="34" charset="0"/>
-                <a:ea typeface="Calibri" pitchFamily="34" charset="-122"/>
-                <a:cs typeface="Calibri" pitchFamily="34" charset="-120"/>
-              </a:rPr>
-              <a:t>Identify</a:t>
             </a:r>
             <a:endParaRPr lang="en-US" sz="1100" dirty="0"/>
           </a:p>
@@ -2489,6 +2247,13 @@
             <a:prstDash val="solid"/>
           </a:ln>
         </p:spPr>
+        <p:txBody>
+          <a:bodyPr/>
+          <a:lstStyle/>
+          <a:p>
+            <a:endParaRPr lang="en-US"/>
+          </a:p>
+        </p:txBody>
       </p:sp>
       <p:sp>
         <p:nvSpPr>
@@ -2511,7 +2276,7 @@
           <a:bodyPr wrap="square" lIns="0" tIns="0" rIns="0" bIns="0" rtlCol="0" anchor="ctr"/>
           <a:lstStyle/>
           <a:p>
-            <a:pPr algn="ctr" indent="0" marL="0">
+            <a:pPr marL="0" indent="0" algn="ctr">
               <a:buNone/>
             </a:pPr>
             <a:r>
@@ -2550,7 +2315,7 @@
           <a:bodyPr wrap="square" lIns="0" tIns="0" rIns="0" bIns="0" rtlCol="0" anchor="ctr"/>
           <a:lstStyle/>
           <a:p>
-            <a:pPr indent="0" marL="0">
+            <a:pPr marL="0" indent="0">
               <a:buNone/>
             </a:pPr>
             <a:r>
@@ -2563,45 +2328,6 @@
                 <a:cs typeface="Calibri" pitchFamily="34" charset="-120"/>
               </a:rPr>
               <a:t>Select   —   Choose 1–2 survey questions and a corresponding visualization from the report</a:t>
-            </a:r>
-            <a:endParaRPr lang="en-US" sz="1100" dirty="0"/>
-          </a:p>
-        </p:txBody>
-      </p:sp>
-      <p:sp>
-        <p:nvSpPr>
-          <p:cNvPr id="12" name="Text 10"/>
-          <p:cNvSpPr/>
-          <p:nvPr/>
-        </p:nvSpPr>
-        <p:spPr>
-          <a:xfrm>
-            <a:off x="1261872" y="2633472"/>
-            <a:ext cx="1005840" cy="320040"/>
-          </a:xfrm>
-          <a:prstGeom prst="rect">
-            <a:avLst/>
-          </a:prstGeom>
-          <a:noFill/>
-          <a:ln/>
-        </p:spPr>
-        <p:txBody>
-          <a:bodyPr wrap="square" lIns="0" tIns="0" rIns="0" bIns="0" rtlCol="0" anchor="ctr"/>
-          <a:lstStyle/>
-          <a:p>
-            <a:pPr indent="0" marL="0">
-              <a:buNone/>
-            </a:pPr>
-            <a:r>
-              <a:rPr lang="en-US" sz="1100" b="1" dirty="0">
-                <a:solidFill>
-                  <a:srgbClr val="A8D8EA"/>
-                </a:solidFill>
-                <a:latin typeface="Calibri" pitchFamily="34" charset="0"/>
-                <a:ea typeface="Calibri" pitchFamily="34" charset="-122"/>
-                <a:cs typeface="Calibri" pitchFamily="34" charset="-120"/>
-              </a:rPr>
-              <a:t>Select</a:t>
             </a:r>
             <a:endParaRPr lang="en-US" sz="1100" dirty="0"/>
           </a:p>
@@ -2631,6 +2357,13 @@
             <a:prstDash val="solid"/>
           </a:ln>
         </p:spPr>
+        <p:txBody>
+          <a:bodyPr/>
+          <a:lstStyle/>
+          <a:p>
+            <a:endParaRPr lang="en-US"/>
+          </a:p>
+        </p:txBody>
       </p:sp>
       <p:sp>
         <p:nvSpPr>
@@ -2653,7 +2386,7 @@
           <a:bodyPr wrap="square" lIns="0" tIns="0" rIns="0" bIns="0" rtlCol="0" anchor="ctr"/>
           <a:lstStyle/>
           <a:p>
-            <a:pPr algn="ctr" indent="0" marL="0">
+            <a:pPr marL="0" indent="0" algn="ctr">
               <a:buNone/>
             </a:pPr>
             <a:r>
@@ -2692,7 +2425,7 @@
           <a:bodyPr wrap="square" lIns="0" tIns="0" rIns="0" bIns="0" rtlCol="0" anchor="ctr"/>
           <a:lstStyle/>
           <a:p>
-            <a:pPr indent="0" marL="0">
+            <a:pPr marL="0" indent="0">
               <a:buNone/>
             </a:pPr>
             <a:r>
@@ -2705,45 +2438,6 @@
                 <a:cs typeface="Calibri" pitchFamily="34" charset="-120"/>
               </a:rPr>
               <a:t>Replicate   —   Build EDSL agents matching the human sample demographics and run the survey</a:t>
-            </a:r>
-            <a:endParaRPr lang="en-US" sz="1100" dirty="0"/>
-          </a:p>
-        </p:txBody>
-      </p:sp>
-      <p:sp>
-        <p:nvSpPr>
-          <p:cNvPr id="16" name="Text 14"/>
-          <p:cNvSpPr/>
-          <p:nvPr/>
-        </p:nvSpPr>
-        <p:spPr>
-          <a:xfrm>
-            <a:off x="1261872" y="3227832"/>
-            <a:ext cx="1005840" cy="320040"/>
-          </a:xfrm>
-          <a:prstGeom prst="rect">
-            <a:avLst/>
-          </a:prstGeom>
-          <a:noFill/>
-          <a:ln/>
-        </p:spPr>
-        <p:txBody>
-          <a:bodyPr wrap="square" lIns="0" tIns="0" rIns="0" bIns="0" rtlCol="0" anchor="ctr"/>
-          <a:lstStyle/>
-          <a:p>
-            <a:pPr indent="0" marL="0">
-              <a:buNone/>
-            </a:pPr>
-            <a:r>
-              <a:rPr lang="en-US" sz="1100" b="1" dirty="0">
-                <a:solidFill>
-                  <a:srgbClr val="A8D8EA"/>
-                </a:solidFill>
-                <a:latin typeface="Calibri" pitchFamily="34" charset="0"/>
-                <a:ea typeface="Calibri" pitchFamily="34" charset="-122"/>
-                <a:cs typeface="Calibri" pitchFamily="34" charset="-120"/>
-              </a:rPr>
-              <a:t>Replicate</a:t>
             </a:r>
             <a:endParaRPr lang="en-US" sz="1100" dirty="0"/>
           </a:p>
@@ -2773,6 +2467,13 @@
             <a:prstDash val="solid"/>
           </a:ln>
         </p:spPr>
+        <p:txBody>
+          <a:bodyPr/>
+          <a:lstStyle/>
+          <a:p>
+            <a:endParaRPr lang="en-US"/>
+          </a:p>
+        </p:txBody>
       </p:sp>
       <p:sp>
         <p:nvSpPr>
@@ -2795,7 +2496,7 @@
           <a:bodyPr wrap="square" lIns="0" tIns="0" rIns="0" bIns="0" rtlCol="0" anchor="ctr"/>
           <a:lstStyle/>
           <a:p>
-            <a:pPr algn="ctr" indent="0" marL="0">
+            <a:pPr marL="0" indent="0" algn="ctr">
               <a:buNone/>
             </a:pPr>
             <a:r>
@@ -2834,7 +2535,7 @@
           <a:bodyPr wrap="square" lIns="0" tIns="0" rIns="0" bIns="0" rtlCol="0" anchor="ctr"/>
           <a:lstStyle/>
           <a:p>
-            <a:pPr indent="0" marL="0">
+            <a:pPr marL="0" indent="0">
               <a:buNone/>
             </a:pPr>
             <a:r>
@@ -2847,45 +2548,6 @@
                 <a:cs typeface="Calibri" pitchFamily="34" charset="-120"/>
               </a:rPr>
               <a:t>Analyze   —   Compare AI vs. human response distributions — do the patterns hold?</a:t>
-            </a:r>
-            <a:endParaRPr lang="en-US" sz="1100" dirty="0"/>
-          </a:p>
-        </p:txBody>
-      </p:sp>
-      <p:sp>
-        <p:nvSpPr>
-          <p:cNvPr id="20" name="Text 18"/>
-          <p:cNvSpPr/>
-          <p:nvPr/>
-        </p:nvSpPr>
-        <p:spPr>
-          <a:xfrm>
-            <a:off x="1261872" y="3822192"/>
-            <a:ext cx="1005840" cy="320040"/>
-          </a:xfrm>
-          <a:prstGeom prst="rect">
-            <a:avLst/>
-          </a:prstGeom>
-          <a:noFill/>
-          <a:ln/>
-        </p:spPr>
-        <p:txBody>
-          <a:bodyPr wrap="square" lIns="0" tIns="0" rIns="0" bIns="0" rtlCol="0" anchor="ctr"/>
-          <a:lstStyle/>
-          <a:p>
-            <a:pPr indent="0" marL="0">
-              <a:buNone/>
-            </a:pPr>
-            <a:r>
-              <a:rPr lang="en-US" sz="1100" b="1" dirty="0">
-                <a:solidFill>
-                  <a:srgbClr val="A8D8EA"/>
-                </a:solidFill>
-                <a:latin typeface="Calibri" pitchFamily="34" charset="0"/>
-                <a:ea typeface="Calibri" pitchFamily="34" charset="-122"/>
-                <a:cs typeface="Calibri" pitchFamily="34" charset="-120"/>
-              </a:rPr>
-              <a:t>Analyze</a:t>
             </a:r>
             <a:endParaRPr lang="en-US" sz="1100" dirty="0"/>
           </a:p>
@@ -2915,6 +2577,13 @@
             <a:prstDash val="solid"/>
           </a:ln>
         </p:spPr>
+        <p:txBody>
+          <a:bodyPr/>
+          <a:lstStyle/>
+          <a:p>
+            <a:endParaRPr lang="en-US"/>
+          </a:p>
+        </p:txBody>
       </p:sp>
       <p:sp>
         <p:nvSpPr>
@@ -2937,7 +2606,7 @@
           <a:bodyPr wrap="square" lIns="0" tIns="0" rIns="0" bIns="0" rtlCol="0" anchor="ctr"/>
           <a:lstStyle/>
           <a:p>
-            <a:pPr algn="ctr" indent="0" marL="0">
+            <a:pPr marL="0" indent="0" algn="ctr">
               <a:buNone/>
             </a:pPr>
             <a:r>
@@ -2976,7 +2645,7 @@
           <a:bodyPr wrap="square" lIns="0" tIns="0" rIns="0" bIns="0" rtlCol="0" anchor="ctr"/>
           <a:lstStyle/>
           <a:p>
-            <a:pPr indent="0" marL="0">
+            <a:pPr marL="0" indent="0">
               <a:buNone/>
             </a:pPr>
             <a:r>
@@ -2989,45 +2658,6 @@
                 <a:cs typeface="Calibri" pitchFamily="34" charset="-120"/>
               </a:rPr>
               <a:t>Report   —   Submit a written report with figures and interpretation by end of quarter</a:t>
-            </a:r>
-            <a:endParaRPr lang="en-US" sz="1100" dirty="0"/>
-          </a:p>
-        </p:txBody>
-      </p:sp>
-      <p:sp>
-        <p:nvSpPr>
-          <p:cNvPr id="24" name="Text 22"/>
-          <p:cNvSpPr/>
-          <p:nvPr/>
-        </p:nvSpPr>
-        <p:spPr>
-          <a:xfrm>
-            <a:off x="1261872" y="4416552"/>
-            <a:ext cx="1005840" cy="320040"/>
-          </a:xfrm>
-          <a:prstGeom prst="rect">
-            <a:avLst/>
-          </a:prstGeom>
-          <a:noFill/>
-          <a:ln/>
-        </p:spPr>
-        <p:txBody>
-          <a:bodyPr wrap="square" lIns="0" tIns="0" rIns="0" bIns="0" rtlCol="0" anchor="ctr"/>
-          <a:lstStyle/>
-          <a:p>
-            <a:pPr indent="0" marL="0">
-              <a:buNone/>
-            </a:pPr>
-            <a:r>
-              <a:rPr lang="en-US" sz="1100" b="1" dirty="0">
-                <a:solidFill>
-                  <a:srgbClr val="A8D8EA"/>
-                </a:solidFill>
-                <a:latin typeface="Calibri" pitchFamily="34" charset="0"/>
-                <a:ea typeface="Calibri" pitchFamily="34" charset="-122"/>
-                <a:cs typeface="Calibri" pitchFamily="34" charset="-120"/>
-              </a:rPr>
-              <a:t>Report</a:t>
             </a:r>
             <a:endParaRPr lang="en-US" sz="1100" dirty="0"/>
           </a:p>
@@ -3049,6 +2679,7 @@
         <a:solidFill>
           <a:srgbClr val="F5F7FA"/>
         </a:solidFill>
+        <a:effectLst/>
       </p:bgPr>
     </p:bg>
     <p:spTree>
@@ -3089,6 +2720,13 @@
             <a:prstDash val="solid"/>
           </a:ln>
         </p:spPr>
+        <p:txBody>
+          <a:bodyPr/>
+          <a:lstStyle/>
+          <a:p>
+            <a:endParaRPr lang="en-US"/>
+          </a:p>
+        </p:txBody>
       </p:sp>
       <p:sp>
         <p:nvSpPr>
@@ -3111,7 +2749,7 @@
           <a:bodyPr wrap="square" lIns="0" tIns="0" rIns="0" bIns="0" rtlCol="0" anchor="ctr"/>
           <a:lstStyle/>
           <a:p>
-            <a:pPr indent="0" marL="0">
+            <a:pPr marL="0" indent="0">
               <a:buNone/>
             </a:pPr>
             <a:r>
@@ -3150,7 +2788,7 @@
           <a:bodyPr wrap="square" lIns="0" tIns="0" rIns="0" bIns="0" rtlCol="0" anchor="ctr"/>
           <a:lstStyle/>
           <a:p>
-            <a:pPr indent="0" marL="0">
+            <a:pPr marL="0" indent="0">
               <a:buNone/>
             </a:pPr>
             <a:r>
@@ -3189,7 +2827,7 @@
           <a:bodyPr wrap="square" lIns="0" tIns="0" rIns="0" bIns="0" rtlCol="0" anchor="ctr"/>
           <a:lstStyle/>
           <a:p>
-            <a:pPr indent="0" marL="0">
+            <a:pPr marL="0" indent="0">
               <a:buNone/>
             </a:pPr>
             <a:r>
@@ -3223,15 +2861,27 @@
         </p:nvGraphicFramePr>
         <p:xfrm>
           <a:off x="320040" y="1325880"/>
-          <a:ext cx="3931920" cy="2286000"/>
+          <a:ext cx="3931920" cy="2285997"/>
         </p:xfrm>
         <a:graphic>
           <a:graphicData uri="http://schemas.openxmlformats.org/drawingml/2006/table">
             <a:tbl>
               <a:tblPr/>
               <a:tblGrid>
-                <a:gridCol w="2377440"/>
-                <a:gridCol w="1554480"/>
+                <a:gridCol w="2377440">
+                  <a:extLst>
+                    <a:ext uri="{9D8B030D-6E8A-4147-A177-3AD203B41FA5}">
+                      <a16:colId xmlns:a16="http://schemas.microsoft.com/office/drawing/2014/main" val="20000"/>
+                    </a:ext>
+                  </a:extLst>
+                </a:gridCol>
+                <a:gridCol w="1554480">
+                  <a:extLst>
+                    <a:ext uri="{9D8B030D-6E8A-4147-A177-3AD203B41FA5}">
+                      <a16:colId xmlns:a16="http://schemas.microsoft.com/office/drawing/2014/main" val="20001"/>
+                    </a:ext>
+                  </a:extLst>
+                </a:gridCol>
               </a:tblGrid>
               <a:tr h="326571">
                 <a:tc>
@@ -3239,7 +2889,7 @@
                     <a:bodyPr/>
                     <a:lstStyle/>
                     <a:p>
-                      <a:pPr indent="0" marL="0">
+                      <a:pPr marL="0" indent="0">
                         <a:buNone/>
                       </a:pPr>
                       <a:r>
@@ -3253,7 +2903,7 @@
                       <a:endParaRPr lang="en-US" sz="900" dirty="0"/>
                     </a:p>
                   </a:txBody>
-                  <a:tcPr marL="91440" marR="91440" marT="45720" marB="45720">
+                  <a:tcPr>
                     <a:lnL w="6350" cap="flat" cmpd="sng" algn="ctr">
                       <a:solidFill>
                         <a:srgbClr val="CBD5E1"/>
@@ -3300,7 +2950,7 @@
                     <a:bodyPr/>
                     <a:lstStyle/>
                     <a:p>
-                      <a:pPr indent="0" marL="0">
+                      <a:pPr marL="0" indent="0">
                         <a:buNone/>
                       </a:pPr>
                       <a:r>
@@ -3314,7 +2964,7 @@
                       <a:endParaRPr lang="en-US" sz="900" dirty="0"/>
                     </a:p>
                   </a:txBody>
-                  <a:tcPr marL="91440" marR="91440" marT="45720" marB="45720">
+                  <a:tcPr>
                     <a:lnL w="6350" cap="flat" cmpd="sng" algn="ctr">
                       <a:solidFill>
                         <a:srgbClr val="CBD5E1"/>
@@ -3356,6 +3006,11 @@
                     </a:solidFill>
                   </a:tcPr>
                 </a:tc>
+                <a:extLst>
+                  <a:ext uri="{0D108BD9-81ED-4DB2-BD59-A6C34878D82A}">
+                    <a16:rowId xmlns:a16="http://schemas.microsoft.com/office/drawing/2014/main" val="10000"/>
+                  </a:ext>
+                </a:extLst>
               </a:tr>
               <a:tr h="326571">
                 <a:tc>
@@ -3363,7 +3018,7 @@
                     <a:bodyPr/>
                     <a:lstStyle/>
                     <a:p>
-                      <a:pPr indent="0" marL="0">
+                      <a:pPr marL="0" indent="0">
                         <a:buNone/>
                       </a:pPr>
                       <a:r>
@@ -3377,7 +3032,7 @@
                       <a:endParaRPr lang="en-US" sz="900" dirty="0"/>
                     </a:p>
                   </a:txBody>
-                  <a:tcPr marL="91440" marR="91440" marT="45720" marB="45720">
+                  <a:tcPr>
                     <a:lnL w="6350" cap="flat" cmpd="sng" algn="ctr">
                       <a:solidFill>
                         <a:srgbClr val="CBD5E1"/>
@@ -3424,7 +3079,7 @@
                     <a:bodyPr/>
                     <a:lstStyle/>
                     <a:p>
-                      <a:pPr indent="0" marL="0">
+                      <a:pPr marL="0" indent="0">
                         <a:buNone/>
                       </a:pPr>
                       <a:r>
@@ -3438,7 +3093,7 @@
                       <a:endParaRPr lang="en-US" sz="900" dirty="0"/>
                     </a:p>
                   </a:txBody>
-                  <a:tcPr marL="91440" marR="91440" marT="45720" marB="45720">
+                  <a:tcPr>
                     <a:lnL w="6350" cap="flat" cmpd="sng" algn="ctr">
                       <a:solidFill>
                         <a:srgbClr val="CBD5E1"/>
@@ -3480,6 +3135,11 @@
                     </a:solidFill>
                   </a:tcPr>
                 </a:tc>
+                <a:extLst>
+                  <a:ext uri="{0D108BD9-81ED-4DB2-BD59-A6C34878D82A}">
+                    <a16:rowId xmlns:a16="http://schemas.microsoft.com/office/drawing/2014/main" val="10001"/>
+                  </a:ext>
+                </a:extLst>
               </a:tr>
               <a:tr h="326571">
                 <a:tc>
@@ -3487,7 +3147,7 @@
                     <a:bodyPr/>
                     <a:lstStyle/>
                     <a:p>
-                      <a:pPr indent="0" marL="0">
+                      <a:pPr marL="0" indent="0">
                         <a:buNone/>
                       </a:pPr>
                       <a:r>
@@ -3501,7 +3161,7 @@
                       <a:endParaRPr lang="en-US" sz="900" dirty="0"/>
                     </a:p>
                   </a:txBody>
-                  <a:tcPr marL="91440" marR="91440" marT="45720" marB="45720">
+                  <a:tcPr>
                     <a:lnL w="6350" cap="flat" cmpd="sng" algn="ctr">
                       <a:solidFill>
                         <a:srgbClr val="CBD5E1"/>
@@ -3548,7 +3208,7 @@
                     <a:bodyPr/>
                     <a:lstStyle/>
                     <a:p>
-                      <a:pPr indent="0" marL="0">
+                      <a:pPr marL="0" indent="0">
                         <a:buNone/>
                       </a:pPr>
                       <a:r>
@@ -3562,7 +3222,7 @@
                       <a:endParaRPr lang="en-US" sz="900" dirty="0"/>
                     </a:p>
                   </a:txBody>
-                  <a:tcPr marL="91440" marR="91440" marT="45720" marB="45720">
+                  <a:tcPr>
                     <a:lnL w="6350" cap="flat" cmpd="sng" algn="ctr">
                       <a:solidFill>
                         <a:srgbClr val="CBD5E1"/>
@@ -3604,6 +3264,11 @@
                     </a:solidFill>
                   </a:tcPr>
                 </a:tc>
+                <a:extLst>
+                  <a:ext uri="{0D108BD9-81ED-4DB2-BD59-A6C34878D82A}">
+                    <a16:rowId xmlns:a16="http://schemas.microsoft.com/office/drawing/2014/main" val="10002"/>
+                  </a:ext>
+                </a:extLst>
               </a:tr>
               <a:tr h="326571">
                 <a:tc>
@@ -3611,7 +3276,7 @@
                     <a:bodyPr/>
                     <a:lstStyle/>
                     <a:p>
-                      <a:pPr indent="0" marL="0">
+                      <a:pPr marL="0" indent="0">
                         <a:buNone/>
                       </a:pPr>
                       <a:r>
@@ -3625,7 +3290,7 @@
                       <a:endParaRPr lang="en-US" sz="900" dirty="0"/>
                     </a:p>
                   </a:txBody>
-                  <a:tcPr marL="91440" marR="91440" marT="45720" marB="45720">
+                  <a:tcPr>
                     <a:lnL w="6350" cap="flat" cmpd="sng" algn="ctr">
                       <a:solidFill>
                         <a:srgbClr val="CBD5E1"/>
@@ -3672,7 +3337,7 @@
                     <a:bodyPr/>
                     <a:lstStyle/>
                     <a:p>
-                      <a:pPr indent="0" marL="0">
+                      <a:pPr marL="0" indent="0">
                         <a:buNone/>
                       </a:pPr>
                       <a:r>
@@ -3686,7 +3351,7 @@
                       <a:endParaRPr lang="en-US" sz="900" dirty="0"/>
                     </a:p>
                   </a:txBody>
-                  <a:tcPr marL="91440" marR="91440" marT="45720" marB="45720">
+                  <a:tcPr>
                     <a:lnL w="6350" cap="flat" cmpd="sng" algn="ctr">
                       <a:solidFill>
                         <a:srgbClr val="CBD5E1"/>
@@ -3728,6 +3393,11 @@
                     </a:solidFill>
                   </a:tcPr>
                 </a:tc>
+                <a:extLst>
+                  <a:ext uri="{0D108BD9-81ED-4DB2-BD59-A6C34878D82A}">
+                    <a16:rowId xmlns:a16="http://schemas.microsoft.com/office/drawing/2014/main" val="10003"/>
+                  </a:ext>
+                </a:extLst>
               </a:tr>
               <a:tr h="326571">
                 <a:tc>
@@ -3735,7 +3405,7 @@
                     <a:bodyPr/>
                     <a:lstStyle/>
                     <a:p>
-                      <a:pPr indent="0" marL="0">
+                      <a:pPr marL="0" indent="0">
                         <a:buNone/>
                       </a:pPr>
                       <a:r>
@@ -3749,7 +3419,7 @@
                       <a:endParaRPr lang="en-US" sz="900" dirty="0"/>
                     </a:p>
                   </a:txBody>
-                  <a:tcPr marL="91440" marR="91440" marT="45720" marB="45720">
+                  <a:tcPr>
                     <a:lnL w="6350" cap="flat" cmpd="sng" algn="ctr">
                       <a:solidFill>
                         <a:srgbClr val="CBD5E1"/>
@@ -3796,7 +3466,7 @@
                     <a:bodyPr/>
                     <a:lstStyle/>
                     <a:p>
-                      <a:pPr indent="0" marL="0">
+                      <a:pPr marL="0" indent="0">
                         <a:buNone/>
                       </a:pPr>
                       <a:r>
@@ -3810,7 +3480,7 @@
                       <a:endParaRPr lang="en-US" sz="900" dirty="0"/>
                     </a:p>
                   </a:txBody>
-                  <a:tcPr marL="91440" marR="91440" marT="45720" marB="45720">
+                  <a:tcPr>
                     <a:lnL w="6350" cap="flat" cmpd="sng" algn="ctr">
                       <a:solidFill>
                         <a:srgbClr val="CBD5E1"/>
@@ -3852,6 +3522,11 @@
                     </a:solidFill>
                   </a:tcPr>
                 </a:tc>
+                <a:extLst>
+                  <a:ext uri="{0D108BD9-81ED-4DB2-BD59-A6C34878D82A}">
+                    <a16:rowId xmlns:a16="http://schemas.microsoft.com/office/drawing/2014/main" val="10004"/>
+                  </a:ext>
+                </a:extLst>
               </a:tr>
               <a:tr h="326571">
                 <a:tc>
@@ -3859,7 +3534,7 @@
                     <a:bodyPr/>
                     <a:lstStyle/>
                     <a:p>
-                      <a:pPr indent="0" marL="0">
+                      <a:pPr marL="0" indent="0">
                         <a:buNone/>
                       </a:pPr>
                       <a:r>
@@ -3873,7 +3548,7 @@
                       <a:endParaRPr lang="en-US" sz="900" dirty="0"/>
                     </a:p>
                   </a:txBody>
-                  <a:tcPr marL="91440" marR="91440" marT="45720" marB="45720">
+                  <a:tcPr>
                     <a:lnL w="6350" cap="flat" cmpd="sng" algn="ctr">
                       <a:solidFill>
                         <a:srgbClr val="CBD5E1"/>
@@ -3920,7 +3595,7 @@
                     <a:bodyPr/>
                     <a:lstStyle/>
                     <a:p>
-                      <a:pPr indent="0" marL="0">
+                      <a:pPr marL="0" indent="0">
                         <a:buNone/>
                       </a:pPr>
                       <a:r>
@@ -3934,7 +3609,7 @@
                       <a:endParaRPr lang="en-US" sz="900" dirty="0"/>
                     </a:p>
                   </a:txBody>
-                  <a:tcPr marL="91440" marR="91440" marT="45720" marB="45720">
+                  <a:tcPr>
                     <a:lnL w="6350" cap="flat" cmpd="sng" algn="ctr">
                       <a:solidFill>
                         <a:srgbClr val="CBD5E1"/>
@@ -3976,6 +3651,11 @@
                     </a:solidFill>
                   </a:tcPr>
                 </a:tc>
+                <a:extLst>
+                  <a:ext uri="{0D108BD9-81ED-4DB2-BD59-A6C34878D82A}">
+                    <a16:rowId xmlns:a16="http://schemas.microsoft.com/office/drawing/2014/main" val="10005"/>
+                  </a:ext>
+                </a:extLst>
               </a:tr>
               <a:tr h="326571">
                 <a:tc>
@@ -3983,7 +3663,7 @@
                     <a:bodyPr/>
                     <a:lstStyle/>
                     <a:p>
-                      <a:pPr indent="0" marL="0">
+                      <a:pPr marL="0" indent="0">
                         <a:buNone/>
                       </a:pPr>
                       <a:r>
@@ -3997,7 +3677,7 @@
                       <a:endParaRPr lang="en-US" sz="900" dirty="0"/>
                     </a:p>
                   </a:txBody>
-                  <a:tcPr marL="91440" marR="91440" marT="45720" marB="45720">
+                  <a:tcPr>
                     <a:lnL w="6350" cap="flat" cmpd="sng" algn="ctr">
                       <a:solidFill>
                         <a:srgbClr val="CBD5E1"/>
@@ -4044,7 +3724,7 @@
                     <a:bodyPr/>
                     <a:lstStyle/>
                     <a:p>
-                      <a:pPr indent="0" marL="0">
+                      <a:pPr marL="0" indent="0">
                         <a:buNone/>
                       </a:pPr>
                       <a:r>
@@ -4058,7 +3738,7 @@
                       <a:endParaRPr lang="en-US" sz="900" dirty="0"/>
                     </a:p>
                   </a:txBody>
-                  <a:tcPr marL="91440" marR="91440" marT="45720" marB="45720">
+                  <a:tcPr>
                     <a:lnL w="6350" cap="flat" cmpd="sng" algn="ctr">
                       <a:solidFill>
                         <a:srgbClr val="CBD5E1"/>
@@ -4100,6 +3780,11 @@
                     </a:solidFill>
                   </a:tcPr>
                 </a:tc>
+                <a:extLst>
+                  <a:ext uri="{0D108BD9-81ED-4DB2-BD59-A6C34878D82A}">
+                    <a16:rowId xmlns:a16="http://schemas.microsoft.com/office/drawing/2014/main" val="10006"/>
+                  </a:ext>
+                </a:extLst>
               </a:tr>
             </a:tbl>
           </a:graphicData>
@@ -4107,80 +3792,14 @@
       </p:graphicFrame>
       <p:sp>
         <p:nvSpPr>
-          <p:cNvPr id="7" name="Shape 4"/>
-          <p:cNvSpPr/>
-          <p:nvPr/>
-        </p:nvSpPr>
-        <p:spPr>
-          <a:xfrm>
-            <a:off x="4572000" y="1024128"/>
-            <a:ext cx="1463040" cy="256032"/>
-          </a:xfrm>
-          <a:prstGeom prst="roundRect">
-            <a:avLst>
-              <a:gd name="adj" fmla="val 17857"/>
-            </a:avLst>
-          </a:prstGeom>
-          <a:solidFill>
-            <a:srgbClr val="0D7377"/>
-          </a:solidFill>
-          <a:ln w="12700">
-            <a:solidFill>
-              <a:srgbClr val="0D7377"/>
-            </a:solidFill>
-            <a:prstDash val="solid"/>
-          </a:ln>
-        </p:spPr>
-      </p:sp>
-      <p:sp>
-        <p:nvSpPr>
-          <p:cNvPr id="8" name="Text 5"/>
-          <p:cNvSpPr/>
-          <p:nvPr/>
-        </p:nvSpPr>
-        <p:spPr>
-          <a:xfrm>
-            <a:off x="4572000" y="1024128"/>
-            <a:ext cx="1463040" cy="256032"/>
-          </a:xfrm>
-          <a:prstGeom prst="rect">
-            <a:avLst/>
-          </a:prstGeom>
-          <a:noFill/>
-          <a:ln/>
-        </p:spPr>
-        <p:txBody>
-          <a:bodyPr wrap="square" lIns="0" tIns="0" rIns="0" bIns="0" rtlCol="0" anchor="ctr"/>
-          <a:lstStyle/>
-          <a:p>
-            <a:pPr algn="ctr" indent="0" marL="0">
-              <a:buNone/>
-            </a:pPr>
-            <a:r>
-              <a:rPr lang="en-US" sz="900" b="1" dirty="0">
-                <a:solidFill>
-                  <a:srgbClr val="FFFFFF"/>
-                </a:solidFill>
-                <a:latin typeface="Calibri" pitchFamily="34" charset="0"/>
-                <a:ea typeface="Calibri" pitchFamily="34" charset="-122"/>
-                <a:cs typeface="Calibri" pitchFamily="34" charset="-120"/>
-              </a:rPr>
-              <a:t>Python</a:t>
-            </a:r>
-            <a:endParaRPr lang="en-US" sz="900" dirty="0"/>
-          </a:p>
-        </p:txBody>
-      </p:sp>
-      <p:sp>
-        <p:nvSpPr>
           <p:cNvPr id="9" name="Shape 6"/>
           <p:cNvSpPr/>
           <p:nvPr/>
         </p:nvSpPr>
         <p:spPr>
           <a:xfrm>
-            <a:off x="4572000" y="1325880"/>
-            <a:ext cx="4251960" cy="3520440"/>
+            <a:off x="4572000" y="816964"/>
+            <a:ext cx="4459574" cy="3927423"/>
           </a:xfrm>
           <a:prstGeom prst="rect">
             <a:avLst/>
@@ -4195,6 +3814,13 @@
             <a:prstDash val="solid"/>
           </a:ln>
         </p:spPr>
+        <p:txBody>
+          <a:bodyPr/>
+          <a:lstStyle/>
+          <a:p>
+            <a:endParaRPr lang="en-US"/>
+          </a:p>
+        </p:txBody>
       </p:sp>
       <p:sp>
         <p:nvSpPr>
@@ -4204,8 +3830,8 @@
         </p:nvSpPr>
         <p:spPr>
           <a:xfrm>
-            <a:off x="4681728" y="1389888"/>
-            <a:ext cx="4032504" cy="3392424"/>
+            <a:off x="4674232" y="934112"/>
+            <a:ext cx="4244915" cy="3392424"/>
           </a:xfrm>
           <a:prstGeom prst="rect">
             <a:avLst/>
@@ -4217,7 +3843,7 @@
           <a:bodyPr wrap="square" lIns="0" tIns="0" rIns="0" bIns="0" rtlCol="0" anchor="t"/>
           <a:lstStyle/>
           <a:p>
-            <a:pPr indent="0" marL="0">
+            <a:pPr marL="0" indent="0">
               <a:buNone/>
             </a:pPr>
             <a:r>
@@ -4234,7 +3860,7 @@
             <a:endParaRPr lang="en-US" sz="950" dirty="0"/>
           </a:p>
           <a:p>
-            <a:pPr indent="0" marL="0">
+            <a:pPr marL="0" indent="0">
               <a:buNone/>
             </a:pPr>
             <a:r>
@@ -4251,7 +3877,7 @@
             <a:endParaRPr lang="en-US" sz="950" dirty="0"/>
           </a:p>
           <a:p>
-            <a:pPr indent="0" marL="0">
+            <a:pPr marL="0" indent="0">
               <a:buNone/>
             </a:pPr>
             <a:r>
@@ -4268,7 +3894,7 @@
             <a:endParaRPr lang="en-US" sz="950" dirty="0"/>
           </a:p>
           <a:p>
-            <a:pPr indent="0" marL="0">
+            <a:pPr marL="0" indent="0">
               <a:buNone/>
             </a:pPr>
             <a:r>
@@ -4285,7 +3911,7 @@
             <a:endParaRPr lang="en-US" sz="950" dirty="0"/>
           </a:p>
           <a:p>
-            <a:pPr indent="0" marL="0">
+            <a:pPr marL="0" indent="0">
               <a:buNone/>
             </a:pPr>
             <a:r>
@@ -4302,7 +3928,7 @@
             <a:endParaRPr lang="en-US" sz="950" dirty="0"/>
           </a:p>
           <a:p>
-            <a:pPr indent="0" marL="0">
+            <a:pPr marL="0" indent="0">
               <a:buNone/>
             </a:pPr>
             <a:r>
@@ -4319,13 +3945,13 @@
             <a:endParaRPr lang="en-US" sz="950" dirty="0"/>
           </a:p>
           <a:p>
-            <a:pPr indent="0" marL="0">
+            <a:pPr marL="0" indent="0">
               <a:buNone/>
             </a:pPr>
             <a:endParaRPr lang="en-US" sz="950" dirty="0"/>
           </a:p>
           <a:p>
-            <a:pPr indent="0" marL="0">
+            <a:pPr marL="0" indent="0">
               <a:buNone/>
             </a:pPr>
             <a:r>
@@ -4342,7 +3968,7 @@
             <a:endParaRPr lang="en-US" sz="950" dirty="0"/>
           </a:p>
           <a:p>
-            <a:pPr indent="0" marL="0">
+            <a:pPr marL="0" indent="0">
               <a:buNone/>
             </a:pPr>
             <a:r>
@@ -4359,7 +3985,7 @@
             <a:endParaRPr lang="en-US" sz="950" dirty="0"/>
           </a:p>
           <a:p>
-            <a:pPr indent="0" marL="0">
+            <a:pPr marL="0" indent="0">
               <a:buNone/>
             </a:pPr>
             <a:r>
@@ -4376,7 +4002,7 @@
             <a:endParaRPr lang="en-US" sz="950" dirty="0"/>
           </a:p>
           <a:p>
-            <a:pPr indent="0" marL="0">
+            <a:pPr marL="0" indent="0">
               <a:buNone/>
             </a:pPr>
             <a:r>
@@ -4393,7 +4019,7 @@
             <a:endParaRPr lang="en-US" sz="950" dirty="0"/>
           </a:p>
           <a:p>
-            <a:pPr indent="0" marL="0">
+            <a:pPr marL="0" indent="0">
               <a:buNone/>
             </a:pPr>
             <a:r>
@@ -4410,7 +4036,7 @@
             <a:endParaRPr lang="en-US" sz="950" dirty="0"/>
           </a:p>
           <a:p>
-            <a:pPr indent="0" marL="0">
+            <a:pPr marL="0" indent="0">
               <a:buNone/>
             </a:pPr>
             <a:r>
@@ -4427,7 +4053,7 @@
             <a:endParaRPr lang="en-US" sz="950" dirty="0"/>
           </a:p>
           <a:p>
-            <a:pPr indent="0" marL="0">
+            <a:pPr marL="0" indent="0">
               <a:buNone/>
             </a:pPr>
             <a:r>
@@ -4444,7 +4070,7 @@
             <a:endParaRPr lang="en-US" sz="950" dirty="0"/>
           </a:p>
           <a:p>
-            <a:pPr indent="0" marL="0">
+            <a:pPr marL="0" indent="0">
               <a:buNone/>
             </a:pPr>
             <a:r>
@@ -4461,13 +4087,13 @@
             <a:endParaRPr lang="en-US" sz="950" dirty="0"/>
           </a:p>
           <a:p>
-            <a:pPr indent="0" marL="0">
+            <a:pPr marL="0" indent="0">
               <a:buNone/>
             </a:pPr>
             <a:endParaRPr lang="en-US" sz="950" dirty="0"/>
           </a:p>
           <a:p>
-            <a:pPr indent="0" marL="0">
+            <a:pPr marL="0" indent="0">
               <a:buNone/>
             </a:pPr>
             <a:r>
@@ -4484,7 +4110,7 @@
             <a:endParaRPr lang="en-US" sz="950" dirty="0"/>
           </a:p>
           <a:p>
-            <a:pPr indent="0" marL="0">
+            <a:pPr marL="0" indent="0">
               <a:buNone/>
             </a:pPr>
             <a:r>
@@ -4501,13 +4127,13 @@
             <a:endParaRPr lang="en-US" sz="950" dirty="0"/>
           </a:p>
           <a:p>
-            <a:pPr indent="0" marL="0">
+            <a:pPr marL="0" indent="0">
               <a:buNone/>
             </a:pPr>
             <a:endParaRPr lang="en-US" sz="950" dirty="0"/>
           </a:p>
           <a:p>
-            <a:pPr indent="0" marL="0">
+            <a:pPr marL="0" indent="0">
               <a:buNone/>
             </a:pPr>
             <a:r>
@@ -4524,7 +4150,7 @@
             <a:endParaRPr lang="en-US" sz="950" dirty="0"/>
           </a:p>
           <a:p>
-            <a:pPr indent="0" marL="0">
+            <a:pPr marL="0" indent="0">
               <a:buNone/>
             </a:pPr>
             <a:r>
@@ -4541,7 +4167,7 @@
             <a:endParaRPr lang="en-US" sz="950" dirty="0"/>
           </a:p>
           <a:p>
-            <a:pPr indent="0" marL="0">
+            <a:pPr marL="0" indent="0">
               <a:buNone/>
             </a:pPr>
             <a:r>
@@ -4558,7 +4184,7 @@
             <a:endParaRPr lang="en-US" sz="950" dirty="0"/>
           </a:p>
           <a:p>
-            <a:pPr indent="0" marL="0">
+            <a:pPr marL="0" indent="0">
               <a:buNone/>
             </a:pPr>
             <a:r>
@@ -4575,7 +4201,7 @@
             <a:endParaRPr lang="en-US" sz="950" dirty="0"/>
           </a:p>
           <a:p>
-            <a:pPr indent="0" marL="0">
+            <a:pPr marL="0" indent="0">
               <a:buNone/>
             </a:pPr>
             <a:r>
@@ -4614,7 +4240,7 @@
           <a:bodyPr wrap="square" lIns="0" tIns="0" rIns="0" bIns="0" rtlCol="0" anchor="ctr"/>
           <a:lstStyle/>
           <a:p>
-            <a:pPr indent="0" marL="0">
+            <a:pPr marL="0" indent="0">
               <a:buNone/>
             </a:pPr>
             <a:r>
@@ -4648,6 +4274,7 @@
         <a:solidFill>
           <a:srgbClr val="F5F7FA"/>
         </a:solidFill>
+        <a:effectLst/>
       </p:bgPr>
     </p:bg>
     <p:spTree>
@@ -4688,6 +4315,13 @@
             <a:prstDash val="solid"/>
           </a:ln>
         </p:spPr>
+        <p:txBody>
+          <a:bodyPr/>
+          <a:lstStyle/>
+          <a:p>
+            <a:endParaRPr lang="en-US"/>
+          </a:p>
+        </p:txBody>
       </p:sp>
       <p:sp>
         <p:nvSpPr>
@@ -4710,7 +4344,7 @@
           <a:bodyPr wrap="square" lIns="0" tIns="0" rIns="0" bIns="0" rtlCol="0" anchor="ctr"/>
           <a:lstStyle/>
           <a:p>
-            <a:pPr indent="0" marL="0">
+            <a:pPr marL="0" indent="0">
               <a:buNone/>
             </a:pPr>
             <a:r>
@@ -4749,7 +4383,7 @@
           <a:bodyPr wrap="square" lIns="0" tIns="0" rIns="0" bIns="0" rtlCol="0" anchor="ctr"/>
           <a:lstStyle/>
           <a:p>
-            <a:pPr indent="0" marL="0">
+            <a:pPr marL="0" indent="0">
               <a:buNone/>
             </a:pPr>
             <a:r>
@@ -4791,13 +4425,20 @@
             <a:prstDash val="solid"/>
           </a:ln>
           <a:effectLst>
-            <a:outerShdw sx="100000" sy="100000" kx="0" ky="0" algn="bl" rotWithShape="0" blurRad="101600" dist="38100" dir="8100000">
+            <a:outerShdw blurRad="101600" dist="38100" dir="8100000" algn="bl" rotWithShape="0">
               <a:srgbClr val="000000">
                 <a:alpha val="10000"/>
               </a:srgbClr>
             </a:outerShdw>
           </a:effectLst>
         </p:spPr>
+        <p:txBody>
+          <a:bodyPr/>
+          <a:lstStyle/>
+          <a:p>
+            <a:endParaRPr lang="en-US"/>
+          </a:p>
+        </p:txBody>
       </p:sp>
       <p:sp>
         <p:nvSpPr>
@@ -4823,6 +4464,13 @@
             <a:prstDash val="solid"/>
           </a:ln>
         </p:spPr>
+        <p:txBody>
+          <a:bodyPr/>
+          <a:lstStyle/>
+          <a:p>
+            <a:endParaRPr lang="en-US"/>
+          </a:p>
+        </p:txBody>
       </p:sp>
       <p:sp>
         <p:nvSpPr>
@@ -4845,7 +4493,7 @@
           <a:bodyPr wrap="square" lIns="0" tIns="0" rIns="0" bIns="0" rtlCol="0" anchor="ctr"/>
           <a:lstStyle/>
           <a:p>
-            <a:pPr indent="0" marL="0">
+            <a:pPr marL="0" indent="0">
               <a:buNone/>
             </a:pPr>
             <a:r>
@@ -4884,7 +4532,7 @@
           <a:bodyPr wrap="square" lIns="0" tIns="0" rIns="0" bIns="0" rtlCol="0" anchor="ctr"/>
           <a:lstStyle/>
           <a:p>
-            <a:pPr indent="0" marL="0">
+            <a:pPr marL="0" indent="0">
               <a:buNone/>
             </a:pPr>
             <a:r>
@@ -4923,7 +4571,7 @@
           <a:bodyPr wrap="square" lIns="0" tIns="0" rIns="0" bIns="0" rtlCol="0" anchor="t"/>
           <a:lstStyle/>
           <a:p>
-            <a:pPr indent="0" marL="0">
+            <a:pPr marL="0" indent="0">
               <a:buNone/>
             </a:pPr>
             <a:r>
@@ -4965,13 +4613,20 @@
             <a:prstDash val="solid"/>
           </a:ln>
           <a:effectLst>
-            <a:outerShdw sx="100000" sy="100000" kx="0" ky="0" algn="bl" rotWithShape="0" blurRad="101600" dist="38100" dir="8100000">
+            <a:outerShdw blurRad="101600" dist="38100" dir="8100000" algn="bl" rotWithShape="0">
               <a:srgbClr val="000000">
                 <a:alpha val="10000"/>
               </a:srgbClr>
             </a:outerShdw>
           </a:effectLst>
         </p:spPr>
+        <p:txBody>
+          <a:bodyPr/>
+          <a:lstStyle/>
+          <a:p>
+            <a:endParaRPr lang="en-US"/>
+          </a:p>
+        </p:txBody>
       </p:sp>
       <p:sp>
         <p:nvSpPr>
@@ -4997,6 +4652,13 @@
             <a:prstDash val="solid"/>
           </a:ln>
         </p:spPr>
+        <p:txBody>
+          <a:bodyPr/>
+          <a:lstStyle/>
+          <a:p>
+            <a:endParaRPr lang="en-US"/>
+          </a:p>
+        </p:txBody>
       </p:sp>
       <p:sp>
         <p:nvSpPr>
@@ -5019,7 +4681,7 @@
           <a:bodyPr wrap="square" lIns="0" tIns="0" rIns="0" bIns="0" rtlCol="0" anchor="ctr"/>
           <a:lstStyle/>
           <a:p>
-            <a:pPr indent="0" marL="0">
+            <a:pPr marL="0" indent="0">
               <a:buNone/>
             </a:pPr>
             <a:r>
@@ -5058,7 +4720,7 @@
           <a:bodyPr wrap="square" lIns="0" tIns="0" rIns="0" bIns="0" rtlCol="0" anchor="ctr"/>
           <a:lstStyle/>
           <a:p>
-            <a:pPr indent="0" marL="0">
+            <a:pPr marL="0" indent="0">
               <a:buNone/>
             </a:pPr>
             <a:r>
@@ -5097,7 +4759,7 @@
           <a:bodyPr wrap="square" lIns="0" tIns="0" rIns="0" bIns="0" rtlCol="0" anchor="t"/>
           <a:lstStyle/>
           <a:p>
-            <a:pPr indent="0" marL="0">
+            <a:pPr marL="0" indent="0">
               <a:buNone/>
             </a:pPr>
             <a:r>
@@ -5139,13 +4801,20 @@
             <a:prstDash val="solid"/>
           </a:ln>
           <a:effectLst>
-            <a:outerShdw sx="100000" sy="100000" kx="0" ky="0" algn="bl" rotWithShape="0" blurRad="101600" dist="38100" dir="8100000">
+            <a:outerShdw blurRad="101600" dist="38100" dir="8100000" algn="bl" rotWithShape="0">
               <a:srgbClr val="000000">
                 <a:alpha val="10000"/>
               </a:srgbClr>
             </a:outerShdw>
           </a:effectLst>
         </p:spPr>
+        <p:txBody>
+          <a:bodyPr/>
+          <a:lstStyle/>
+          <a:p>
+            <a:endParaRPr lang="en-US"/>
+          </a:p>
+        </p:txBody>
       </p:sp>
       <p:sp>
         <p:nvSpPr>
@@ -5171,6 +4840,13 @@
             <a:prstDash val="solid"/>
           </a:ln>
         </p:spPr>
+        <p:txBody>
+          <a:bodyPr/>
+          <a:lstStyle/>
+          <a:p>
+            <a:endParaRPr lang="en-US"/>
+          </a:p>
+        </p:txBody>
       </p:sp>
       <p:sp>
         <p:nvSpPr>
@@ -5193,7 +4869,7 @@
           <a:bodyPr wrap="square" lIns="0" tIns="0" rIns="0" bIns="0" rtlCol="0" anchor="ctr"/>
           <a:lstStyle/>
           <a:p>
-            <a:pPr indent="0" marL="0">
+            <a:pPr marL="0" indent="0">
               <a:buNone/>
             </a:pPr>
             <a:r>
@@ -5232,7 +4908,7 @@
           <a:bodyPr wrap="square" lIns="0" tIns="0" rIns="0" bIns="0" rtlCol="0" anchor="ctr"/>
           <a:lstStyle/>
           <a:p>
-            <a:pPr indent="0" marL="0">
+            <a:pPr marL="0" indent="0">
               <a:buNone/>
             </a:pPr>
             <a:r>
@@ -5271,7 +4947,7 @@
           <a:bodyPr wrap="square" lIns="0" tIns="0" rIns="0" bIns="0" rtlCol="0" anchor="t"/>
           <a:lstStyle/>
           <a:p>
-            <a:pPr indent="0" marL="0">
+            <a:pPr marL="0" indent="0">
               <a:buNone/>
             </a:pPr>
             <a:r>
@@ -5313,13 +4989,20 @@
             <a:prstDash val="solid"/>
           </a:ln>
           <a:effectLst>
-            <a:outerShdw sx="100000" sy="100000" kx="0" ky="0" algn="bl" rotWithShape="0" blurRad="101600" dist="38100" dir="8100000">
+            <a:outerShdw blurRad="101600" dist="38100" dir="8100000" algn="bl" rotWithShape="0">
               <a:srgbClr val="000000">
                 <a:alpha val="10000"/>
               </a:srgbClr>
             </a:outerShdw>
           </a:effectLst>
         </p:spPr>
+        <p:txBody>
+          <a:bodyPr/>
+          <a:lstStyle/>
+          <a:p>
+            <a:endParaRPr lang="en-US"/>
+          </a:p>
+        </p:txBody>
       </p:sp>
       <p:sp>
         <p:nvSpPr>
@@ -5345,6 +5028,13 @@
             <a:prstDash val="solid"/>
           </a:ln>
         </p:spPr>
+        <p:txBody>
+          <a:bodyPr/>
+          <a:lstStyle/>
+          <a:p>
+            <a:endParaRPr lang="en-US"/>
+          </a:p>
+        </p:txBody>
       </p:sp>
       <p:sp>
         <p:nvSpPr>
@@ -5367,7 +5057,7 @@
           <a:bodyPr wrap="square" lIns="0" tIns="0" rIns="0" bIns="0" rtlCol="0" anchor="ctr"/>
           <a:lstStyle/>
           <a:p>
-            <a:pPr indent="0" marL="0">
+            <a:pPr marL="0" indent="0">
               <a:buNone/>
             </a:pPr>
             <a:r>
@@ -5406,7 +5096,7 @@
           <a:bodyPr wrap="square" lIns="0" tIns="0" rIns="0" bIns="0" rtlCol="0" anchor="ctr"/>
           <a:lstStyle/>
           <a:p>
-            <a:pPr indent="0" marL="0">
+            <a:pPr marL="0" indent="0">
               <a:buNone/>
             </a:pPr>
             <a:r>
@@ -5445,7 +5135,7 @@
           <a:bodyPr wrap="square" lIns="0" tIns="0" rIns="0" bIns="0" rtlCol="0" anchor="t"/>
           <a:lstStyle/>
           <a:p>
-            <a:pPr indent="0" marL="0">
+            <a:pPr marL="0" indent="0">
               <a:buNone/>
             </a:pPr>
             <a:r>
@@ -5479,6 +5169,7 @@
         <a:solidFill>
           <a:srgbClr val="F5F7FA"/>
         </a:solidFill>
+        <a:effectLst/>
       </p:bgPr>
     </p:bg>
     <p:spTree>
@@ -5519,6 +5210,13 @@
             <a:prstDash val="solid"/>
           </a:ln>
         </p:spPr>
+        <p:txBody>
+          <a:bodyPr/>
+          <a:lstStyle/>
+          <a:p>
+            <a:endParaRPr lang="en-US"/>
+          </a:p>
+        </p:txBody>
       </p:sp>
       <p:sp>
         <p:nvSpPr>
@@ -5541,7 +5239,7 @@
           <a:bodyPr wrap="square" lIns="0" tIns="0" rIns="0" bIns="0" rtlCol="0" anchor="ctr"/>
           <a:lstStyle/>
           <a:p>
-            <a:pPr indent="0" marL="0">
+            <a:pPr marL="0" indent="0">
               <a:buNone/>
             </a:pPr>
             <a:r>
@@ -5580,7 +5278,7 @@
           <a:bodyPr wrap="square" lIns="0" tIns="0" rIns="0" bIns="0" rtlCol="0" anchor="ctr"/>
           <a:lstStyle/>
           <a:p>
-            <a:pPr indent="0" marL="0">
+            <a:pPr marL="0" indent="0">
               <a:buNone/>
             </a:pPr>
             <a:r>
@@ -5622,13 +5320,20 @@
             <a:prstDash val="solid"/>
           </a:ln>
           <a:effectLst>
-            <a:outerShdw sx="100000" sy="100000" kx="0" ky="0" algn="bl" rotWithShape="0" blurRad="101600" dist="38100" dir="8100000">
+            <a:outerShdw blurRad="101600" dist="38100" dir="8100000" algn="bl" rotWithShape="0">
               <a:srgbClr val="000000">
                 <a:alpha val="10000"/>
               </a:srgbClr>
             </a:outerShdw>
           </a:effectLst>
         </p:spPr>
+        <p:txBody>
+          <a:bodyPr/>
+          <a:lstStyle/>
+          <a:p>
+            <a:endParaRPr lang="en-US"/>
+          </a:p>
+        </p:txBody>
       </p:sp>
       <p:sp>
         <p:nvSpPr>
@@ -5654,6 +5359,13 @@
             <a:prstDash val="solid"/>
           </a:ln>
         </p:spPr>
+        <p:txBody>
+          <a:bodyPr/>
+          <a:lstStyle/>
+          <a:p>
+            <a:endParaRPr lang="en-US"/>
+          </a:p>
+        </p:txBody>
       </p:sp>
       <p:sp>
         <p:nvSpPr>
@@ -5676,7 +5388,7 @@
           <a:bodyPr wrap="square" lIns="0" tIns="0" rIns="0" bIns="0" rtlCol="0" anchor="ctr"/>
           <a:lstStyle/>
           <a:p>
-            <a:pPr algn="ctr" indent="0" marL="0">
+            <a:pPr marL="0" indent="0" algn="ctr">
               <a:buNone/>
             </a:pPr>
             <a:r>
@@ -5712,7 +5424,7 @@
           <a:bodyPr wrap="square" lIns="0" tIns="0" rIns="0" bIns="0" rtlCol="0" anchor="ctr"/>
           <a:lstStyle/>
           <a:p>
-            <a:pPr indent="0" marL="0">
+            <a:pPr marL="0" indent="0">
               <a:buNone/>
             </a:pPr>
             <a:r>
@@ -5751,7 +5463,7 @@
           <a:bodyPr wrap="square" lIns="0" tIns="0" rIns="0" bIns="0" rtlCol="0" anchor="ctr"/>
           <a:lstStyle/>
           <a:p>
-            <a:pPr indent="0" marL="0">
+            <a:pPr marL="0" indent="0">
               <a:buNone/>
             </a:pPr>
             <a:r>
@@ -5793,13 +5505,20 @@
             <a:prstDash val="solid"/>
           </a:ln>
           <a:effectLst>
-            <a:outerShdw sx="100000" sy="100000" kx="0" ky="0" algn="bl" rotWithShape="0" blurRad="101600" dist="38100" dir="8100000">
+            <a:outerShdw blurRad="101600" dist="38100" dir="8100000" algn="bl" rotWithShape="0">
               <a:srgbClr val="000000">
                 <a:alpha val="10000"/>
               </a:srgbClr>
             </a:outerShdw>
           </a:effectLst>
         </p:spPr>
+        <p:txBody>
+          <a:bodyPr/>
+          <a:lstStyle/>
+          <a:p>
+            <a:endParaRPr lang="en-US"/>
+          </a:p>
+        </p:txBody>
       </p:sp>
       <p:sp>
         <p:nvSpPr>
@@ -5825,6 +5544,13 @@
             <a:prstDash val="solid"/>
           </a:ln>
         </p:spPr>
+        <p:txBody>
+          <a:bodyPr/>
+          <a:lstStyle/>
+          <a:p>
+            <a:endParaRPr lang="en-US"/>
+          </a:p>
+        </p:txBody>
       </p:sp>
       <p:sp>
         <p:nvSpPr>
@@ -5847,7 +5573,7 @@
           <a:bodyPr wrap="square" lIns="0" tIns="0" rIns="0" bIns="0" rtlCol="0" anchor="ctr"/>
           <a:lstStyle/>
           <a:p>
-            <a:pPr algn="ctr" indent="0" marL="0">
+            <a:pPr marL="0" indent="0" algn="ctr">
               <a:buNone/>
             </a:pPr>
             <a:r>
@@ -5883,7 +5609,7 @@
           <a:bodyPr wrap="square" lIns="0" tIns="0" rIns="0" bIns="0" rtlCol="0" anchor="ctr"/>
           <a:lstStyle/>
           <a:p>
-            <a:pPr indent="0" marL="0">
+            <a:pPr marL="0" indent="0">
               <a:buNone/>
             </a:pPr>
             <a:r>
@@ -5922,7 +5648,7 @@
           <a:bodyPr wrap="square" lIns="0" tIns="0" rIns="0" bIns="0" rtlCol="0" anchor="ctr"/>
           <a:lstStyle/>
           <a:p>
-            <a:pPr indent="0" marL="0">
+            <a:pPr marL="0" indent="0">
               <a:buNone/>
             </a:pPr>
             <a:r>
@@ -5964,13 +5690,20 @@
             <a:prstDash val="solid"/>
           </a:ln>
           <a:effectLst>
-            <a:outerShdw sx="100000" sy="100000" kx="0" ky="0" algn="bl" rotWithShape="0" blurRad="101600" dist="38100" dir="8100000">
+            <a:outerShdw blurRad="101600" dist="38100" dir="8100000" algn="bl" rotWithShape="0">
               <a:srgbClr val="000000">
                 <a:alpha val="10000"/>
               </a:srgbClr>
             </a:outerShdw>
           </a:effectLst>
         </p:spPr>
+        <p:txBody>
+          <a:bodyPr/>
+          <a:lstStyle/>
+          <a:p>
+            <a:endParaRPr lang="en-US"/>
+          </a:p>
+        </p:txBody>
       </p:sp>
       <p:sp>
         <p:nvSpPr>
@@ -5996,6 +5729,13 @@
             <a:prstDash val="solid"/>
           </a:ln>
         </p:spPr>
+        <p:txBody>
+          <a:bodyPr/>
+          <a:lstStyle/>
+          <a:p>
+            <a:endParaRPr lang="en-US"/>
+          </a:p>
+        </p:txBody>
       </p:sp>
       <p:sp>
         <p:nvSpPr>
@@ -6018,7 +5758,7 @@
           <a:bodyPr wrap="square" lIns="0" tIns="0" rIns="0" bIns="0" rtlCol="0" anchor="ctr"/>
           <a:lstStyle/>
           <a:p>
-            <a:pPr algn="ctr" indent="0" marL="0">
+            <a:pPr marL="0" indent="0" algn="ctr">
               <a:buNone/>
             </a:pPr>
             <a:r>
@@ -6054,7 +5794,7 @@
           <a:bodyPr wrap="square" lIns="0" tIns="0" rIns="0" bIns="0" rtlCol="0" anchor="ctr"/>
           <a:lstStyle/>
           <a:p>
-            <a:pPr indent="0" marL="0">
+            <a:pPr marL="0" indent="0">
               <a:buNone/>
             </a:pPr>
             <a:r>
@@ -6093,7 +5833,7 @@
           <a:bodyPr wrap="square" lIns="0" tIns="0" rIns="0" bIns="0" rtlCol="0" anchor="ctr"/>
           <a:lstStyle/>
           <a:p>
-            <a:pPr indent="0" marL="0">
+            <a:pPr marL="0" indent="0">
               <a:buNone/>
             </a:pPr>
             <a:r>
@@ -6135,13 +5875,20 @@
             <a:prstDash val="solid"/>
           </a:ln>
           <a:effectLst>
-            <a:outerShdw sx="100000" sy="100000" kx="0" ky="0" algn="bl" rotWithShape="0" blurRad="101600" dist="38100" dir="8100000">
+            <a:outerShdw blurRad="101600" dist="38100" dir="8100000" algn="bl" rotWithShape="0">
               <a:srgbClr val="000000">
                 <a:alpha val="10000"/>
               </a:srgbClr>
             </a:outerShdw>
           </a:effectLst>
         </p:spPr>
+        <p:txBody>
+          <a:bodyPr/>
+          <a:lstStyle/>
+          <a:p>
+            <a:endParaRPr lang="en-US"/>
+          </a:p>
+        </p:txBody>
       </p:sp>
       <p:sp>
         <p:nvSpPr>
@@ -6167,6 +5914,13 @@
             <a:prstDash val="solid"/>
           </a:ln>
         </p:spPr>
+        <p:txBody>
+          <a:bodyPr/>
+          <a:lstStyle/>
+          <a:p>
+            <a:endParaRPr lang="en-US"/>
+          </a:p>
+        </p:txBody>
       </p:sp>
       <p:sp>
         <p:nvSpPr>
@@ -6189,7 +5943,7 @@
           <a:bodyPr wrap="square" lIns="0" tIns="0" rIns="0" bIns="0" rtlCol="0" anchor="ctr"/>
           <a:lstStyle/>
           <a:p>
-            <a:pPr algn="ctr" indent="0" marL="0">
+            <a:pPr marL="0" indent="0" algn="ctr">
               <a:buNone/>
             </a:pPr>
             <a:r>
@@ -6225,7 +5979,7 @@
           <a:bodyPr wrap="square" lIns="0" tIns="0" rIns="0" bIns="0" rtlCol="0" anchor="ctr"/>
           <a:lstStyle/>
           <a:p>
-            <a:pPr indent="0" marL="0">
+            <a:pPr marL="0" indent="0">
               <a:buNone/>
             </a:pPr>
             <a:r>
@@ -6264,7 +6018,7 @@
           <a:bodyPr wrap="square" lIns="0" tIns="0" rIns="0" bIns="0" rtlCol="0" anchor="ctr"/>
           <a:lstStyle/>
           <a:p>
-            <a:pPr indent="0" marL="0">
+            <a:pPr marL="0" indent="0">
               <a:buNone/>
             </a:pPr>
             <a:r>
@@ -6306,13 +6060,20 @@
             <a:prstDash val="solid"/>
           </a:ln>
           <a:effectLst>
-            <a:outerShdw sx="100000" sy="100000" kx="0" ky="0" algn="bl" rotWithShape="0" blurRad="101600" dist="38100" dir="8100000">
+            <a:outerShdw blurRad="101600" dist="38100" dir="8100000" algn="bl" rotWithShape="0">
               <a:srgbClr val="000000">
                 <a:alpha val="10000"/>
               </a:srgbClr>
             </a:outerShdw>
           </a:effectLst>
         </p:spPr>
+        <p:txBody>
+          <a:bodyPr/>
+          <a:lstStyle/>
+          <a:p>
+            <a:endParaRPr lang="en-US"/>
+          </a:p>
+        </p:txBody>
       </p:sp>
       <p:sp>
         <p:nvSpPr>
@@ -6338,6 +6099,13 @@
             <a:prstDash val="solid"/>
           </a:ln>
         </p:spPr>
+        <p:txBody>
+          <a:bodyPr/>
+          <a:lstStyle/>
+          <a:p>
+            <a:endParaRPr lang="en-US"/>
+          </a:p>
+        </p:txBody>
       </p:sp>
       <p:sp>
         <p:nvSpPr>
@@ -6360,7 +6128,7 @@
           <a:bodyPr wrap="square" lIns="0" tIns="0" rIns="0" bIns="0" rtlCol="0" anchor="ctr"/>
           <a:lstStyle/>
           <a:p>
-            <a:pPr algn="ctr" indent="0" marL="0">
+            <a:pPr marL="0" indent="0" algn="ctr">
               <a:buNone/>
             </a:pPr>
             <a:r>
@@ -6396,7 +6164,7 @@
           <a:bodyPr wrap="square" lIns="0" tIns="0" rIns="0" bIns="0" rtlCol="0" anchor="ctr"/>
           <a:lstStyle/>
           <a:p>
-            <a:pPr indent="0" marL="0">
+            <a:pPr marL="0" indent="0">
               <a:buNone/>
             </a:pPr>
             <a:r>
@@ -6435,7 +6203,7 @@
           <a:bodyPr wrap="square" lIns="0" tIns="0" rIns="0" bIns="0" rtlCol="0" anchor="ctr"/>
           <a:lstStyle/>
           <a:p>
-            <a:pPr indent="0" marL="0">
+            <a:pPr marL="0" indent="0">
               <a:buNone/>
             </a:pPr>
             <a:r>
@@ -6469,6 +6237,7 @@
         <a:solidFill>
           <a:srgbClr val="F5F7FA"/>
         </a:solidFill>
+        <a:effectLst/>
       </p:bgPr>
     </p:bg>
     <p:spTree>
@@ -6509,6 +6278,13 @@
             <a:prstDash val="solid"/>
           </a:ln>
         </p:spPr>
+        <p:txBody>
+          <a:bodyPr/>
+          <a:lstStyle/>
+          <a:p>
+            <a:endParaRPr lang="en-US"/>
+          </a:p>
+        </p:txBody>
       </p:sp>
       <p:sp>
         <p:nvSpPr>
@@ -6531,7 +6307,7 @@
           <a:bodyPr wrap="square" lIns="0" tIns="0" rIns="0" bIns="0" rtlCol="0" anchor="ctr"/>
           <a:lstStyle/>
           <a:p>
-            <a:pPr indent="0" marL="0">
+            <a:pPr marL="0" indent="0">
               <a:buNone/>
             </a:pPr>
             <a:r>
@@ -6546,45 +6322,6 @@
               <a:t>Workshop Agenda</a:t>
             </a:r>
             <a:endParaRPr lang="en-US" sz="2000" dirty="0"/>
-          </a:p>
-        </p:txBody>
-      </p:sp>
-      <p:sp>
-        <p:nvSpPr>
-          <p:cNvPr id="4" name="Text 2"/>
-          <p:cNvSpPr/>
-          <p:nvPr/>
-        </p:nvSpPr>
-        <p:spPr>
-          <a:xfrm>
-            <a:off x="320040" y="713232"/>
-            <a:ext cx="8503920" cy="320040"/>
-          </a:xfrm>
-          <a:prstGeom prst="rect">
-            <a:avLst/>
-          </a:prstGeom>
-          <a:noFill/>
-          <a:ln/>
-        </p:spPr>
-        <p:txBody>
-          <a:bodyPr wrap="square" lIns="0" tIns="0" rIns="0" bIns="0" rtlCol="0" anchor="ctr"/>
-          <a:lstStyle/>
-          <a:p>
-            <a:pPr indent="0" marL="0">
-              <a:buNone/>
-            </a:pPr>
-            <a:r>
-              <a:rPr lang="en-US" sz="1200" b="1" dirty="0">
-                <a:solidFill>
-                  <a:srgbClr val="0D7377"/>
-                </a:solidFill>
-                <a:latin typeface="Calibri" pitchFamily="34" charset="0"/>
-                <a:ea typeface="Calibri" pitchFamily="34" charset="-122"/>
-                <a:cs typeface="Calibri" pitchFamily="34" charset="-120"/>
-              </a:rPr>
-              <a:t>80-minute session</a:t>
-            </a:r>
-            <a:endParaRPr lang="en-US" sz="1200" dirty="0"/>
           </a:p>
         </p:txBody>
       </p:sp>
@@ -6612,6 +6349,13 @@
             <a:prstDash val="solid"/>
           </a:ln>
         </p:spPr>
+        <p:txBody>
+          <a:bodyPr/>
+          <a:lstStyle/>
+          <a:p>
+            <a:endParaRPr lang="en-US"/>
+          </a:p>
+        </p:txBody>
       </p:sp>
       <p:sp>
         <p:nvSpPr>
@@ -6634,7 +6378,7 @@
           <a:bodyPr wrap="square" lIns="0" tIns="0" rIns="0" bIns="0" rtlCol="0" anchor="ctr"/>
           <a:lstStyle/>
           <a:p>
-            <a:pPr algn="ctr" indent="0" marL="0">
+            <a:pPr marL="0" indent="0" algn="ctr">
               <a:buNone/>
             </a:pPr>
             <a:r>
@@ -6643,10 +6387,9 @@
                   <a:srgbClr val="FFFFFF"/>
                 </a:solidFill>
                 <a:latin typeface="Courier New" pitchFamily="34" charset="0"/>
-                <a:ea typeface="Courier New" pitchFamily="34" charset="-122"/>
                 <a:cs typeface="Courier New" pitchFamily="34" charset="-120"/>
               </a:rPr>
-              <a:t>00:00</a:t>
+              <a:t>1</a:t>
             </a:r>
             <a:endParaRPr lang="en-US" sz="1000" dirty="0"/>
           </a:p>
@@ -6673,7 +6416,7 @@
           <a:bodyPr wrap="square" lIns="0" tIns="0" rIns="0" bIns="0" rtlCol="0" anchor="ctr"/>
           <a:lstStyle/>
           <a:p>
-            <a:pPr indent="0" marL="0">
+            <a:pPr marL="0" indent="0">
               <a:buNone/>
             </a:pPr>
             <a:r>
@@ -6712,7 +6455,7 @@
           <a:bodyPr wrap="square" lIns="0" tIns="0" rIns="0" bIns="0" rtlCol="0" anchor="ctr"/>
           <a:lstStyle/>
           <a:p>
-            <a:pPr indent="0" marL="0">
+            <a:pPr marL="0" indent="0">
               <a:buNone/>
             </a:pPr>
             <a:r>
@@ -6754,6 +6497,13 @@
             <a:prstDash val="solid"/>
           </a:ln>
         </p:spPr>
+        <p:txBody>
+          <a:bodyPr/>
+          <a:lstStyle/>
+          <a:p>
+            <a:endParaRPr lang="en-US"/>
+          </a:p>
+        </p:txBody>
       </p:sp>
       <p:sp>
         <p:nvSpPr>
@@ -6776,7 +6526,7 @@
           <a:bodyPr wrap="square" lIns="0" tIns="0" rIns="0" bIns="0" rtlCol="0" anchor="ctr"/>
           <a:lstStyle/>
           <a:p>
-            <a:pPr algn="ctr" indent="0" marL="0">
+            <a:pPr marL="0" indent="0" algn="ctr">
               <a:buNone/>
             </a:pPr>
             <a:r>
@@ -6785,10 +6535,9 @@
                   <a:srgbClr val="FFFFFF"/>
                 </a:solidFill>
                 <a:latin typeface="Courier New" pitchFamily="34" charset="0"/>
-                <a:ea typeface="Courier New" pitchFamily="34" charset="-122"/>
                 <a:cs typeface="Courier New" pitchFamily="34" charset="-120"/>
               </a:rPr>
-              <a:t>00:10</a:t>
+              <a:t>2</a:t>
             </a:r>
             <a:endParaRPr lang="en-US" sz="1000" dirty="0"/>
           </a:p>
@@ -6815,7 +6564,7 @@
           <a:bodyPr wrap="square" lIns="0" tIns="0" rIns="0" bIns="0" rtlCol="0" anchor="ctr"/>
           <a:lstStyle/>
           <a:p>
-            <a:pPr indent="0" marL="0">
+            <a:pPr marL="0" indent="0">
               <a:buNone/>
             </a:pPr>
             <a:r>
@@ -6854,7 +6603,7 @@
           <a:bodyPr wrap="square" lIns="0" tIns="0" rIns="0" bIns="0" rtlCol="0" anchor="ctr"/>
           <a:lstStyle/>
           <a:p>
-            <a:pPr indent="0" marL="0">
+            <a:pPr marL="0" indent="0">
               <a:buNone/>
             </a:pPr>
             <a:r>
@@ -6896,6 +6645,13 @@
             <a:prstDash val="solid"/>
           </a:ln>
         </p:spPr>
+        <p:txBody>
+          <a:bodyPr/>
+          <a:lstStyle/>
+          <a:p>
+            <a:endParaRPr lang="en-US"/>
+          </a:p>
+        </p:txBody>
       </p:sp>
       <p:sp>
         <p:nvSpPr>
@@ -6918,7 +6674,7 @@
           <a:bodyPr wrap="square" lIns="0" tIns="0" rIns="0" bIns="0" rtlCol="0" anchor="ctr"/>
           <a:lstStyle/>
           <a:p>
-            <a:pPr algn="ctr" indent="0" marL="0">
+            <a:pPr marL="0" indent="0" algn="ctr">
               <a:buNone/>
             </a:pPr>
             <a:r>
@@ -6927,10 +6683,9 @@
                   <a:srgbClr val="FFFFFF"/>
                 </a:solidFill>
                 <a:latin typeface="Courier New" pitchFamily="34" charset="0"/>
-                <a:ea typeface="Courier New" pitchFamily="34" charset="-122"/>
                 <a:cs typeface="Courier New" pitchFamily="34" charset="-120"/>
               </a:rPr>
-              <a:t>00:25</a:t>
+              <a:t>3</a:t>
             </a:r>
             <a:endParaRPr lang="en-US" sz="1000" dirty="0"/>
           </a:p>
@@ -6957,7 +6712,7 @@
           <a:bodyPr wrap="square" lIns="0" tIns="0" rIns="0" bIns="0" rtlCol="0" anchor="ctr"/>
           <a:lstStyle/>
           <a:p>
-            <a:pPr indent="0" marL="0">
+            <a:pPr marL="0" indent="0">
               <a:buNone/>
             </a:pPr>
             <a:r>
@@ -6996,7 +6751,7 @@
           <a:bodyPr wrap="square" lIns="0" tIns="0" rIns="0" bIns="0" rtlCol="0" anchor="ctr"/>
           <a:lstStyle/>
           <a:p>
-            <a:pPr indent="0" marL="0">
+            <a:pPr marL="0" indent="0">
               <a:buNone/>
             </a:pPr>
             <a:r>
@@ -7038,6 +6793,13 @@
             <a:prstDash val="solid"/>
           </a:ln>
         </p:spPr>
+        <p:txBody>
+          <a:bodyPr/>
+          <a:lstStyle/>
+          <a:p>
+            <a:endParaRPr lang="en-US"/>
+          </a:p>
+        </p:txBody>
       </p:sp>
       <p:sp>
         <p:nvSpPr>
@@ -7060,7 +6822,7 @@
           <a:bodyPr wrap="square" lIns="0" tIns="0" rIns="0" bIns="0" rtlCol="0" anchor="ctr"/>
           <a:lstStyle/>
           <a:p>
-            <a:pPr algn="ctr" indent="0" marL="0">
+            <a:pPr marL="0" indent="0" algn="ctr">
               <a:buNone/>
             </a:pPr>
             <a:r>
@@ -7069,10 +6831,9 @@
                   <a:srgbClr val="FFFFFF"/>
                 </a:solidFill>
                 <a:latin typeface="Courier New" pitchFamily="34" charset="0"/>
-                <a:ea typeface="Courier New" pitchFamily="34" charset="-122"/>
                 <a:cs typeface="Courier New" pitchFamily="34" charset="-120"/>
               </a:rPr>
-              <a:t>00:45</a:t>
+              <a:t>4</a:t>
             </a:r>
             <a:endParaRPr lang="en-US" sz="1000" dirty="0"/>
           </a:p>
@@ -7099,7 +6860,7 @@
           <a:bodyPr wrap="square" lIns="0" tIns="0" rIns="0" bIns="0" rtlCol="0" anchor="ctr"/>
           <a:lstStyle/>
           <a:p>
-            <a:pPr indent="0" marL="0">
+            <a:pPr marL="0" indent="0">
               <a:buNone/>
             </a:pPr>
             <a:r>
@@ -7138,7 +6899,7 @@
           <a:bodyPr wrap="square" lIns="0" tIns="0" rIns="0" bIns="0" rtlCol="0" anchor="ctr"/>
           <a:lstStyle/>
           <a:p>
-            <a:pPr indent="0" marL="0">
+            <a:pPr marL="0" indent="0">
               <a:buNone/>
             </a:pPr>
             <a:r>
@@ -7180,6 +6941,13 @@
             <a:prstDash val="solid"/>
           </a:ln>
         </p:spPr>
+        <p:txBody>
+          <a:bodyPr/>
+          <a:lstStyle/>
+          <a:p>
+            <a:endParaRPr lang="en-US"/>
+          </a:p>
+        </p:txBody>
       </p:sp>
       <p:sp>
         <p:nvSpPr>
@@ -7202,7 +6970,7 @@
           <a:bodyPr wrap="square" lIns="0" tIns="0" rIns="0" bIns="0" rtlCol="0" anchor="ctr"/>
           <a:lstStyle/>
           <a:p>
-            <a:pPr algn="ctr" indent="0" marL="0">
+            <a:pPr marL="0" indent="0" algn="ctr">
               <a:buNone/>
             </a:pPr>
             <a:r>
@@ -7211,10 +6979,9 @@
                   <a:srgbClr val="FFFFFF"/>
                 </a:solidFill>
                 <a:latin typeface="Courier New" pitchFamily="34" charset="0"/>
-                <a:ea typeface="Courier New" pitchFamily="34" charset="-122"/>
                 <a:cs typeface="Courier New" pitchFamily="34" charset="-120"/>
               </a:rPr>
-              <a:t>01:10</a:t>
+              <a:t>5</a:t>
             </a:r>
             <a:endParaRPr lang="en-US" sz="1000" dirty="0"/>
           </a:p>
@@ -7241,7 +7008,7 @@
           <a:bodyPr wrap="square" lIns="0" tIns="0" rIns="0" bIns="0" rtlCol="0" anchor="ctr"/>
           <a:lstStyle/>
           <a:p>
-            <a:pPr indent="0" marL="0">
+            <a:pPr marL="0" indent="0">
               <a:buNone/>
             </a:pPr>
             <a:r>
@@ -7280,7 +7047,7 @@
           <a:bodyPr wrap="square" lIns="0" tIns="0" rIns="0" bIns="0" rtlCol="0" anchor="ctr"/>
           <a:lstStyle/>
           <a:p>
-            <a:pPr indent="0" marL="0">
+            <a:pPr marL="0" indent="0">
               <a:buNone/>
             </a:pPr>
             <a:r>
@@ -7322,6 +7089,13 @@
             <a:prstDash val="solid"/>
           </a:ln>
         </p:spPr>
+        <p:txBody>
+          <a:bodyPr/>
+          <a:lstStyle/>
+          <a:p>
+            <a:endParaRPr lang="en-US"/>
+          </a:p>
+        </p:txBody>
       </p:sp>
       <p:sp>
         <p:nvSpPr>
@@ -7344,7 +7118,7 @@
           <a:bodyPr wrap="square" lIns="0" tIns="0" rIns="0" bIns="0" rtlCol="0" anchor="ctr"/>
           <a:lstStyle/>
           <a:p>
-            <a:pPr algn="ctr" indent="0" marL="0">
+            <a:pPr marL="0" indent="0" algn="ctr">
               <a:buNone/>
             </a:pPr>
             <a:r>
@@ -7353,10 +7127,9 @@
                   <a:srgbClr val="FFFFFF"/>
                 </a:solidFill>
                 <a:latin typeface="Courier New" pitchFamily="34" charset="0"/>
-                <a:ea typeface="Courier New" pitchFamily="34" charset="-122"/>
                 <a:cs typeface="Courier New" pitchFamily="34" charset="-120"/>
               </a:rPr>
-              <a:t>01:20</a:t>
+              <a:t>6</a:t>
             </a:r>
             <a:endParaRPr lang="en-US" sz="1000" dirty="0"/>
           </a:p>
@@ -7383,7 +7156,7 @@
           <a:bodyPr wrap="square" lIns="0" tIns="0" rIns="0" bIns="0" rtlCol="0" anchor="ctr"/>
           <a:lstStyle/>
           <a:p>
-            <a:pPr indent="0" marL="0">
+            <a:pPr marL="0" indent="0">
               <a:buNone/>
             </a:pPr>
             <a:r>
@@ -7422,7 +7195,7 @@
           <a:bodyPr wrap="square" lIns="0" tIns="0" rIns="0" bIns="0" rtlCol="0" anchor="ctr"/>
           <a:lstStyle/>
           <a:p>
-            <a:pPr indent="0" marL="0">
+            <a:pPr marL="0" indent="0">
               <a:buNone/>
             </a:pPr>
             <a:r>
@@ -7456,6 +7229,7 @@
         <a:solidFill>
           <a:srgbClr val="F5F7FA"/>
         </a:solidFill>
+        <a:effectLst/>
       </p:bgPr>
     </p:bg>
     <p:spTree>
@@ -7496,6 +7270,13 @@
             <a:prstDash val="solid"/>
           </a:ln>
         </p:spPr>
+        <p:txBody>
+          <a:bodyPr/>
+          <a:lstStyle/>
+          <a:p>
+            <a:endParaRPr lang="en-US"/>
+          </a:p>
+        </p:txBody>
       </p:sp>
       <p:sp>
         <p:nvSpPr>
@@ -7518,7 +7299,7 @@
           <a:bodyPr wrap="square" lIns="0" tIns="0" rIns="0" bIns="0" rtlCol="0" anchor="ctr"/>
           <a:lstStyle/>
           <a:p>
-            <a:pPr indent="0" marL="0">
+            <a:pPr marL="0" indent="0">
               <a:buNone/>
             </a:pPr>
             <a:r>
@@ -7544,8 +7325,8 @@
         </p:nvSpPr>
         <p:spPr>
           <a:xfrm>
-            <a:off x="320040" y="713232"/>
-            <a:ext cx="8503920" cy="320040"/>
+            <a:off x="342600" y="1188570"/>
+            <a:ext cx="2752944" cy="320040"/>
           </a:xfrm>
           <a:prstGeom prst="rect">
             <a:avLst/>
@@ -7557,7 +7338,7 @@
           <a:bodyPr wrap="square" lIns="0" tIns="0" rIns="0" bIns="0" rtlCol="0" anchor="ctr"/>
           <a:lstStyle/>
           <a:p>
-            <a:pPr indent="0" marL="0">
+            <a:pPr marL="0" indent="0">
               <a:buNone/>
             </a:pPr>
             <a:r>
@@ -7583,8 +7364,8 @@
         </p:nvSpPr>
         <p:spPr>
           <a:xfrm>
-            <a:off x="320040" y="1005840"/>
-            <a:ext cx="4023360" cy="822960"/>
+            <a:off x="342600" y="1513706"/>
+            <a:ext cx="4023360" cy="397239"/>
           </a:xfrm>
           <a:prstGeom prst="rect">
             <a:avLst/>
@@ -7596,7 +7377,7 @@
           <a:bodyPr wrap="square" lIns="0" tIns="0" rIns="0" bIns="0" rtlCol="0" anchor="t"/>
           <a:lstStyle/>
           <a:p>
-            <a:pPr indent="0" marL="0">
+            <a:pPr marL="0" indent="0">
               <a:buNone/>
             </a:pPr>
             <a:r>
@@ -7622,7 +7403,7 @@
         </p:nvSpPr>
         <p:spPr>
           <a:xfrm>
-            <a:off x="320040" y="1938528"/>
+            <a:off x="315168" y="2217794"/>
             <a:ext cx="201168" cy="201168"/>
           </a:xfrm>
           <a:prstGeom prst="ellipse">
@@ -7638,6 +7419,13 @@
             <a:prstDash val="solid"/>
           </a:ln>
         </p:spPr>
+        <p:txBody>
+          <a:bodyPr/>
+          <a:lstStyle/>
+          <a:p>
+            <a:endParaRPr lang="en-US"/>
+          </a:p>
+        </p:txBody>
       </p:sp>
       <p:sp>
         <p:nvSpPr>
@@ -7647,7 +7435,7 @@
         </p:nvSpPr>
         <p:spPr>
           <a:xfrm>
-            <a:off x="621792" y="1911096"/>
+            <a:off x="616920" y="2190362"/>
             <a:ext cx="3749040" cy="237744"/>
           </a:xfrm>
           <a:prstGeom prst="rect">
@@ -7660,7 +7448,7 @@
           <a:bodyPr wrap="square" lIns="0" tIns="0" rIns="0" bIns="0" rtlCol="0" anchor="ctr"/>
           <a:lstStyle/>
           <a:p>
-            <a:pPr indent="0" marL="0">
+            <a:pPr marL="0" indent="0">
               <a:buNone/>
             </a:pPr>
             <a:r>
@@ -7672,7 +7460,7 @@
                 <a:ea typeface="Calibri" pitchFamily="34" charset="-122"/>
                 <a:cs typeface="Calibri" pitchFamily="34" charset="-120"/>
               </a:rPr>
-              <a:t>Ask AI agents survey questions — just like human respondents</a:t>
+              <a:t>Ask AI agents survey questions, just like human respondents</a:t>
             </a:r>
             <a:endParaRPr lang="en-US" sz="1100" dirty="0"/>
           </a:p>
@@ -7686,7 +7474,7 @@
         </p:nvSpPr>
         <p:spPr>
           <a:xfrm>
-            <a:off x="320040" y="2414016"/>
+            <a:off x="315168" y="2693282"/>
             <a:ext cx="201168" cy="201168"/>
           </a:xfrm>
           <a:prstGeom prst="ellipse">
@@ -7702,6 +7490,13 @@
             <a:prstDash val="solid"/>
           </a:ln>
         </p:spPr>
+        <p:txBody>
+          <a:bodyPr/>
+          <a:lstStyle/>
+          <a:p>
+            <a:endParaRPr lang="en-US"/>
+          </a:p>
+        </p:txBody>
       </p:sp>
       <p:sp>
         <p:nvSpPr>
@@ -7711,7 +7506,7 @@
         </p:nvSpPr>
         <p:spPr>
           <a:xfrm>
-            <a:off x="621792" y="2386584"/>
+            <a:off x="616920" y="2665850"/>
             <a:ext cx="3749040" cy="237744"/>
           </a:xfrm>
           <a:prstGeom prst="rect">
@@ -7724,7 +7519,7 @@
           <a:bodyPr wrap="square" lIns="0" tIns="0" rIns="0" bIns="0" rtlCol="0" anchor="ctr"/>
           <a:lstStyle/>
           <a:p>
-            <a:pPr indent="0" marL="0">
+            <a:pPr marL="0" indent="0">
               <a:buNone/>
             </a:pPr>
             <a:r>
@@ -7750,7 +7545,7 @@
         </p:nvSpPr>
         <p:spPr>
           <a:xfrm>
-            <a:off x="320040" y="2889504"/>
+            <a:off x="315168" y="3168770"/>
             <a:ext cx="201168" cy="201168"/>
           </a:xfrm>
           <a:prstGeom prst="ellipse">
@@ -7766,6 +7561,13 @@
             <a:prstDash val="solid"/>
           </a:ln>
         </p:spPr>
+        <p:txBody>
+          <a:bodyPr/>
+          <a:lstStyle/>
+          <a:p>
+            <a:endParaRPr lang="en-US"/>
+          </a:p>
+        </p:txBody>
       </p:sp>
       <p:sp>
         <p:nvSpPr>
@@ -7775,8 +7577,8 @@
         </p:nvSpPr>
         <p:spPr>
           <a:xfrm>
-            <a:off x="621792" y="2862072"/>
-            <a:ext cx="3749040" cy="237744"/>
+            <a:off x="616920" y="3141338"/>
+            <a:ext cx="4023360" cy="237744"/>
           </a:xfrm>
           <a:prstGeom prst="rect">
             <a:avLst/>
@@ -7788,7 +7590,7 @@
           <a:bodyPr wrap="square" lIns="0" tIns="0" rIns="0" bIns="0" rtlCol="0" anchor="ctr"/>
           <a:lstStyle/>
           <a:p>
-            <a:pPr indent="0" marL="0">
+            <a:pPr marL="0" indent="0">
               <a:buNone/>
             </a:pPr>
             <a:r>
@@ -7814,7 +7616,7 @@
         </p:nvSpPr>
         <p:spPr>
           <a:xfrm>
-            <a:off x="320040" y="3364992"/>
+            <a:off x="315168" y="3644258"/>
             <a:ext cx="201168" cy="201168"/>
           </a:xfrm>
           <a:prstGeom prst="ellipse">
@@ -7830,6 +7632,13 @@
             <a:prstDash val="solid"/>
           </a:ln>
         </p:spPr>
+        <p:txBody>
+          <a:bodyPr/>
+          <a:lstStyle/>
+          <a:p>
+            <a:endParaRPr lang="en-US"/>
+          </a:p>
+        </p:txBody>
       </p:sp>
       <p:sp>
         <p:nvSpPr>
@@ -7839,7 +7648,7 @@
         </p:nvSpPr>
         <p:spPr>
           <a:xfrm>
-            <a:off x="621792" y="3337560"/>
+            <a:off x="616920" y="3616826"/>
             <a:ext cx="3749040" cy="237744"/>
           </a:xfrm>
           <a:prstGeom prst="rect">
@@ -7852,7 +7661,7 @@
           <a:bodyPr wrap="square" lIns="0" tIns="0" rIns="0" bIns="0" rtlCol="0" anchor="ctr"/>
           <a:lstStyle/>
           <a:p>
-            <a:pPr indent="0" marL="0">
+            <a:pPr marL="0" indent="0">
               <a:buNone/>
             </a:pPr>
             <a:r>
@@ -7878,7 +7687,7 @@
         </p:nvSpPr>
         <p:spPr>
           <a:xfrm>
-            <a:off x="320040" y="3840480"/>
+            <a:off x="315168" y="4119746"/>
             <a:ext cx="201168" cy="201168"/>
           </a:xfrm>
           <a:prstGeom prst="ellipse">
@@ -7894,6 +7703,13 @@
             <a:prstDash val="solid"/>
           </a:ln>
         </p:spPr>
+        <p:txBody>
+          <a:bodyPr/>
+          <a:lstStyle/>
+          <a:p>
+            <a:endParaRPr lang="en-US"/>
+          </a:p>
+        </p:txBody>
       </p:sp>
       <p:sp>
         <p:nvSpPr>
@@ -7903,7 +7719,7 @@
         </p:nvSpPr>
         <p:spPr>
           <a:xfrm>
-            <a:off x="621792" y="3813048"/>
+            <a:off x="616920" y="4092314"/>
             <a:ext cx="3749040" cy="237744"/>
           </a:xfrm>
           <a:prstGeom prst="rect">
@@ -7916,7 +7732,7 @@
           <a:bodyPr wrap="square" lIns="0" tIns="0" rIns="0" bIns="0" rtlCol="0" anchor="ctr"/>
           <a:lstStyle/>
           <a:p>
-            <a:pPr indent="0" marL="0">
+            <a:pPr marL="0" indent="0">
               <a:buNone/>
             </a:pPr>
             <a:r>
@@ -7958,13 +7774,20 @@
             <a:prstDash val="solid"/>
           </a:ln>
           <a:effectLst>
-            <a:outerShdw sx="100000" sy="100000" kx="0" ky="0" algn="bl" rotWithShape="0" blurRad="101600" dist="38100" dir="8100000">
+            <a:outerShdw blurRad="101600" dist="38100" dir="8100000" algn="bl" rotWithShape="0">
               <a:srgbClr val="000000">
                 <a:alpha val="10000"/>
               </a:srgbClr>
             </a:outerShdw>
           </a:effectLst>
         </p:spPr>
+        <p:txBody>
+          <a:bodyPr/>
+          <a:lstStyle/>
+          <a:p>
+            <a:endParaRPr lang="en-US"/>
+          </a:p>
+        </p:txBody>
       </p:sp>
       <p:sp>
         <p:nvSpPr>
@@ -7990,6 +7813,13 @@
             <a:prstDash val="solid"/>
           </a:ln>
         </p:spPr>
+        <p:txBody>
+          <a:bodyPr/>
+          <a:lstStyle/>
+          <a:p>
+            <a:endParaRPr lang="en-US"/>
+          </a:p>
+        </p:txBody>
       </p:sp>
       <p:sp>
         <p:nvSpPr>
@@ -7999,7 +7829,7 @@
         </p:nvSpPr>
         <p:spPr>
           <a:xfrm>
-            <a:off x="4983480" y="1207008"/>
+            <a:off x="4983480" y="1243884"/>
             <a:ext cx="438912" cy="438912"/>
           </a:xfrm>
           <a:prstGeom prst="rect">
@@ -8012,7 +7842,7 @@
           <a:bodyPr wrap="square" lIns="0" tIns="0" rIns="0" bIns="0" rtlCol="0" anchor="ctr"/>
           <a:lstStyle/>
           <a:p>
-            <a:pPr algn="ctr" indent="0" marL="0">
+            <a:pPr marL="0" indent="0" algn="ctr">
               <a:buNone/>
             </a:pPr>
             <a:r>
@@ -8048,7 +7878,7 @@
           <a:bodyPr wrap="square" lIns="0" tIns="0" rIns="0" bIns="0" rtlCol="0" anchor="ctr"/>
           <a:lstStyle/>
           <a:p>
-            <a:pPr indent="0" marL="0">
+            <a:pPr marL="0" indent="0">
               <a:buNone/>
             </a:pPr>
             <a:r>
@@ -8088,6 +7918,13 @@
             <a:prstDash val="solid"/>
           </a:ln>
         </p:spPr>
+        <p:txBody>
+          <a:bodyPr/>
+          <a:lstStyle/>
+          <a:p>
+            <a:endParaRPr lang="en-US"/>
+          </a:p>
+        </p:txBody>
       </p:sp>
       <p:sp>
         <p:nvSpPr>
@@ -8113,13 +7950,20 @@
             <a:prstDash val="solid"/>
           </a:ln>
           <a:effectLst>
-            <a:outerShdw sx="100000" sy="100000" kx="0" ky="0" algn="bl" rotWithShape="0" blurRad="101600" dist="38100" dir="8100000">
+            <a:outerShdw blurRad="101600" dist="38100" dir="8100000" algn="bl" rotWithShape="0">
               <a:srgbClr val="000000">
                 <a:alpha val="10000"/>
               </a:srgbClr>
             </a:outerShdw>
           </a:effectLst>
         </p:spPr>
+        <p:txBody>
+          <a:bodyPr/>
+          <a:lstStyle/>
+          <a:p>
+            <a:endParaRPr lang="en-US"/>
+          </a:p>
+        </p:txBody>
       </p:sp>
       <p:sp>
         <p:nvSpPr>
@@ -8145,6 +7989,13 @@
             <a:prstDash val="solid"/>
           </a:ln>
         </p:spPr>
+        <p:txBody>
+          <a:bodyPr/>
+          <a:lstStyle/>
+          <a:p>
+            <a:endParaRPr lang="en-US"/>
+          </a:p>
+        </p:txBody>
       </p:sp>
       <p:sp>
         <p:nvSpPr>
@@ -8154,7 +8005,7 @@
         </p:nvSpPr>
         <p:spPr>
           <a:xfrm>
-            <a:off x="4983480" y="2103120"/>
+            <a:off x="4983480" y="2139696"/>
             <a:ext cx="438912" cy="438912"/>
           </a:xfrm>
           <a:prstGeom prst="rect">
@@ -8167,7 +8018,7 @@
           <a:bodyPr wrap="square" lIns="0" tIns="0" rIns="0" bIns="0" rtlCol="0" anchor="ctr"/>
           <a:lstStyle/>
           <a:p>
-            <a:pPr algn="ctr" indent="0" marL="0">
+            <a:pPr marL="0" indent="0" algn="ctr">
               <a:buNone/>
             </a:pPr>
             <a:r>
@@ -8203,7 +8054,7 @@
           <a:bodyPr wrap="square" lIns="0" tIns="0" rIns="0" bIns="0" rtlCol="0" anchor="ctr"/>
           <a:lstStyle/>
           <a:p>
-            <a:pPr indent="0" marL="0">
+            <a:pPr marL="0" indent="0">
               <a:buNone/>
             </a:pPr>
             <a:r>
@@ -8243,6 +8094,13 @@
             <a:prstDash val="solid"/>
           </a:ln>
         </p:spPr>
+        <p:txBody>
+          <a:bodyPr/>
+          <a:lstStyle/>
+          <a:p>
+            <a:endParaRPr lang="en-US"/>
+          </a:p>
+        </p:txBody>
       </p:sp>
       <p:sp>
         <p:nvSpPr>
@@ -8268,13 +8126,20 @@
             <a:prstDash val="solid"/>
           </a:ln>
           <a:effectLst>
-            <a:outerShdw sx="100000" sy="100000" kx="0" ky="0" algn="bl" rotWithShape="0" blurRad="101600" dist="38100" dir="8100000">
+            <a:outerShdw blurRad="101600" dist="38100" dir="8100000" algn="bl" rotWithShape="0">
               <a:srgbClr val="000000">
                 <a:alpha val="10000"/>
               </a:srgbClr>
             </a:outerShdw>
           </a:effectLst>
         </p:spPr>
+        <p:txBody>
+          <a:bodyPr/>
+          <a:lstStyle/>
+          <a:p>
+            <a:endParaRPr lang="en-US"/>
+          </a:p>
+        </p:txBody>
       </p:sp>
       <p:sp>
         <p:nvSpPr>
@@ -8300,6 +8165,13 @@
             <a:prstDash val="solid"/>
           </a:ln>
         </p:spPr>
+        <p:txBody>
+          <a:bodyPr/>
+          <a:lstStyle/>
+          <a:p>
+            <a:endParaRPr lang="en-US"/>
+          </a:p>
+        </p:txBody>
       </p:sp>
       <p:sp>
         <p:nvSpPr>
@@ -8309,7 +8181,7 @@
         </p:nvSpPr>
         <p:spPr>
           <a:xfrm>
-            <a:off x="4983480" y="2999232"/>
+            <a:off x="4983480" y="3026664"/>
             <a:ext cx="438912" cy="438912"/>
           </a:xfrm>
           <a:prstGeom prst="rect">
@@ -8322,7 +8194,7 @@
           <a:bodyPr wrap="square" lIns="0" tIns="0" rIns="0" bIns="0" rtlCol="0" anchor="ctr"/>
           <a:lstStyle/>
           <a:p>
-            <a:pPr algn="ctr" indent="0" marL="0">
+            <a:pPr marL="0" indent="0" algn="ctr">
               <a:buNone/>
             </a:pPr>
             <a:r>
@@ -8358,7 +8230,7 @@
           <a:bodyPr wrap="square" lIns="0" tIns="0" rIns="0" bIns="0" rtlCol="0" anchor="ctr"/>
           <a:lstStyle/>
           <a:p>
-            <a:pPr indent="0" marL="0">
+            <a:pPr marL="0" indent="0">
               <a:buNone/>
             </a:pPr>
             <a:r>
@@ -8398,6 +8270,13 @@
             <a:prstDash val="solid"/>
           </a:ln>
         </p:spPr>
+        <p:txBody>
+          <a:bodyPr/>
+          <a:lstStyle/>
+          <a:p>
+            <a:endParaRPr lang="en-US"/>
+          </a:p>
+        </p:txBody>
       </p:sp>
       <p:sp>
         <p:nvSpPr>
@@ -8423,13 +8302,20 @@
             <a:prstDash val="solid"/>
           </a:ln>
           <a:effectLst>
-            <a:outerShdw sx="100000" sy="100000" kx="0" ky="0" algn="bl" rotWithShape="0" blurRad="101600" dist="38100" dir="8100000">
+            <a:outerShdw blurRad="101600" dist="38100" dir="8100000" algn="bl" rotWithShape="0">
               <a:srgbClr val="000000">
                 <a:alpha val="10000"/>
               </a:srgbClr>
             </a:outerShdw>
           </a:effectLst>
         </p:spPr>
+        <p:txBody>
+          <a:bodyPr/>
+          <a:lstStyle/>
+          <a:p>
+            <a:endParaRPr lang="en-US"/>
+          </a:p>
+        </p:txBody>
       </p:sp>
       <p:sp>
         <p:nvSpPr>
@@ -8455,6 +8341,13 @@
             <a:prstDash val="solid"/>
           </a:ln>
         </p:spPr>
+        <p:txBody>
+          <a:bodyPr/>
+          <a:lstStyle/>
+          <a:p>
+            <a:endParaRPr lang="en-US"/>
+          </a:p>
+        </p:txBody>
       </p:sp>
       <p:sp>
         <p:nvSpPr>
@@ -8464,7 +8357,7 @@
         </p:nvSpPr>
         <p:spPr>
           <a:xfrm>
-            <a:off x="4983480" y="3895344"/>
+            <a:off x="4983480" y="3931920"/>
             <a:ext cx="438912" cy="438912"/>
           </a:xfrm>
           <a:prstGeom prst="rect">
@@ -8477,7 +8370,7 @@
           <a:bodyPr wrap="square" lIns="0" tIns="0" rIns="0" bIns="0" rtlCol="0" anchor="ctr"/>
           <a:lstStyle/>
           <a:p>
-            <a:pPr algn="ctr" indent="0" marL="0">
+            <a:pPr marL="0" indent="0" algn="ctr">
               <a:buNone/>
             </a:pPr>
             <a:r>
@@ -8513,7 +8406,7 @@
           <a:bodyPr wrap="square" lIns="0" tIns="0" rIns="0" bIns="0" rtlCol="0" anchor="ctr"/>
           <a:lstStyle/>
           <a:p>
-            <a:pPr indent="0" marL="0">
+            <a:pPr marL="0" indent="0">
               <a:buNone/>
             </a:pPr>
             <a:r>
@@ -8547,6 +8440,7 @@
         <a:solidFill>
           <a:srgbClr val="F5F7FA"/>
         </a:solidFill>
+        <a:effectLst/>
       </p:bgPr>
     </p:bg>
     <p:spTree>
@@ -8587,6 +8481,13 @@
             <a:prstDash val="solid"/>
           </a:ln>
         </p:spPr>
+        <p:txBody>
+          <a:bodyPr/>
+          <a:lstStyle/>
+          <a:p>
+            <a:endParaRPr lang="en-US"/>
+          </a:p>
+        </p:txBody>
       </p:sp>
       <p:sp>
         <p:nvSpPr>
@@ -8609,7 +8510,7 @@
           <a:bodyPr wrap="square" lIns="0" tIns="0" rIns="0" bIns="0" rtlCol="0" anchor="ctr"/>
           <a:lstStyle/>
           <a:p>
-            <a:pPr indent="0" marL="0">
+            <a:pPr marL="0" indent="0">
               <a:buNone/>
             </a:pPr>
             <a:r>
@@ -8648,7 +8549,7 @@
           <a:bodyPr wrap="square" lIns="0" tIns="0" rIns="0" bIns="0" rtlCol="0" anchor="ctr"/>
           <a:lstStyle/>
           <a:p>
-            <a:pPr indent="0" marL="0">
+            <a:pPr marL="0" indent="0">
               <a:buNone/>
             </a:pPr>
             <a:r>
@@ -8690,13 +8591,20 @@
             <a:prstDash val="solid"/>
           </a:ln>
           <a:effectLst>
-            <a:outerShdw sx="100000" sy="100000" kx="0" ky="0" algn="bl" rotWithShape="0" blurRad="101600" dist="38100" dir="8100000">
+            <a:outerShdw blurRad="101600" dist="38100" dir="8100000" algn="bl" rotWithShape="0">
               <a:srgbClr val="000000">
                 <a:alpha val="10000"/>
               </a:srgbClr>
             </a:outerShdw>
           </a:effectLst>
         </p:spPr>
+        <p:txBody>
+          <a:bodyPr/>
+          <a:lstStyle/>
+          <a:p>
+            <a:endParaRPr lang="en-US"/>
+          </a:p>
+        </p:txBody>
       </p:sp>
       <p:sp>
         <p:nvSpPr>
@@ -8722,6 +8630,13 @@
             <a:prstDash val="solid"/>
           </a:ln>
         </p:spPr>
+        <p:txBody>
+          <a:bodyPr/>
+          <a:lstStyle/>
+          <a:p>
+            <a:endParaRPr lang="en-US"/>
+          </a:p>
+        </p:txBody>
       </p:sp>
       <p:sp>
         <p:nvSpPr>
@@ -8744,7 +8659,7 @@
           <a:bodyPr wrap="square" lIns="0" tIns="0" rIns="0" bIns="0" rtlCol="0" anchor="ctr"/>
           <a:lstStyle/>
           <a:p>
-            <a:pPr indent="0" marL="0">
+            <a:pPr marL="0" indent="0">
               <a:buNone/>
             </a:pPr>
             <a:r>
@@ -8783,7 +8698,7 @@
           <a:bodyPr wrap="square" lIns="0" tIns="0" rIns="0" bIns="0" rtlCol="0" anchor="ctr"/>
           <a:lstStyle/>
           <a:p>
-            <a:pPr indent="0" marL="0">
+            <a:pPr marL="0" indent="0">
               <a:buNone/>
             </a:pPr>
             <a:r>
@@ -8822,7 +8737,7 @@
           <a:bodyPr wrap="square" lIns="0" tIns="0" rIns="0" bIns="0" rtlCol="0" anchor="ctr"/>
           <a:lstStyle/>
           <a:p>
-            <a:pPr indent="0" marL="0">
+            <a:pPr marL="0" indent="0">
               <a:buNone/>
             </a:pPr>
             <a:r>
@@ -8864,13 +8779,20 @@
             <a:prstDash val="solid"/>
           </a:ln>
           <a:effectLst>
-            <a:outerShdw sx="100000" sy="100000" kx="0" ky="0" algn="bl" rotWithShape="0" blurRad="101600" dist="38100" dir="8100000">
+            <a:outerShdw blurRad="101600" dist="38100" dir="8100000" algn="bl" rotWithShape="0">
               <a:srgbClr val="000000">
                 <a:alpha val="10000"/>
               </a:srgbClr>
             </a:outerShdw>
           </a:effectLst>
         </p:spPr>
+        <p:txBody>
+          <a:bodyPr/>
+          <a:lstStyle/>
+          <a:p>
+            <a:endParaRPr lang="en-US"/>
+          </a:p>
+        </p:txBody>
       </p:sp>
       <p:sp>
         <p:nvSpPr>
@@ -8896,6 +8818,13 @@
             <a:prstDash val="solid"/>
           </a:ln>
         </p:spPr>
+        <p:txBody>
+          <a:bodyPr/>
+          <a:lstStyle/>
+          <a:p>
+            <a:endParaRPr lang="en-US"/>
+          </a:p>
+        </p:txBody>
       </p:sp>
       <p:sp>
         <p:nvSpPr>
@@ -8918,7 +8847,7 @@
           <a:bodyPr wrap="square" lIns="0" tIns="0" rIns="0" bIns="0" rtlCol="0" anchor="ctr"/>
           <a:lstStyle/>
           <a:p>
-            <a:pPr indent="0" marL="0">
+            <a:pPr marL="0" indent="0">
               <a:buNone/>
             </a:pPr>
             <a:r>
@@ -8957,7 +8886,7 @@
           <a:bodyPr wrap="square" lIns="0" tIns="0" rIns="0" bIns="0" rtlCol="0" anchor="ctr"/>
           <a:lstStyle/>
           <a:p>
-            <a:pPr indent="0" marL="0">
+            <a:pPr marL="0" indent="0">
               <a:buNone/>
             </a:pPr>
             <a:r>
@@ -8996,7 +8925,7 @@
           <a:bodyPr wrap="square" lIns="0" tIns="0" rIns="0" bIns="0" rtlCol="0" anchor="ctr"/>
           <a:lstStyle/>
           <a:p>
-            <a:pPr indent="0" marL="0">
+            <a:pPr marL="0" indent="0">
               <a:buNone/>
             </a:pPr>
             <a:r>
@@ -9038,13 +8967,20 @@
             <a:prstDash val="solid"/>
           </a:ln>
           <a:effectLst>
-            <a:outerShdw sx="100000" sy="100000" kx="0" ky="0" algn="bl" rotWithShape="0" blurRad="101600" dist="38100" dir="8100000">
+            <a:outerShdw blurRad="101600" dist="38100" dir="8100000" algn="bl" rotWithShape="0">
               <a:srgbClr val="000000">
                 <a:alpha val="10000"/>
               </a:srgbClr>
             </a:outerShdw>
           </a:effectLst>
         </p:spPr>
+        <p:txBody>
+          <a:bodyPr/>
+          <a:lstStyle/>
+          <a:p>
+            <a:endParaRPr lang="en-US"/>
+          </a:p>
+        </p:txBody>
       </p:sp>
       <p:sp>
         <p:nvSpPr>
@@ -9070,6 +9006,13 @@
             <a:prstDash val="solid"/>
           </a:ln>
         </p:spPr>
+        <p:txBody>
+          <a:bodyPr/>
+          <a:lstStyle/>
+          <a:p>
+            <a:endParaRPr lang="en-US"/>
+          </a:p>
+        </p:txBody>
       </p:sp>
       <p:sp>
         <p:nvSpPr>
@@ -9092,7 +9035,7 @@
           <a:bodyPr wrap="square" lIns="0" tIns="0" rIns="0" bIns="0" rtlCol="0" anchor="ctr"/>
           <a:lstStyle/>
           <a:p>
-            <a:pPr indent="0" marL="0">
+            <a:pPr marL="0" indent="0">
               <a:buNone/>
             </a:pPr>
             <a:r>
@@ -9131,7 +9074,7 @@
           <a:bodyPr wrap="square" lIns="0" tIns="0" rIns="0" bIns="0" rtlCol="0" anchor="ctr"/>
           <a:lstStyle/>
           <a:p>
-            <a:pPr indent="0" marL="0">
+            <a:pPr marL="0" indent="0">
               <a:buNone/>
             </a:pPr>
             <a:r>
@@ -9170,7 +9113,7 @@
           <a:bodyPr wrap="square" lIns="0" tIns="0" rIns="0" bIns="0" rtlCol="0" anchor="ctr"/>
           <a:lstStyle/>
           <a:p>
-            <a:pPr indent="0" marL="0">
+            <a:pPr marL="0" indent="0">
               <a:buNone/>
             </a:pPr>
             <a:r>
@@ -9212,13 +9155,20 @@
             <a:prstDash val="solid"/>
           </a:ln>
           <a:effectLst>
-            <a:outerShdw sx="100000" sy="100000" kx="0" ky="0" algn="bl" rotWithShape="0" blurRad="101600" dist="38100" dir="8100000">
+            <a:outerShdw blurRad="101600" dist="38100" dir="8100000" algn="bl" rotWithShape="0">
               <a:srgbClr val="000000">
                 <a:alpha val="10000"/>
               </a:srgbClr>
             </a:outerShdw>
           </a:effectLst>
         </p:spPr>
+        <p:txBody>
+          <a:bodyPr/>
+          <a:lstStyle/>
+          <a:p>
+            <a:endParaRPr lang="en-US"/>
+          </a:p>
+        </p:txBody>
       </p:sp>
       <p:sp>
         <p:nvSpPr>
@@ -9244,6 +9194,13 @@
             <a:prstDash val="solid"/>
           </a:ln>
         </p:spPr>
+        <p:txBody>
+          <a:bodyPr/>
+          <a:lstStyle/>
+          <a:p>
+            <a:endParaRPr lang="en-US"/>
+          </a:p>
+        </p:txBody>
       </p:sp>
       <p:sp>
         <p:nvSpPr>
@@ -9266,7 +9223,7 @@
           <a:bodyPr wrap="square" lIns="0" tIns="0" rIns="0" bIns="0" rtlCol="0" anchor="ctr"/>
           <a:lstStyle/>
           <a:p>
-            <a:pPr indent="0" marL="0">
+            <a:pPr marL="0" indent="0">
               <a:buNone/>
             </a:pPr>
             <a:r>
@@ -9305,7 +9262,7 @@
           <a:bodyPr wrap="square" lIns="0" tIns="0" rIns="0" bIns="0" rtlCol="0" anchor="ctr"/>
           <a:lstStyle/>
           <a:p>
-            <a:pPr indent="0" marL="0">
+            <a:pPr marL="0" indent="0">
               <a:buNone/>
             </a:pPr>
             <a:r>
@@ -9344,7 +9301,7 @@
           <a:bodyPr wrap="square" lIns="0" tIns="0" rIns="0" bIns="0" rtlCol="0" anchor="ctr"/>
           <a:lstStyle/>
           <a:p>
-            <a:pPr indent="0" marL="0">
+            <a:pPr marL="0" indent="0">
               <a:buNone/>
             </a:pPr>
             <a:r>
@@ -9386,13 +9343,20 @@
             <a:prstDash val="solid"/>
           </a:ln>
           <a:effectLst>
-            <a:outerShdw sx="100000" sy="100000" kx="0" ky="0" algn="bl" rotWithShape="0" blurRad="101600" dist="38100" dir="8100000">
+            <a:outerShdw blurRad="101600" dist="38100" dir="8100000" algn="bl" rotWithShape="0">
               <a:srgbClr val="000000">
                 <a:alpha val="10000"/>
               </a:srgbClr>
             </a:outerShdw>
           </a:effectLst>
         </p:spPr>
+        <p:txBody>
+          <a:bodyPr/>
+          <a:lstStyle/>
+          <a:p>
+            <a:endParaRPr lang="en-US"/>
+          </a:p>
+        </p:txBody>
       </p:sp>
       <p:sp>
         <p:nvSpPr>
@@ -9418,6 +9382,13 @@
             <a:prstDash val="solid"/>
           </a:ln>
         </p:spPr>
+        <p:txBody>
+          <a:bodyPr/>
+          <a:lstStyle/>
+          <a:p>
+            <a:endParaRPr lang="en-US"/>
+          </a:p>
+        </p:txBody>
       </p:sp>
       <p:sp>
         <p:nvSpPr>
@@ -9440,7 +9411,7 @@
           <a:bodyPr wrap="square" lIns="0" tIns="0" rIns="0" bIns="0" rtlCol="0" anchor="ctr"/>
           <a:lstStyle/>
           <a:p>
-            <a:pPr indent="0" marL="0">
+            <a:pPr marL="0" indent="0">
               <a:buNone/>
             </a:pPr>
             <a:r>
@@ -9479,7 +9450,7 @@
           <a:bodyPr wrap="square" lIns="0" tIns="0" rIns="0" bIns="0" rtlCol="0" anchor="ctr"/>
           <a:lstStyle/>
           <a:p>
-            <a:pPr indent="0" marL="0">
+            <a:pPr marL="0" indent="0">
               <a:buNone/>
             </a:pPr>
             <a:r>
@@ -9518,7 +9489,7 @@
           <a:bodyPr wrap="square" lIns="0" tIns="0" rIns="0" bIns="0" rtlCol="0" anchor="ctr"/>
           <a:lstStyle/>
           <a:p>
-            <a:pPr indent="0" marL="0">
+            <a:pPr marL="0" indent="0">
               <a:buNone/>
             </a:pPr>
             <a:r>
@@ -9552,6 +9523,7 @@
         <a:solidFill>
           <a:srgbClr val="F5F7FA"/>
         </a:solidFill>
+        <a:effectLst/>
       </p:bgPr>
     </p:bg>
     <p:spTree>
@@ -9592,6 +9564,13 @@
             <a:prstDash val="solid"/>
           </a:ln>
         </p:spPr>
+        <p:txBody>
+          <a:bodyPr/>
+          <a:lstStyle/>
+          <a:p>
+            <a:endParaRPr lang="en-US"/>
+          </a:p>
+        </p:txBody>
       </p:sp>
       <p:sp>
         <p:nvSpPr>
@@ -9614,7 +9593,7 @@
           <a:bodyPr wrap="square" lIns="0" tIns="0" rIns="0" bIns="0" rtlCol="0" anchor="ctr"/>
           <a:lstStyle/>
           <a:p>
-            <a:pPr indent="0" marL="0">
+            <a:pPr marL="0" indent="0">
               <a:buNone/>
             </a:pPr>
             <a:r>
@@ -9653,7 +9632,7 @@
           <a:bodyPr wrap="square" lIns="0" tIns="0" rIns="0" bIns="0" rtlCol="0" anchor="ctr"/>
           <a:lstStyle/>
           <a:p>
-            <a:pPr indent="0" marL="0">
+            <a:pPr marL="0" indent="0">
               <a:buNone/>
             </a:pPr>
             <a:r>
@@ -9673,80 +9652,14 @@
       </p:sp>
       <p:sp>
         <p:nvSpPr>
-          <p:cNvPr id="5" name="Shape 3"/>
-          <p:cNvSpPr/>
-          <p:nvPr/>
-        </p:nvSpPr>
-        <p:spPr>
-          <a:xfrm>
-            <a:off x="320040" y="960120"/>
-            <a:ext cx="1463040" cy="256032"/>
-          </a:xfrm>
-          <a:prstGeom prst="roundRect">
-            <a:avLst>
-              <a:gd name="adj" fmla="val 17857"/>
-            </a:avLst>
-          </a:prstGeom>
-          <a:solidFill>
-            <a:srgbClr val="0D7377"/>
-          </a:solidFill>
-          <a:ln w="12700">
-            <a:solidFill>
-              <a:srgbClr val="0D7377"/>
-            </a:solidFill>
-            <a:prstDash val="solid"/>
-          </a:ln>
-        </p:spPr>
-      </p:sp>
-      <p:sp>
-        <p:nvSpPr>
-          <p:cNvPr id="6" name="Text 4"/>
-          <p:cNvSpPr/>
-          <p:nvPr/>
-        </p:nvSpPr>
-        <p:spPr>
-          <a:xfrm>
-            <a:off x="320040" y="960120"/>
-            <a:ext cx="1463040" cy="256032"/>
-          </a:xfrm>
-          <a:prstGeom prst="rect">
-            <a:avLst/>
-          </a:prstGeom>
-          <a:noFill/>
-          <a:ln/>
-        </p:spPr>
-        <p:txBody>
-          <a:bodyPr wrap="square" lIns="0" tIns="0" rIns="0" bIns="0" rtlCol="0" anchor="ctr"/>
-          <a:lstStyle/>
-          <a:p>
-            <a:pPr algn="ctr" indent="0" marL="0">
-              <a:buNone/>
-            </a:pPr>
-            <a:r>
-              <a:rPr lang="en-US" sz="900" b="1" dirty="0">
-                <a:solidFill>
-                  <a:srgbClr val="FFFFFF"/>
-                </a:solidFill>
-                <a:latin typeface="Calibri" pitchFamily="34" charset="0"/>
-                <a:ea typeface="Calibri" pitchFamily="34" charset="-122"/>
-                <a:cs typeface="Calibri" pitchFamily="34" charset="-120"/>
-              </a:rPr>
-              <a:t>Python</a:t>
-            </a:r>
-            <a:endParaRPr lang="en-US" sz="900" dirty="0"/>
-          </a:p>
-        </p:txBody>
-      </p:sp>
-      <p:sp>
-        <p:nvSpPr>
           <p:cNvPr id="7" name="Shape 5"/>
           <p:cNvSpPr/>
           <p:nvPr/>
         </p:nvSpPr>
         <p:spPr>
           <a:xfrm>
-            <a:off x="320040" y="1261872"/>
-            <a:ext cx="8503920" cy="3657600"/>
+            <a:off x="320040" y="1060704"/>
+            <a:ext cx="8503920" cy="3858768"/>
           </a:xfrm>
           <a:prstGeom prst="rect">
             <a:avLst/>
@@ -9761,6 +9674,13 @@
             <a:prstDash val="solid"/>
           </a:ln>
         </p:spPr>
+        <p:txBody>
+          <a:bodyPr/>
+          <a:lstStyle/>
+          <a:p>
+            <a:endParaRPr lang="en-US"/>
+          </a:p>
+        </p:txBody>
       </p:sp>
       <p:sp>
         <p:nvSpPr>
@@ -9770,7 +9690,7 @@
         </p:nvSpPr>
         <p:spPr>
           <a:xfrm>
-            <a:off x="429768" y="1325880"/>
+            <a:off x="429768" y="1116018"/>
             <a:ext cx="8284464" cy="3529584"/>
           </a:xfrm>
           <a:prstGeom prst="rect">
@@ -9783,7 +9703,7 @@
           <a:bodyPr wrap="square" lIns="0" tIns="0" rIns="0" bIns="0" rtlCol="0" anchor="t"/>
           <a:lstStyle/>
           <a:p>
-            <a:pPr indent="0" marL="0">
+            <a:pPr marL="0" indent="0">
               <a:buNone/>
             </a:pPr>
             <a:r>
@@ -9800,13 +9720,13 @@
             <a:endParaRPr lang="en-US" sz="950" dirty="0"/>
           </a:p>
           <a:p>
-            <a:pPr indent="0" marL="0">
+            <a:pPr marL="0" indent="0">
               <a:buNone/>
             </a:pPr>
             <a:endParaRPr lang="en-US" sz="950" dirty="0"/>
           </a:p>
           <a:p>
-            <a:pPr indent="0" marL="0">
+            <a:pPr marL="0" indent="0">
               <a:buNone/>
             </a:pPr>
             <a:r>
@@ -9823,7 +9743,7 @@
             <a:endParaRPr lang="en-US" sz="950" dirty="0"/>
           </a:p>
           <a:p>
-            <a:pPr indent="0" marL="0">
+            <a:pPr marL="0" indent="0">
               <a:buNone/>
             </a:pPr>
             <a:r>
@@ -9840,7 +9760,7 @@
             <a:endParaRPr lang="en-US" sz="950" dirty="0"/>
           </a:p>
           <a:p>
-            <a:pPr indent="0" marL="0">
+            <a:pPr marL="0" indent="0">
               <a:buNone/>
             </a:pPr>
             <a:r>
@@ -9857,7 +9777,7 @@
             <a:endParaRPr lang="en-US" sz="950" dirty="0"/>
           </a:p>
           <a:p>
-            <a:pPr indent="0" marL="0">
+            <a:pPr marL="0" indent="0">
               <a:buNone/>
             </a:pPr>
             <a:r>
@@ -9874,7 +9794,7 @@
             <a:endParaRPr lang="en-US" sz="950" dirty="0"/>
           </a:p>
           <a:p>
-            <a:pPr indent="0" marL="0">
+            <a:pPr marL="0" indent="0">
               <a:buNone/>
             </a:pPr>
             <a:r>
@@ -9891,7 +9811,7 @@
             <a:endParaRPr lang="en-US" sz="950" dirty="0"/>
           </a:p>
           <a:p>
-            <a:pPr indent="0" marL="0">
+            <a:pPr marL="0" indent="0">
               <a:buNone/>
             </a:pPr>
             <a:r>
@@ -9908,13 +9828,13 @@
             <a:endParaRPr lang="en-US" sz="950" dirty="0"/>
           </a:p>
           <a:p>
-            <a:pPr indent="0" marL="0">
+            <a:pPr marL="0" indent="0">
               <a:buNone/>
             </a:pPr>
             <a:endParaRPr lang="en-US" sz="950" dirty="0"/>
           </a:p>
           <a:p>
-            <a:pPr indent="0" marL="0">
+            <a:pPr marL="0" indent="0">
               <a:buNone/>
             </a:pPr>
             <a:r>
@@ -9931,7 +9851,7 @@
             <a:endParaRPr lang="en-US" sz="950" dirty="0"/>
           </a:p>
           <a:p>
-            <a:pPr indent="0" marL="0">
+            <a:pPr marL="0" indent="0">
               <a:buNone/>
             </a:pPr>
             <a:r>
@@ -9948,7 +9868,7 @@
             <a:endParaRPr lang="en-US" sz="950" dirty="0"/>
           </a:p>
           <a:p>
-            <a:pPr indent="0" marL="0">
+            <a:pPr marL="0" indent="0">
               <a:buNone/>
             </a:pPr>
             <a:r>
@@ -9965,7 +9885,7 @@
             <a:endParaRPr lang="en-US" sz="950" dirty="0"/>
           </a:p>
           <a:p>
-            <a:pPr indent="0" marL="0">
+            <a:pPr marL="0" indent="0">
               <a:buNone/>
             </a:pPr>
             <a:r>
@@ -9982,7 +9902,7 @@
             <a:endParaRPr lang="en-US" sz="950" dirty="0"/>
           </a:p>
           <a:p>
-            <a:pPr indent="0" marL="0">
+            <a:pPr marL="0" indent="0">
               <a:buNone/>
             </a:pPr>
             <a:r>
@@ -9999,13 +9919,13 @@
             <a:endParaRPr lang="en-US" sz="950" dirty="0"/>
           </a:p>
           <a:p>
-            <a:pPr indent="0" marL="0">
+            <a:pPr marL="0" indent="0">
               <a:buNone/>
             </a:pPr>
             <a:endParaRPr lang="en-US" sz="950" dirty="0"/>
           </a:p>
           <a:p>
-            <a:pPr indent="0" marL="0">
+            <a:pPr marL="0" indent="0">
               <a:buNone/>
             </a:pPr>
             <a:r>
@@ -10022,7 +9942,7 @@
             <a:endParaRPr lang="en-US" sz="950" dirty="0"/>
           </a:p>
           <a:p>
-            <a:pPr indent="0" marL="0">
+            <a:pPr marL="0" indent="0">
               <a:buNone/>
             </a:pPr>
             <a:r>
@@ -10039,7 +9959,7 @@
             <a:endParaRPr lang="en-US" sz="950" dirty="0"/>
           </a:p>
           <a:p>
-            <a:pPr indent="0" marL="0">
+            <a:pPr marL="0" indent="0">
               <a:buNone/>
             </a:pPr>
             <a:r>
@@ -10056,7 +9976,7 @@
             <a:endParaRPr lang="en-US" sz="950" dirty="0"/>
           </a:p>
           <a:p>
-            <a:pPr indent="0" marL="0">
+            <a:pPr marL="0" indent="0">
               <a:buNone/>
             </a:pPr>
             <a:r>
@@ -10073,7 +9993,7 @@
             <a:endParaRPr lang="en-US" sz="950" dirty="0"/>
           </a:p>
           <a:p>
-            <a:pPr indent="0" marL="0">
+            <a:pPr marL="0" indent="0">
               <a:buNone/>
             </a:pPr>
             <a:r>
@@ -10090,7 +10010,7 @@
             <a:endParaRPr lang="en-US" sz="950" dirty="0"/>
           </a:p>
           <a:p>
-            <a:pPr indent="0" marL="0">
+            <a:pPr marL="0" indent="0">
               <a:buNone/>
             </a:pPr>
             <a:r>
@@ -10107,7 +10027,7 @@
             <a:endParaRPr lang="en-US" sz="950" dirty="0"/>
           </a:p>
           <a:p>
-            <a:pPr indent="0" marL="0">
+            <a:pPr marL="0" indent="0">
               <a:buNone/>
             </a:pPr>
             <a:r>
@@ -10124,13 +10044,13 @@
             <a:endParaRPr lang="en-US" sz="950" dirty="0"/>
           </a:p>
           <a:p>
-            <a:pPr indent="0" marL="0">
+            <a:pPr marL="0" indent="0">
               <a:buNone/>
             </a:pPr>
             <a:endParaRPr lang="en-US" sz="950" dirty="0"/>
           </a:p>
           <a:p>
-            <a:pPr indent="0" marL="0">
+            <a:pPr marL="0" indent="0">
               <a:buNone/>
             </a:pPr>
             <a:r>
@@ -10147,7 +10067,7 @@
             <a:endParaRPr lang="en-US" sz="950" dirty="0"/>
           </a:p>
           <a:p>
-            <a:pPr indent="0" marL="0">
+            <a:pPr marL="0" indent="0">
               <a:buNone/>
             </a:pPr>
             <a:r>
@@ -10164,7 +10084,7 @@
             <a:endParaRPr lang="en-US" sz="950" dirty="0"/>
           </a:p>
           <a:p>
-            <a:pPr indent="0" marL="0">
+            <a:pPr marL="0" indent="0">
               <a:buNone/>
             </a:pPr>
             <a:r>
@@ -10198,6 +10118,7 @@
         <a:solidFill>
           <a:srgbClr val="F5F7FA"/>
         </a:solidFill>
+        <a:effectLst/>
       </p:bgPr>
     </p:bg>
     <p:spTree>
@@ -10238,6 +10159,13 @@
             <a:prstDash val="solid"/>
           </a:ln>
         </p:spPr>
+        <p:txBody>
+          <a:bodyPr/>
+          <a:lstStyle/>
+          <a:p>
+            <a:endParaRPr lang="en-US"/>
+          </a:p>
+        </p:txBody>
       </p:sp>
       <p:sp>
         <p:nvSpPr>
@@ -10260,7 +10188,7 @@
           <a:bodyPr wrap="square" lIns="0" tIns="0" rIns="0" bIns="0" rtlCol="0" anchor="ctr"/>
           <a:lstStyle/>
           <a:p>
-            <a:pPr indent="0" marL="0">
+            <a:pPr marL="0" indent="0">
               <a:buNone/>
             </a:pPr>
             <a:r>
@@ -10299,7 +10227,7 @@
           <a:bodyPr wrap="square" lIns="0" tIns="0" rIns="0" bIns="0" rtlCol="0" anchor="ctr"/>
           <a:lstStyle/>
           <a:p>
-            <a:pPr indent="0" marL="0">
+            <a:pPr marL="0" indent="0">
               <a:buNone/>
             </a:pPr>
             <a:r>
@@ -10338,7 +10266,7 @@
           <a:bodyPr wrap="square" lIns="0" tIns="0" rIns="0" bIns="0" rtlCol="0" anchor="t"/>
           <a:lstStyle/>
           <a:p>
-            <a:pPr indent="0" marL="0">
+            <a:pPr marL="0" indent="0">
               <a:buNone/>
             </a:pPr>
             <a:r>
@@ -10377,7 +10305,7 @@
           <a:bodyPr wrap="square" lIns="0" tIns="0" rIns="0" bIns="0" rtlCol="0" anchor="ctr"/>
           <a:lstStyle/>
           <a:p>
-            <a:pPr indent="0" marL="0">
+            <a:pPr marL="0" indent="0">
               <a:buNone/>
             </a:pPr>
             <a:r>
@@ -10419,6 +10347,13 @@
             <a:prstDash val="solid"/>
           </a:ln>
         </p:spPr>
+        <p:txBody>
+          <a:bodyPr/>
+          <a:lstStyle/>
+          <a:p>
+            <a:endParaRPr lang="en-US"/>
+          </a:p>
+        </p:txBody>
       </p:sp>
       <p:sp>
         <p:nvSpPr>
@@ -10441,7 +10376,7 @@
           <a:bodyPr wrap="square" lIns="0" tIns="0" rIns="0" bIns="0" rtlCol="0" anchor="ctr"/>
           <a:lstStyle/>
           <a:p>
-            <a:pPr algn="ctr" indent="0" marL="0">
+            <a:pPr marL="0" indent="0" algn="ctr">
               <a:buNone/>
             </a:pPr>
             <a:r>
@@ -10483,6 +10418,13 @@
             <a:prstDash val="solid"/>
           </a:ln>
         </p:spPr>
+        <p:txBody>
+          <a:bodyPr/>
+          <a:lstStyle/>
+          <a:p>
+            <a:endParaRPr lang="en-US"/>
+          </a:p>
+        </p:txBody>
       </p:sp>
       <p:sp>
         <p:nvSpPr>
@@ -10505,7 +10447,7 @@
           <a:bodyPr wrap="square" lIns="0" tIns="0" rIns="0" bIns="0" rtlCol="0" anchor="ctr"/>
           <a:lstStyle/>
           <a:p>
-            <a:pPr algn="ctr" indent="0" marL="0">
+            <a:pPr marL="0" indent="0" algn="ctr">
               <a:buNone/>
             </a:pPr>
             <a:r>
@@ -10547,6 +10489,13 @@
             <a:prstDash val="solid"/>
           </a:ln>
         </p:spPr>
+        <p:txBody>
+          <a:bodyPr/>
+          <a:lstStyle/>
+          <a:p>
+            <a:endParaRPr lang="en-US"/>
+          </a:p>
+        </p:txBody>
       </p:sp>
       <p:sp>
         <p:nvSpPr>
@@ -10569,7 +10518,7 @@
           <a:bodyPr wrap="square" lIns="0" tIns="0" rIns="0" bIns="0" rtlCol="0" anchor="ctr"/>
           <a:lstStyle/>
           <a:p>
-            <a:pPr algn="ctr" indent="0" marL="0">
+            <a:pPr marL="0" indent="0" algn="ctr">
               <a:buNone/>
             </a:pPr>
             <a:r>
@@ -10611,6 +10560,13 @@
             <a:prstDash val="solid"/>
           </a:ln>
         </p:spPr>
+        <p:txBody>
+          <a:bodyPr/>
+          <a:lstStyle/>
+          <a:p>
+            <a:endParaRPr lang="en-US"/>
+          </a:p>
+        </p:txBody>
       </p:sp>
       <p:sp>
         <p:nvSpPr>
@@ -10633,7 +10589,7 @@
           <a:bodyPr wrap="square" lIns="0" tIns="0" rIns="0" bIns="0" rtlCol="0" anchor="ctr"/>
           <a:lstStyle/>
           <a:p>
-            <a:pPr algn="ctr" indent="0" marL="0">
+            <a:pPr marL="0" indent="0" algn="ctr">
               <a:buNone/>
             </a:pPr>
             <a:r>
@@ -10675,6 +10631,13 @@
             <a:prstDash val="solid"/>
           </a:ln>
         </p:spPr>
+        <p:txBody>
+          <a:bodyPr/>
+          <a:lstStyle/>
+          <a:p>
+            <a:endParaRPr lang="en-US"/>
+          </a:p>
+        </p:txBody>
       </p:sp>
       <p:sp>
         <p:nvSpPr>
@@ -10697,7 +10660,7 @@
           <a:bodyPr wrap="square" lIns="0" tIns="0" rIns="0" bIns="0" rtlCol="0" anchor="ctr"/>
           <a:lstStyle/>
           <a:p>
-            <a:pPr algn="ctr" indent="0" marL="0">
+            <a:pPr marL="0" indent="0" algn="ctr">
               <a:buNone/>
             </a:pPr>
             <a:r>
@@ -10739,6 +10702,13 @@
             <a:prstDash val="solid"/>
           </a:ln>
         </p:spPr>
+        <p:txBody>
+          <a:bodyPr/>
+          <a:lstStyle/>
+          <a:p>
+            <a:endParaRPr lang="en-US"/>
+          </a:p>
+        </p:txBody>
       </p:sp>
       <p:sp>
         <p:nvSpPr>
@@ -10761,7 +10731,7 @@
           <a:bodyPr wrap="square" lIns="0" tIns="0" rIns="0" bIns="0" rtlCol="0" anchor="ctr"/>
           <a:lstStyle/>
           <a:p>
-            <a:pPr algn="ctr" indent="0" marL="0">
+            <a:pPr marL="0" indent="0" algn="ctr">
               <a:buNone/>
             </a:pPr>
             <a:r>
@@ -10803,6 +10773,13 @@
             <a:prstDash val="solid"/>
           </a:ln>
         </p:spPr>
+        <p:txBody>
+          <a:bodyPr/>
+          <a:lstStyle/>
+          <a:p>
+            <a:endParaRPr lang="en-US"/>
+          </a:p>
+        </p:txBody>
       </p:sp>
       <p:sp>
         <p:nvSpPr>
@@ -10825,7 +10802,7 @@
           <a:bodyPr wrap="square" lIns="0" tIns="0" rIns="0" bIns="0" rtlCol="0" anchor="ctr"/>
           <a:lstStyle/>
           <a:p>
-            <a:pPr algn="ctr" indent="0" marL="0">
+            <a:pPr marL="0" indent="0" algn="ctr">
               <a:buNone/>
             </a:pPr>
             <a:r>
@@ -10867,6 +10844,13 @@
             <a:prstDash val="solid"/>
           </a:ln>
         </p:spPr>
+        <p:txBody>
+          <a:bodyPr/>
+          <a:lstStyle/>
+          <a:p>
+            <a:endParaRPr lang="en-US"/>
+          </a:p>
+        </p:txBody>
       </p:sp>
       <p:sp>
         <p:nvSpPr>
@@ -10889,7 +10873,7 @@
           <a:bodyPr wrap="square" lIns="0" tIns="0" rIns="0" bIns="0" rtlCol="0" anchor="ctr"/>
           <a:lstStyle/>
           <a:p>
-            <a:pPr algn="ctr" indent="0" marL="0">
+            <a:pPr marL="0" indent="0" algn="ctr">
               <a:buNone/>
             </a:pPr>
             <a:r>
@@ -10904,72 +10888,6 @@
               <a:t>religion</a:t>
             </a:r>
             <a:endParaRPr lang="en-US" sz="950" dirty="0"/>
-          </a:p>
-        </p:txBody>
-      </p:sp>
-      <p:sp>
-        <p:nvSpPr>
-          <p:cNvPr id="23" name="Shape 21"/>
-          <p:cNvSpPr/>
-          <p:nvPr/>
-        </p:nvSpPr>
-        <p:spPr>
-          <a:xfrm>
-            <a:off x="4572000" y="960120"/>
-            <a:ext cx="1463040" cy="256032"/>
-          </a:xfrm>
-          <a:prstGeom prst="roundRect">
-            <a:avLst>
-              <a:gd name="adj" fmla="val 17857"/>
-            </a:avLst>
-          </a:prstGeom>
-          <a:solidFill>
-            <a:srgbClr val="0D7377"/>
-          </a:solidFill>
-          <a:ln w="12700">
-            <a:solidFill>
-              <a:srgbClr val="0D7377"/>
-            </a:solidFill>
-            <a:prstDash val="solid"/>
-          </a:ln>
-        </p:spPr>
-      </p:sp>
-      <p:sp>
-        <p:nvSpPr>
-          <p:cNvPr id="24" name="Text 22"/>
-          <p:cNvSpPr/>
-          <p:nvPr/>
-        </p:nvSpPr>
-        <p:spPr>
-          <a:xfrm>
-            <a:off x="4572000" y="960120"/>
-            <a:ext cx="1463040" cy="256032"/>
-          </a:xfrm>
-          <a:prstGeom prst="rect">
-            <a:avLst/>
-          </a:prstGeom>
-          <a:noFill/>
-          <a:ln/>
-        </p:spPr>
-        <p:txBody>
-          <a:bodyPr wrap="square" lIns="0" tIns="0" rIns="0" bIns="0" rtlCol="0" anchor="ctr"/>
-          <a:lstStyle/>
-          <a:p>
-            <a:pPr algn="ctr" indent="0" marL="0">
-              <a:buNone/>
-            </a:pPr>
-            <a:r>
-              <a:rPr lang="en-US" sz="900" b="1" dirty="0">
-                <a:solidFill>
-                  <a:srgbClr val="FFFFFF"/>
-                </a:solidFill>
-                <a:latin typeface="Calibri" pitchFamily="34" charset="0"/>
-                <a:ea typeface="Calibri" pitchFamily="34" charset="-122"/>
-                <a:cs typeface="Calibri" pitchFamily="34" charset="-120"/>
-              </a:rPr>
-              <a:t>Python</a:t>
-            </a:r>
-            <a:endParaRPr lang="en-US" sz="900" dirty="0"/>
           </a:p>
         </p:txBody>
       </p:sp>
@@ -10997,6 +10915,13 @@
             <a:prstDash val="solid"/>
           </a:ln>
         </p:spPr>
+        <p:txBody>
+          <a:bodyPr/>
+          <a:lstStyle/>
+          <a:p>
+            <a:endParaRPr lang="en-US"/>
+          </a:p>
+        </p:txBody>
       </p:sp>
       <p:sp>
         <p:nvSpPr>
@@ -11019,7 +10944,7 @@
           <a:bodyPr wrap="square" lIns="0" tIns="0" rIns="0" bIns="0" rtlCol="0" anchor="t"/>
           <a:lstStyle/>
           <a:p>
-            <a:pPr indent="0" marL="0">
+            <a:pPr marL="0" indent="0">
               <a:buNone/>
             </a:pPr>
             <a:r>
@@ -11036,13 +10961,13 @@
             <a:endParaRPr lang="en-US" sz="950" dirty="0"/>
           </a:p>
           <a:p>
-            <a:pPr indent="0" marL="0">
+            <a:pPr marL="0" indent="0">
               <a:buNone/>
             </a:pPr>
             <a:endParaRPr lang="en-US" sz="950" dirty="0"/>
           </a:p>
           <a:p>
-            <a:pPr indent="0" marL="0">
+            <a:pPr marL="0" indent="0">
               <a:buNone/>
             </a:pPr>
             <a:r>
@@ -11059,7 +10984,7 @@
             <a:endParaRPr lang="en-US" sz="950" dirty="0"/>
           </a:p>
           <a:p>
-            <a:pPr indent="0" marL="0">
+            <a:pPr marL="0" indent="0">
               <a:buNone/>
             </a:pPr>
             <a:r>
@@ -11076,7 +11001,7 @@
             <a:endParaRPr lang="en-US" sz="950" dirty="0"/>
           </a:p>
           <a:p>
-            <a:pPr indent="0" marL="0">
+            <a:pPr marL="0" indent="0">
               <a:buNone/>
             </a:pPr>
             <a:r>
@@ -11093,7 +11018,7 @@
             <a:endParaRPr lang="en-US" sz="950" dirty="0"/>
           </a:p>
           <a:p>
-            <a:pPr indent="0" marL="0">
+            <a:pPr marL="0" indent="0">
               <a:buNone/>
             </a:pPr>
             <a:r>
@@ -11110,7 +11035,7 @@
             <a:endParaRPr lang="en-US" sz="950" dirty="0"/>
           </a:p>
           <a:p>
-            <a:pPr indent="0" marL="0">
+            <a:pPr marL="0" indent="0">
               <a:buNone/>
             </a:pPr>
             <a:r>
@@ -11127,7 +11052,7 @@
             <a:endParaRPr lang="en-US" sz="950" dirty="0"/>
           </a:p>
           <a:p>
-            <a:pPr indent="0" marL="0">
+            <a:pPr marL="0" indent="0">
               <a:buNone/>
             </a:pPr>
             <a:r>
@@ -11144,7 +11069,7 @@
             <a:endParaRPr lang="en-US" sz="950" dirty="0"/>
           </a:p>
           <a:p>
-            <a:pPr indent="0" marL="0">
+            <a:pPr marL="0" indent="0">
               <a:buNone/>
             </a:pPr>
             <a:r>
@@ -11161,7 +11086,7 @@
             <a:endParaRPr lang="en-US" sz="950" dirty="0"/>
           </a:p>
           <a:p>
-            <a:pPr indent="0" marL="0">
+            <a:pPr marL="0" indent="0">
               <a:buNone/>
             </a:pPr>
             <a:r>
@@ -11178,13 +11103,13 @@
             <a:endParaRPr lang="en-US" sz="950" dirty="0"/>
           </a:p>
           <a:p>
-            <a:pPr indent="0" marL="0">
+            <a:pPr marL="0" indent="0">
               <a:buNone/>
             </a:pPr>
             <a:endParaRPr lang="en-US" sz="950" dirty="0"/>
           </a:p>
           <a:p>
-            <a:pPr indent="0" marL="0">
+            <a:pPr marL="0" indent="0">
               <a:buNone/>
             </a:pPr>
             <a:r>
@@ -11201,7 +11126,7 @@
             <a:endParaRPr lang="en-US" sz="950" dirty="0"/>
           </a:p>
           <a:p>
-            <a:pPr indent="0" marL="0">
+            <a:pPr marL="0" indent="0">
               <a:buNone/>
             </a:pPr>
             <a:r>
@@ -11218,7 +11143,7 @@
             <a:endParaRPr lang="en-US" sz="950" dirty="0"/>
           </a:p>
           <a:p>
-            <a:pPr indent="0" marL="0">
+            <a:pPr marL="0" indent="0">
               <a:buNone/>
             </a:pPr>
             <a:r>
@@ -11235,7 +11160,7 @@
             <a:endParaRPr lang="en-US" sz="950" dirty="0"/>
           </a:p>
           <a:p>
-            <a:pPr indent="0" marL="0">
+            <a:pPr marL="0" indent="0">
               <a:buNone/>
             </a:pPr>
             <a:r>
@@ -11252,7 +11177,7 @@
             <a:endParaRPr lang="en-US" sz="950" dirty="0"/>
           </a:p>
           <a:p>
-            <a:pPr indent="0" marL="0">
+            <a:pPr marL="0" indent="0">
               <a:buNone/>
             </a:pPr>
             <a:r>
@@ -11269,7 +11194,7 @@
             <a:endParaRPr lang="en-US" sz="950" dirty="0"/>
           </a:p>
           <a:p>
-            <a:pPr indent="0" marL="0">
+            <a:pPr marL="0" indent="0">
               <a:buNone/>
             </a:pPr>
             <a:r>
@@ -11286,7 +11211,7 @@
             <a:endParaRPr lang="en-US" sz="950" dirty="0"/>
           </a:p>
           <a:p>
-            <a:pPr indent="0" marL="0">
+            <a:pPr marL="0" indent="0">
               <a:buNone/>
             </a:pPr>
             <a:r>
@@ -11303,7 +11228,7 @@
             <a:endParaRPr lang="en-US" sz="950" dirty="0"/>
           </a:p>
           <a:p>
-            <a:pPr indent="0" marL="0">
+            <a:pPr marL="0" indent="0">
               <a:buNone/>
             </a:pPr>
             <a:r>
@@ -11320,7 +11245,7 @@
             <a:endParaRPr lang="en-US" sz="950" dirty="0"/>
           </a:p>
           <a:p>
-            <a:pPr indent="0" marL="0">
+            <a:pPr marL="0" indent="0">
               <a:buNone/>
             </a:pPr>
             <a:r>
@@ -11337,13 +11262,13 @@
             <a:endParaRPr lang="en-US" sz="950" dirty="0"/>
           </a:p>
           <a:p>
-            <a:pPr indent="0" marL="0">
+            <a:pPr marL="0" indent="0">
               <a:buNone/>
             </a:pPr>
             <a:endParaRPr lang="en-US" sz="950" dirty="0"/>
           </a:p>
           <a:p>
-            <a:pPr indent="0" marL="0">
+            <a:pPr marL="0" indent="0">
               <a:buNone/>
             </a:pPr>
             <a:r>
@@ -11377,6 +11302,7 @@
         <a:solidFill>
           <a:srgbClr val="F5F7FA"/>
         </a:solidFill>
+        <a:effectLst/>
       </p:bgPr>
     </p:bg>
     <p:spTree>
@@ -11417,6 +11343,13 @@
             <a:prstDash val="solid"/>
           </a:ln>
         </p:spPr>
+        <p:txBody>
+          <a:bodyPr/>
+          <a:lstStyle/>
+          <a:p>
+            <a:endParaRPr lang="en-US"/>
+          </a:p>
+        </p:txBody>
       </p:sp>
       <p:sp>
         <p:nvSpPr>
@@ -11439,7 +11372,7 @@
           <a:bodyPr wrap="square" lIns="0" tIns="0" rIns="0" bIns="0" rtlCol="0" anchor="ctr"/>
           <a:lstStyle/>
           <a:p>
-            <a:pPr indent="0" marL="0">
+            <a:pPr marL="0" indent="0">
               <a:buNone/>
             </a:pPr>
             <a:r>
@@ -11478,7 +11411,7 @@
           <a:bodyPr wrap="square" lIns="0" tIns="0" rIns="0" bIns="0" rtlCol="0" anchor="ctr"/>
           <a:lstStyle/>
           <a:p>
-            <a:pPr indent="0" marL="0">
+            <a:pPr marL="0" indent="0">
               <a:buNone/>
             </a:pPr>
             <a:r>
@@ -11520,13 +11453,20 @@
             <a:prstDash val="solid"/>
           </a:ln>
           <a:effectLst>
-            <a:outerShdw sx="100000" sy="100000" kx="0" ky="0" algn="bl" rotWithShape="0" blurRad="101600" dist="38100" dir="8100000">
+            <a:outerShdw blurRad="101600" dist="38100" dir="8100000" algn="bl" rotWithShape="0">
               <a:srgbClr val="000000">
                 <a:alpha val="10000"/>
               </a:srgbClr>
             </a:outerShdw>
           </a:effectLst>
         </p:spPr>
+        <p:txBody>
+          <a:bodyPr/>
+          <a:lstStyle/>
+          <a:p>
+            <a:endParaRPr lang="en-US"/>
+          </a:p>
+        </p:txBody>
       </p:sp>
       <p:sp>
         <p:nvSpPr>
@@ -11552,6 +11492,13 @@
             <a:prstDash val="solid"/>
           </a:ln>
         </p:spPr>
+        <p:txBody>
+          <a:bodyPr/>
+          <a:lstStyle/>
+          <a:p>
+            <a:endParaRPr lang="en-US"/>
+          </a:p>
+        </p:txBody>
       </p:sp>
       <p:sp>
         <p:nvSpPr>
@@ -11574,7 +11521,7 @@
           <a:bodyPr wrap="square" lIns="0" tIns="0" rIns="0" bIns="0" rtlCol="0" anchor="ctr"/>
           <a:lstStyle/>
           <a:p>
-            <a:pPr algn="ctr" indent="0" marL="0">
+            <a:pPr marL="0" indent="0" algn="ctr">
               <a:buNone/>
             </a:pPr>
             <a:r>
@@ -11613,7 +11560,7 @@
           <a:bodyPr wrap="square" lIns="0" tIns="0" rIns="0" bIns="0" rtlCol="0" anchor="ctr"/>
           <a:lstStyle/>
           <a:p>
-            <a:pPr indent="0" marL="0">
+            <a:pPr marL="0" indent="0">
               <a:buNone/>
             </a:pPr>
             <a:r>
@@ -11655,13 +11602,20 @@
             <a:prstDash val="solid"/>
           </a:ln>
           <a:effectLst>
-            <a:outerShdw sx="100000" sy="100000" kx="0" ky="0" algn="bl" rotWithShape="0" blurRad="101600" dist="38100" dir="8100000">
+            <a:outerShdw blurRad="101600" dist="38100" dir="8100000" algn="bl" rotWithShape="0">
               <a:srgbClr val="000000">
                 <a:alpha val="10000"/>
               </a:srgbClr>
             </a:outerShdw>
           </a:effectLst>
         </p:spPr>
+        <p:txBody>
+          <a:bodyPr/>
+          <a:lstStyle/>
+          <a:p>
+            <a:endParaRPr lang="en-US"/>
+          </a:p>
+        </p:txBody>
       </p:sp>
       <p:sp>
         <p:nvSpPr>
@@ -11687,6 +11641,13 @@
             <a:prstDash val="solid"/>
           </a:ln>
         </p:spPr>
+        <p:txBody>
+          <a:bodyPr/>
+          <a:lstStyle/>
+          <a:p>
+            <a:endParaRPr lang="en-US"/>
+          </a:p>
+        </p:txBody>
       </p:sp>
       <p:sp>
         <p:nvSpPr>
@@ -11709,7 +11670,7 @@
           <a:bodyPr wrap="square" lIns="0" tIns="0" rIns="0" bIns="0" rtlCol="0" anchor="ctr"/>
           <a:lstStyle/>
           <a:p>
-            <a:pPr algn="ctr" indent="0" marL="0">
+            <a:pPr marL="0" indent="0" algn="ctr">
               <a:buNone/>
             </a:pPr>
             <a:r>
@@ -11748,7 +11709,7 @@
           <a:bodyPr wrap="square" lIns="0" tIns="0" rIns="0" bIns="0" rtlCol="0" anchor="ctr"/>
           <a:lstStyle/>
           <a:p>
-            <a:pPr indent="0" marL="0">
+            <a:pPr marL="0" indent="0">
               <a:buNone/>
             </a:pPr>
             <a:r>
@@ -11790,13 +11751,20 @@
             <a:prstDash val="solid"/>
           </a:ln>
           <a:effectLst>
-            <a:outerShdw sx="100000" sy="100000" kx="0" ky="0" algn="bl" rotWithShape="0" blurRad="101600" dist="38100" dir="8100000">
+            <a:outerShdw blurRad="101600" dist="38100" dir="8100000" algn="bl" rotWithShape="0">
               <a:srgbClr val="000000">
                 <a:alpha val="10000"/>
               </a:srgbClr>
             </a:outerShdw>
           </a:effectLst>
         </p:spPr>
+        <p:txBody>
+          <a:bodyPr/>
+          <a:lstStyle/>
+          <a:p>
+            <a:endParaRPr lang="en-US"/>
+          </a:p>
+        </p:txBody>
       </p:sp>
       <p:sp>
         <p:nvSpPr>
@@ -11822,6 +11790,13 @@
             <a:prstDash val="solid"/>
           </a:ln>
         </p:spPr>
+        <p:txBody>
+          <a:bodyPr/>
+          <a:lstStyle/>
+          <a:p>
+            <a:endParaRPr lang="en-US"/>
+          </a:p>
+        </p:txBody>
       </p:sp>
       <p:sp>
         <p:nvSpPr>
@@ -11844,7 +11819,7 @@
           <a:bodyPr wrap="square" lIns="0" tIns="0" rIns="0" bIns="0" rtlCol="0" anchor="ctr"/>
           <a:lstStyle/>
           <a:p>
-            <a:pPr algn="ctr" indent="0" marL="0">
+            <a:pPr marL="0" indent="0" algn="ctr">
               <a:buNone/>
             </a:pPr>
             <a:r>
@@ -11883,7 +11858,7 @@
           <a:bodyPr wrap="square" lIns="0" tIns="0" rIns="0" bIns="0" rtlCol="0" anchor="ctr"/>
           <a:lstStyle/>
           <a:p>
-            <a:pPr indent="0" marL="0">
+            <a:pPr marL="0" indent="0">
               <a:buNone/>
             </a:pPr>
             <a:r>
@@ -11903,80 +11878,14 @@
       </p:sp>
       <p:sp>
         <p:nvSpPr>
-          <p:cNvPr id="17" name="Shape 15"/>
-          <p:cNvSpPr/>
-          <p:nvPr/>
-        </p:nvSpPr>
-        <p:spPr>
-          <a:xfrm>
-            <a:off x="320040" y="2121408"/>
-            <a:ext cx="1463040" cy="256032"/>
-          </a:xfrm>
-          <a:prstGeom prst="roundRect">
-            <a:avLst>
-              <a:gd name="adj" fmla="val 17857"/>
-            </a:avLst>
-          </a:prstGeom>
-          <a:solidFill>
-            <a:srgbClr val="0D7377"/>
-          </a:solidFill>
-          <a:ln w="12700">
-            <a:solidFill>
-              <a:srgbClr val="0D7377"/>
-            </a:solidFill>
-            <a:prstDash val="solid"/>
-          </a:ln>
-        </p:spPr>
-      </p:sp>
-      <p:sp>
-        <p:nvSpPr>
-          <p:cNvPr id="18" name="Text 16"/>
-          <p:cNvSpPr/>
-          <p:nvPr/>
-        </p:nvSpPr>
-        <p:spPr>
-          <a:xfrm>
-            <a:off x="320040" y="2121408"/>
-            <a:ext cx="1463040" cy="256032"/>
-          </a:xfrm>
-          <a:prstGeom prst="rect">
-            <a:avLst/>
-          </a:prstGeom>
-          <a:noFill/>
-          <a:ln/>
-        </p:spPr>
-        <p:txBody>
-          <a:bodyPr wrap="square" lIns="0" tIns="0" rIns="0" bIns="0" rtlCol="0" anchor="ctr"/>
-          <a:lstStyle/>
-          <a:p>
-            <a:pPr algn="ctr" indent="0" marL="0">
-              <a:buNone/>
-            </a:pPr>
-            <a:r>
-              <a:rPr lang="en-US" sz="900" b="1" dirty="0">
-                <a:solidFill>
-                  <a:srgbClr val="FFFFFF"/>
-                </a:solidFill>
-                <a:latin typeface="Calibri" pitchFamily="34" charset="0"/>
-                <a:ea typeface="Calibri" pitchFamily="34" charset="-122"/>
-                <a:cs typeface="Calibri" pitchFamily="34" charset="-120"/>
-              </a:rPr>
-              <a:t>Python</a:t>
-            </a:r>
-            <a:endParaRPr lang="en-US" sz="900" dirty="0"/>
-          </a:p>
-        </p:txBody>
-      </p:sp>
-      <p:sp>
-        <p:nvSpPr>
           <p:cNvPr id="19" name="Shape 17"/>
           <p:cNvSpPr/>
           <p:nvPr/>
         </p:nvSpPr>
         <p:spPr>
           <a:xfrm>
-            <a:off x="320040" y="2395728"/>
-            <a:ext cx="8503920" cy="2560320"/>
+            <a:off x="320040" y="2106118"/>
+            <a:ext cx="8503920" cy="2773180"/>
           </a:xfrm>
           <a:prstGeom prst="rect">
             <a:avLst/>
@@ -11991,6 +11900,13 @@
             <a:prstDash val="solid"/>
           </a:ln>
         </p:spPr>
+        <p:txBody>
+          <a:bodyPr/>
+          <a:lstStyle/>
+          <a:p>
+            <a:endParaRPr lang="en-US"/>
+          </a:p>
+        </p:txBody>
       </p:sp>
       <p:sp>
         <p:nvSpPr>
@@ -12000,7 +11916,7 @@
         </p:nvSpPr>
         <p:spPr>
           <a:xfrm>
-            <a:off x="429768" y="2459736"/>
+            <a:off x="429768" y="2240280"/>
             <a:ext cx="8284464" cy="2432304"/>
           </a:xfrm>
           <a:prstGeom prst="rect">
@@ -12013,7 +11929,7 @@
           <a:bodyPr wrap="square" lIns="0" tIns="0" rIns="0" bIns="0" rtlCol="0" anchor="t"/>
           <a:lstStyle/>
           <a:p>
-            <a:pPr indent="0" marL="0">
+            <a:pPr marL="0" indent="0">
               <a:buNone/>
             </a:pPr>
             <a:r>
@@ -12030,13 +11946,13 @@
             <a:endParaRPr lang="en-US" sz="950" dirty="0"/>
           </a:p>
           <a:p>
-            <a:pPr indent="0" marL="0">
+            <a:pPr marL="0" indent="0">
               <a:buNone/>
             </a:pPr>
             <a:endParaRPr lang="en-US" sz="950" dirty="0"/>
           </a:p>
           <a:p>
-            <a:pPr indent="0" marL="0">
+            <a:pPr marL="0" indent="0">
               <a:buNone/>
             </a:pPr>
             <a:r>
@@ -12053,7 +11969,7 @@
             <a:endParaRPr lang="en-US" sz="950" dirty="0"/>
           </a:p>
           <a:p>
-            <a:pPr indent="0" marL="0">
+            <a:pPr marL="0" indent="0">
               <a:buNone/>
             </a:pPr>
             <a:r>
@@ -12070,13 +11986,13 @@
             <a:endParaRPr lang="en-US" sz="950" dirty="0"/>
           </a:p>
           <a:p>
-            <a:pPr indent="0" marL="0">
+            <a:pPr marL="0" indent="0">
               <a:buNone/>
             </a:pPr>
             <a:endParaRPr lang="en-US" sz="950" dirty="0"/>
           </a:p>
           <a:p>
-            <a:pPr indent="0" marL="0">
+            <a:pPr marL="0" indent="0">
               <a:buNone/>
             </a:pPr>
             <a:r>
@@ -12093,7 +12009,7 @@
             <a:endParaRPr lang="en-US" sz="950" dirty="0"/>
           </a:p>
           <a:p>
-            <a:pPr indent="0" marL="0">
+            <a:pPr marL="0" indent="0">
               <a:buNone/>
             </a:pPr>
             <a:r>
@@ -12110,7 +12026,7 @@
             <a:endParaRPr lang="en-US" sz="950" dirty="0"/>
           </a:p>
           <a:p>
-            <a:pPr indent="0" marL="0">
+            <a:pPr marL="0" indent="0">
               <a:buNone/>
             </a:pPr>
             <a:r>
@@ -12127,7 +12043,7 @@
             <a:endParaRPr lang="en-US" sz="950" dirty="0"/>
           </a:p>
           <a:p>
-            <a:pPr indent="0" marL="0">
+            <a:pPr marL="0" indent="0">
               <a:buNone/>
             </a:pPr>
             <a:r>
@@ -12144,7 +12060,7 @@
             <a:endParaRPr lang="en-US" sz="950" dirty="0"/>
           </a:p>
           <a:p>
-            <a:pPr indent="0" marL="0">
+            <a:pPr marL="0" indent="0">
               <a:buNone/>
             </a:pPr>
             <a:r>
@@ -12161,7 +12077,7 @@
             <a:endParaRPr lang="en-US" sz="950" dirty="0"/>
           </a:p>
           <a:p>
-            <a:pPr indent="0" marL="0">
+            <a:pPr marL="0" indent="0">
               <a:buNone/>
             </a:pPr>
             <a:r>
@@ -12178,13 +12094,13 @@
             <a:endParaRPr lang="en-US" sz="950" dirty="0"/>
           </a:p>
           <a:p>
-            <a:pPr indent="0" marL="0">
+            <a:pPr marL="0" indent="0">
               <a:buNone/>
             </a:pPr>
             <a:endParaRPr lang="en-US" sz="950" dirty="0"/>
           </a:p>
           <a:p>
-            <a:pPr indent="0" marL="0">
+            <a:pPr marL="0" indent="0">
               <a:buNone/>
             </a:pPr>
             <a:r>
@@ -12201,7 +12117,7 @@
             <a:endParaRPr lang="en-US" sz="950" dirty="0"/>
           </a:p>
           <a:p>
-            <a:pPr indent="0" marL="0">
+            <a:pPr marL="0" indent="0">
               <a:buNone/>
             </a:pPr>
             <a:r>
@@ -12218,13 +12134,13 @@
             <a:endParaRPr lang="en-US" sz="950" dirty="0"/>
           </a:p>
           <a:p>
-            <a:pPr indent="0" marL="0">
+            <a:pPr marL="0" indent="0">
               <a:buNone/>
             </a:pPr>
             <a:endParaRPr lang="en-US" sz="950" dirty="0"/>
           </a:p>
           <a:p>
-            <a:pPr indent="0" marL="0">
+            <a:pPr marL="0" indent="0">
               <a:buNone/>
             </a:pPr>
             <a:r>
@@ -12241,7 +12157,7 @@
             <a:endParaRPr lang="en-US" sz="950" dirty="0"/>
           </a:p>
           <a:p>
-            <a:pPr indent="0" marL="0">
+            <a:pPr marL="0" indent="0">
               <a:buNone/>
             </a:pPr>
             <a:r>
@@ -12275,6 +12191,7 @@
         <a:solidFill>
           <a:srgbClr val="F5F7FA"/>
         </a:solidFill>
+        <a:effectLst/>
       </p:bgPr>
     </p:bg>
     <p:spTree>
@@ -12315,6 +12232,13 @@
             <a:prstDash val="solid"/>
           </a:ln>
         </p:spPr>
+        <p:txBody>
+          <a:bodyPr/>
+          <a:lstStyle/>
+          <a:p>
+            <a:endParaRPr lang="en-US"/>
+          </a:p>
+        </p:txBody>
       </p:sp>
       <p:sp>
         <p:nvSpPr>
@@ -12337,7 +12261,7 @@
           <a:bodyPr wrap="square" lIns="0" tIns="0" rIns="0" bIns="0" rtlCol="0" anchor="ctr"/>
           <a:lstStyle/>
           <a:p>
-            <a:pPr indent="0" marL="0">
+            <a:pPr marL="0" indent="0">
               <a:buNone/>
             </a:pPr>
             <a:r>
@@ -12376,7 +12300,7 @@
           <a:bodyPr wrap="square" lIns="0" tIns="0" rIns="0" bIns="0" rtlCol="0" anchor="ctr"/>
           <a:lstStyle/>
           <a:p>
-            <a:pPr indent="0" marL="0">
+            <a:pPr marL="0" indent="0">
               <a:buNone/>
             </a:pPr>
             <a:r>
@@ -12418,6 +12342,13 @@
             <a:prstDash val="solid"/>
           </a:ln>
         </p:spPr>
+        <p:txBody>
+          <a:bodyPr/>
+          <a:lstStyle/>
+          <a:p>
+            <a:endParaRPr lang="en-US"/>
+          </a:p>
+        </p:txBody>
       </p:sp>
       <p:sp>
         <p:nvSpPr>
@@ -12440,7 +12371,7 @@
           <a:bodyPr wrap="square" lIns="0" tIns="0" rIns="0" bIns="0" rtlCol="0" anchor="ctr"/>
           <a:lstStyle/>
           <a:p>
-            <a:pPr algn="ctr" indent="0" marL="0">
+            <a:pPr marL="0" indent="0" algn="ctr">
               <a:buNone/>
             </a:pPr>
             <a:r>
@@ -12480,6 +12411,13 @@
             <a:prstDash val="solid"/>
           </a:ln>
         </p:spPr>
+        <p:txBody>
+          <a:bodyPr/>
+          <a:lstStyle/>
+          <a:p>
+            <a:endParaRPr lang="en-US"/>
+          </a:p>
+        </p:txBody>
       </p:sp>
       <p:sp>
         <p:nvSpPr>
@@ -12505,6 +12443,13 @@
             <a:prstDash val="solid"/>
           </a:ln>
         </p:spPr>
+        <p:txBody>
+          <a:bodyPr/>
+          <a:lstStyle/>
+          <a:p>
+            <a:endParaRPr lang="en-US"/>
+          </a:p>
+        </p:txBody>
       </p:sp>
       <p:sp>
         <p:nvSpPr>
@@ -12527,7 +12472,7 @@
           <a:bodyPr wrap="square" lIns="0" tIns="0" rIns="0" bIns="0" rtlCol="0" anchor="ctr"/>
           <a:lstStyle/>
           <a:p>
-            <a:pPr algn="ctr" indent="0" marL="0">
+            <a:pPr marL="0" indent="0" algn="ctr">
               <a:buNone/>
             </a:pPr>
             <a:r>
@@ -12567,6 +12512,13 @@
             <a:prstDash val="solid"/>
           </a:ln>
         </p:spPr>
+        <p:txBody>
+          <a:bodyPr/>
+          <a:lstStyle/>
+          <a:p>
+            <a:endParaRPr lang="en-US"/>
+          </a:p>
+        </p:txBody>
       </p:sp>
       <p:sp>
         <p:nvSpPr>
@@ -12592,6 +12544,13 @@
             <a:prstDash val="solid"/>
           </a:ln>
         </p:spPr>
+        <p:txBody>
+          <a:bodyPr/>
+          <a:lstStyle/>
+          <a:p>
+            <a:endParaRPr lang="en-US"/>
+          </a:p>
+        </p:txBody>
       </p:sp>
       <p:sp>
         <p:nvSpPr>
@@ -12614,7 +12573,7 @@
           <a:bodyPr wrap="square" lIns="0" tIns="0" rIns="0" bIns="0" rtlCol="0" anchor="ctr"/>
           <a:lstStyle/>
           <a:p>
-            <a:pPr algn="ctr" indent="0" marL="0">
+            <a:pPr marL="0" indent="0" algn="ctr">
               <a:buNone/>
             </a:pPr>
             <a:r>
@@ -12654,6 +12613,13 @@
             <a:prstDash val="solid"/>
           </a:ln>
         </p:spPr>
+        <p:txBody>
+          <a:bodyPr/>
+          <a:lstStyle/>
+          <a:p>
+            <a:endParaRPr lang="en-US"/>
+          </a:p>
+        </p:txBody>
       </p:sp>
       <p:sp>
         <p:nvSpPr>
@@ -12679,6 +12645,13 @@
             <a:prstDash val="solid"/>
           </a:ln>
         </p:spPr>
+        <p:txBody>
+          <a:bodyPr/>
+          <a:lstStyle/>
+          <a:p>
+            <a:endParaRPr lang="en-US"/>
+          </a:p>
+        </p:txBody>
       </p:sp>
       <p:sp>
         <p:nvSpPr>
@@ -12701,7 +12674,7 @@
           <a:bodyPr wrap="square" lIns="0" tIns="0" rIns="0" bIns="0" rtlCol="0" anchor="ctr"/>
           <a:lstStyle/>
           <a:p>
-            <a:pPr algn="ctr" indent="0" marL="0">
+            <a:pPr marL="0" indent="0" algn="ctr">
               <a:buNone/>
             </a:pPr>
             <a:r>
@@ -12741,6 +12714,13 @@
             <a:prstDash val="solid"/>
           </a:ln>
         </p:spPr>
+        <p:txBody>
+          <a:bodyPr/>
+          <a:lstStyle/>
+          <a:p>
+            <a:endParaRPr lang="en-US"/>
+          </a:p>
+        </p:txBody>
       </p:sp>
       <p:sp>
         <p:nvSpPr>
@@ -12766,6 +12746,13 @@
             <a:prstDash val="solid"/>
           </a:ln>
         </p:spPr>
+        <p:txBody>
+          <a:bodyPr/>
+          <a:lstStyle/>
+          <a:p>
+            <a:endParaRPr lang="en-US"/>
+          </a:p>
+        </p:txBody>
       </p:sp>
       <p:sp>
         <p:nvSpPr>
@@ -12788,7 +12775,7 @@
           <a:bodyPr wrap="square" lIns="0" tIns="0" rIns="0" bIns="0" rtlCol="0" anchor="ctr"/>
           <a:lstStyle/>
           <a:p>
-            <a:pPr algn="ctr" indent="0" marL="0">
+            <a:pPr marL="0" indent="0" algn="ctr">
               <a:buNone/>
             </a:pPr>
             <a:r>
@@ -12808,80 +12795,14 @@
       </p:sp>
       <p:sp>
         <p:nvSpPr>
-          <p:cNvPr id="19" name="Shape 17"/>
-          <p:cNvSpPr/>
-          <p:nvPr/>
-        </p:nvSpPr>
-        <p:spPr>
-          <a:xfrm>
-            <a:off x="320040" y="1737360"/>
-            <a:ext cx="1463040" cy="256032"/>
-          </a:xfrm>
-          <a:prstGeom prst="roundRect">
-            <a:avLst>
-              <a:gd name="adj" fmla="val 17857"/>
-            </a:avLst>
-          </a:prstGeom>
-          <a:solidFill>
-            <a:srgbClr val="0D7377"/>
-          </a:solidFill>
-          <a:ln w="12700">
-            <a:solidFill>
-              <a:srgbClr val="0D7377"/>
-            </a:solidFill>
-            <a:prstDash val="solid"/>
-          </a:ln>
-        </p:spPr>
-      </p:sp>
-      <p:sp>
-        <p:nvSpPr>
-          <p:cNvPr id="20" name="Text 18"/>
-          <p:cNvSpPr/>
-          <p:nvPr/>
-        </p:nvSpPr>
-        <p:spPr>
-          <a:xfrm>
-            <a:off x="320040" y="1737360"/>
-            <a:ext cx="1463040" cy="256032"/>
-          </a:xfrm>
-          <a:prstGeom prst="rect">
-            <a:avLst/>
-          </a:prstGeom>
-          <a:noFill/>
-          <a:ln/>
-        </p:spPr>
-        <p:txBody>
-          <a:bodyPr wrap="square" lIns="0" tIns="0" rIns="0" bIns="0" rtlCol="0" anchor="ctr"/>
-          <a:lstStyle/>
-          <a:p>
-            <a:pPr algn="ctr" indent="0" marL="0">
-              <a:buNone/>
-            </a:pPr>
-            <a:r>
-              <a:rPr lang="en-US" sz="900" b="1" dirty="0">
-                <a:solidFill>
-                  <a:srgbClr val="FFFFFF"/>
-                </a:solidFill>
-                <a:latin typeface="Calibri" pitchFamily="34" charset="0"/>
-                <a:ea typeface="Calibri" pitchFamily="34" charset="-122"/>
-                <a:cs typeface="Calibri" pitchFamily="34" charset="-120"/>
-              </a:rPr>
-              <a:t>Python</a:t>
-            </a:r>
-            <a:endParaRPr lang="en-US" sz="900" dirty="0"/>
-          </a:p>
-        </p:txBody>
-      </p:sp>
-      <p:sp>
-        <p:nvSpPr>
           <p:cNvPr id="21" name="Shape 19"/>
           <p:cNvSpPr/>
           <p:nvPr/>
         </p:nvSpPr>
         <p:spPr>
           <a:xfrm>
-            <a:off x="320040" y="2011680"/>
-            <a:ext cx="8503920" cy="2606040"/>
+            <a:off x="320040" y="1656413"/>
+            <a:ext cx="8503920" cy="3282015"/>
           </a:xfrm>
           <a:prstGeom prst="rect">
             <a:avLst/>
@@ -12896,6 +12817,13 @@
             <a:prstDash val="solid"/>
           </a:ln>
         </p:spPr>
+        <p:txBody>
+          <a:bodyPr/>
+          <a:lstStyle/>
+          <a:p>
+            <a:endParaRPr lang="en-US"/>
+          </a:p>
+        </p:txBody>
       </p:sp>
       <p:sp>
         <p:nvSpPr>
@@ -12905,7 +12833,7 @@
         </p:nvSpPr>
         <p:spPr>
           <a:xfrm>
-            <a:off x="429768" y="2075688"/>
+            <a:off x="416052" y="1801368"/>
             <a:ext cx="8284464" cy="2478024"/>
           </a:xfrm>
           <a:prstGeom prst="rect">
@@ -12918,7 +12846,7 @@
           <a:bodyPr wrap="square" lIns="0" tIns="0" rIns="0" bIns="0" rtlCol="0" anchor="t"/>
           <a:lstStyle/>
           <a:p>
-            <a:pPr indent="0" marL="0">
+            <a:pPr marL="0" indent="0">
               <a:buNone/>
             </a:pPr>
             <a:r>
@@ -12935,13 +12863,13 @@
             <a:endParaRPr lang="en-US" sz="950" dirty="0"/>
           </a:p>
           <a:p>
-            <a:pPr indent="0" marL="0">
+            <a:pPr marL="0" indent="0">
               <a:buNone/>
             </a:pPr>
             <a:endParaRPr lang="en-US" sz="950" dirty="0"/>
           </a:p>
           <a:p>
-            <a:pPr indent="0" marL="0">
+            <a:pPr marL="0" indent="0">
               <a:buNone/>
             </a:pPr>
             <a:r>
@@ -12958,7 +12886,7 @@
             <a:endParaRPr lang="en-US" sz="950" dirty="0"/>
           </a:p>
           <a:p>
-            <a:pPr indent="0" marL="0">
+            <a:pPr marL="0" indent="0">
               <a:buNone/>
             </a:pPr>
             <a:r>
@@ -12975,13 +12903,13 @@
             <a:endParaRPr lang="en-US" sz="950" dirty="0"/>
           </a:p>
           <a:p>
-            <a:pPr indent="0" marL="0">
+            <a:pPr marL="0" indent="0">
               <a:buNone/>
             </a:pPr>
             <a:endParaRPr lang="en-US" sz="950" dirty="0"/>
           </a:p>
           <a:p>
-            <a:pPr indent="0" marL="0">
+            <a:pPr marL="0" indent="0">
               <a:buNone/>
             </a:pPr>
             <a:r>
@@ -12998,7 +12926,7 @@
             <a:endParaRPr lang="en-US" sz="950" dirty="0"/>
           </a:p>
           <a:p>
-            <a:pPr indent="0" marL="0">
+            <a:pPr marL="0" indent="0">
               <a:buNone/>
             </a:pPr>
             <a:r>
@@ -13015,7 +12943,7 @@
             <a:endParaRPr lang="en-US" sz="950" dirty="0"/>
           </a:p>
           <a:p>
-            <a:pPr indent="0" marL="0">
+            <a:pPr marL="0" indent="0">
               <a:buNone/>
             </a:pPr>
             <a:r>
@@ -13032,7 +12960,7 @@
             <a:endParaRPr lang="en-US" sz="950" dirty="0"/>
           </a:p>
           <a:p>
-            <a:pPr indent="0" marL="0">
+            <a:pPr marL="0" indent="0">
               <a:buNone/>
             </a:pPr>
             <a:r>
@@ -13049,7 +12977,7 @@
             <a:endParaRPr lang="en-US" sz="950" dirty="0"/>
           </a:p>
           <a:p>
-            <a:pPr indent="0" marL="0">
+            <a:pPr marL="0" indent="0">
               <a:buNone/>
             </a:pPr>
             <a:r>
@@ -13066,7 +12994,7 @@
             <a:endParaRPr lang="en-US" sz="950" dirty="0"/>
           </a:p>
           <a:p>
-            <a:pPr indent="0" marL="0">
+            <a:pPr marL="0" indent="0">
               <a:buNone/>
             </a:pPr>
             <a:r>
@@ -13083,13 +13011,13 @@
             <a:endParaRPr lang="en-US" sz="950" dirty="0"/>
           </a:p>
           <a:p>
-            <a:pPr indent="0" marL="0">
+            <a:pPr marL="0" indent="0">
               <a:buNone/>
             </a:pPr>
             <a:endParaRPr lang="en-US" sz="950" dirty="0"/>
           </a:p>
           <a:p>
-            <a:pPr indent="0" marL="0">
+            <a:pPr marL="0" indent="0">
               <a:buNone/>
             </a:pPr>
             <a:r>
@@ -13106,7 +13034,7 @@
             <a:endParaRPr lang="en-US" sz="950" dirty="0"/>
           </a:p>
           <a:p>
-            <a:pPr indent="0" marL="0">
+            <a:pPr marL="0" indent="0">
               <a:buNone/>
             </a:pPr>
             <a:r>
@@ -13123,7 +13051,7 @@
             <a:endParaRPr lang="en-US" sz="950" dirty="0"/>
           </a:p>
           <a:p>
-            <a:pPr indent="0" marL="0">
+            <a:pPr marL="0" indent="0">
               <a:buNone/>
             </a:pPr>
             <a:r>
@@ -13140,7 +13068,7 @@
             <a:endParaRPr lang="en-US" sz="950" dirty="0"/>
           </a:p>
           <a:p>
-            <a:pPr indent="0" marL="0">
+            <a:pPr marL="0" indent="0">
               <a:buNone/>
             </a:pPr>
             <a:r>
@@ -13157,7 +13085,7 @@
             <a:endParaRPr lang="en-US" sz="950" dirty="0"/>
           </a:p>
           <a:p>
-            <a:pPr indent="0" marL="0">
+            <a:pPr marL="0" indent="0">
               <a:buNone/>
             </a:pPr>
             <a:r>
@@ -13174,7 +13102,7 @@
             <a:endParaRPr lang="en-US" sz="950" dirty="0"/>
           </a:p>
           <a:p>
-            <a:pPr indent="0" marL="0">
+            <a:pPr marL="0" indent="0">
               <a:buNone/>
             </a:pPr>
             <a:r>
@@ -13191,7 +13119,7 @@
             <a:endParaRPr lang="en-US" sz="950" dirty="0"/>
           </a:p>
           <a:p>
-            <a:pPr indent="0" marL="0">
+            <a:pPr marL="0" indent="0">
               <a:buNone/>
             </a:pPr>
             <a:r>
@@ -13208,13 +13136,13 @@
             <a:endParaRPr lang="en-US" sz="950" dirty="0"/>
           </a:p>
           <a:p>
-            <a:pPr indent="0" marL="0">
+            <a:pPr marL="0" indent="0">
               <a:buNone/>
             </a:pPr>
             <a:endParaRPr lang="en-US" sz="950" dirty="0"/>
           </a:p>
           <a:p>
-            <a:pPr indent="0" marL="0">
+            <a:pPr marL="0" indent="0">
               <a:buNone/>
             </a:pPr>
             <a:r>
@@ -13240,7 +13168,7 @@
         </p:nvSpPr>
         <p:spPr>
           <a:xfrm>
-            <a:off x="320040" y="4754880"/>
+            <a:off x="3363043" y="205066"/>
             <a:ext cx="8503920" cy="274320"/>
           </a:xfrm>
           <a:prstGeom prst="rect">
@@ -13253,13 +13181,13 @@
           <a:bodyPr wrap="square" lIns="0" tIns="0" rIns="0" bIns="0" rtlCol="0" anchor="ctr"/>
           <a:lstStyle/>
           <a:p>
-            <a:pPr indent="0" marL="0">
+            <a:pPr marL="0" indent="0">
               <a:buNone/>
             </a:pPr>
             <a:r>
               <a:rPr lang="en-US" sz="1000" i="1" dirty="0">
                 <a:solidFill>
-                  <a:srgbClr val="0D7377"/>
+                  <a:schemeClr val="bg1"/>
                 </a:solidFill>
                 <a:latin typeface="Calibri" pitchFamily="34" charset="0"/>
                 <a:ea typeface="Calibri" pitchFamily="34" charset="-122"/>
@@ -13267,7 +13195,11 @@
               </a:rPr>
               <a:t>💡  EDSL caches API calls — identical runs cost nothing the second time.</a:t>
             </a:r>
-            <a:endParaRPr lang="en-US" sz="1000" dirty="0"/>
+            <a:endParaRPr lang="en-US" sz="1000" dirty="0">
+              <a:solidFill>
+                <a:schemeClr val="bg1"/>
+              </a:solidFill>
+            </a:endParaRPr>
           </a:p>
         </p:txBody>
       </p:sp>
@@ -13287,6 +13219,7 @@
         <a:solidFill>
           <a:srgbClr val="F5F7FA"/>
         </a:solidFill>
+        <a:effectLst/>
       </p:bgPr>
     </p:bg>
     <p:spTree>
@@ -13327,6 +13260,13 @@
             <a:prstDash val="solid"/>
           </a:ln>
         </p:spPr>
+        <p:txBody>
+          <a:bodyPr/>
+          <a:lstStyle/>
+          <a:p>
+            <a:endParaRPr lang="en-US"/>
+          </a:p>
+        </p:txBody>
       </p:sp>
       <p:sp>
         <p:nvSpPr>
@@ -13349,7 +13289,7 @@
           <a:bodyPr wrap="square" lIns="0" tIns="0" rIns="0" bIns="0" rtlCol="0" anchor="ctr"/>
           <a:lstStyle/>
           <a:p>
-            <a:pPr indent="0" marL="0">
+            <a:pPr marL="0" indent="0">
               <a:buNone/>
             </a:pPr>
             <a:r>
@@ -13375,8 +13315,8 @@
         </p:nvSpPr>
         <p:spPr>
           <a:xfrm>
-            <a:off x="320040" y="713232"/>
-            <a:ext cx="8503920" cy="320040"/>
+            <a:off x="4704663" y="182880"/>
+            <a:ext cx="2093376" cy="320040"/>
           </a:xfrm>
           <a:prstGeom prst="rect">
             <a:avLst/>
@@ -13388,7 +13328,7 @@
           <a:bodyPr wrap="square" lIns="0" tIns="0" rIns="0" bIns="0" rtlCol="0" anchor="ctr"/>
           <a:lstStyle/>
           <a:p>
-            <a:pPr indent="0" marL="0">
+            <a:pPr marL="0" indent="0">
               <a:buNone/>
             </a:pPr>
             <a:r>
@@ -13408,80 +13348,14 @@
       </p:sp>
       <p:sp>
         <p:nvSpPr>
-          <p:cNvPr id="5" name="Shape 3"/>
-          <p:cNvSpPr/>
-          <p:nvPr/>
-        </p:nvSpPr>
-        <p:spPr>
-          <a:xfrm>
-            <a:off x="320040" y="960120"/>
-            <a:ext cx="1463040" cy="256032"/>
-          </a:xfrm>
-          <a:prstGeom prst="roundRect">
-            <a:avLst>
-              <a:gd name="adj" fmla="val 17857"/>
-            </a:avLst>
-          </a:prstGeom>
-          <a:solidFill>
-            <a:srgbClr val="0D7377"/>
-          </a:solidFill>
-          <a:ln w="12700">
-            <a:solidFill>
-              <a:srgbClr val="0D7377"/>
-            </a:solidFill>
-            <a:prstDash val="solid"/>
-          </a:ln>
-        </p:spPr>
-      </p:sp>
-      <p:sp>
-        <p:nvSpPr>
-          <p:cNvPr id="6" name="Text 4"/>
-          <p:cNvSpPr/>
-          <p:nvPr/>
-        </p:nvSpPr>
-        <p:spPr>
-          <a:xfrm>
-            <a:off x="320040" y="960120"/>
-            <a:ext cx="1463040" cy="256032"/>
-          </a:xfrm>
-          <a:prstGeom prst="rect">
-            <a:avLst/>
-          </a:prstGeom>
-          <a:noFill/>
-          <a:ln/>
-        </p:spPr>
-        <p:txBody>
-          <a:bodyPr wrap="square" lIns="0" tIns="0" rIns="0" bIns="0" rtlCol="0" anchor="ctr"/>
-          <a:lstStyle/>
-          <a:p>
-            <a:pPr algn="ctr" indent="0" marL="0">
-              <a:buNone/>
-            </a:pPr>
-            <a:r>
-              <a:rPr lang="en-US" sz="900" b="1" dirty="0">
-                <a:solidFill>
-                  <a:srgbClr val="FFFFFF"/>
-                </a:solidFill>
-                <a:latin typeface="Calibri" pitchFamily="34" charset="0"/>
-                <a:ea typeface="Calibri" pitchFamily="34" charset="-122"/>
-                <a:cs typeface="Calibri" pitchFamily="34" charset="-120"/>
-              </a:rPr>
-              <a:t>Python</a:t>
-            </a:r>
-            <a:endParaRPr lang="en-US" sz="900" dirty="0"/>
-          </a:p>
-        </p:txBody>
-      </p:sp>
-      <p:sp>
-        <p:nvSpPr>
           <p:cNvPr id="7" name="Shape 5"/>
           <p:cNvSpPr/>
           <p:nvPr/>
         </p:nvSpPr>
         <p:spPr>
           <a:xfrm>
-            <a:off x="320040" y="1261872"/>
-            <a:ext cx="8503920" cy="3063240"/>
+            <a:off x="320040" y="728060"/>
+            <a:ext cx="8503920" cy="3306380"/>
           </a:xfrm>
           <a:prstGeom prst="rect">
             <a:avLst/>
@@ -13496,6 +13370,13 @@
             <a:prstDash val="solid"/>
           </a:ln>
         </p:spPr>
+        <p:txBody>
+          <a:bodyPr/>
+          <a:lstStyle/>
+          <a:p>
+            <a:endParaRPr lang="en-US"/>
+          </a:p>
+        </p:txBody>
       </p:sp>
       <p:sp>
         <p:nvSpPr>
@@ -13505,7 +13386,7 @@
         </p:nvSpPr>
         <p:spPr>
           <a:xfrm>
-            <a:off x="429768" y="1325880"/>
+            <a:off x="429768" y="792068"/>
             <a:ext cx="8284464" cy="2935224"/>
           </a:xfrm>
           <a:prstGeom prst="rect">
@@ -13518,7 +13399,7 @@
           <a:bodyPr wrap="square" lIns="0" tIns="0" rIns="0" bIns="0" rtlCol="0" anchor="t"/>
           <a:lstStyle/>
           <a:p>
-            <a:pPr indent="0" marL="0">
+            <a:pPr marL="0" indent="0">
               <a:buNone/>
             </a:pPr>
             <a:r>
@@ -13535,7 +13416,7 @@
             <a:endParaRPr lang="en-US" sz="950" dirty="0"/>
           </a:p>
           <a:p>
-            <a:pPr indent="0" marL="0">
+            <a:pPr marL="0" indent="0">
               <a:buNone/>
             </a:pPr>
             <a:r>
@@ -13552,13 +13433,13 @@
             <a:endParaRPr lang="en-US" sz="950" dirty="0"/>
           </a:p>
           <a:p>
-            <a:pPr indent="0" marL="0">
+            <a:pPr marL="0" indent="0">
               <a:buNone/>
             </a:pPr>
             <a:endParaRPr lang="en-US" sz="950" dirty="0"/>
           </a:p>
           <a:p>
-            <a:pPr indent="0" marL="0">
+            <a:pPr marL="0" indent="0">
               <a:buNone/>
             </a:pPr>
             <a:r>
@@ -13575,7 +13456,7 @@
             <a:endParaRPr lang="en-US" sz="950" dirty="0"/>
           </a:p>
           <a:p>
-            <a:pPr indent="0" marL="0">
+            <a:pPr marL="0" indent="0">
               <a:buNone/>
             </a:pPr>
             <a:r>
@@ -13592,7 +13473,7 @@
             <a:endParaRPr lang="en-US" sz="950" dirty="0"/>
           </a:p>
           <a:p>
-            <a:pPr indent="0" marL="0">
+            <a:pPr marL="0" indent="0">
               <a:buNone/>
             </a:pPr>
             <a:r>
@@ -13609,13 +13490,13 @@
             <a:endParaRPr lang="en-US" sz="950" dirty="0"/>
           </a:p>
           <a:p>
-            <a:pPr indent="0" marL="0">
+            <a:pPr marL="0" indent="0">
               <a:buNone/>
             </a:pPr>
             <a:endParaRPr lang="en-US" sz="950" dirty="0"/>
           </a:p>
           <a:p>
-            <a:pPr indent="0" marL="0">
+            <a:pPr marL="0" indent="0">
               <a:buNone/>
             </a:pPr>
             <a:r>
@@ -13632,7 +13513,7 @@
             <a:endParaRPr lang="en-US" sz="950" dirty="0"/>
           </a:p>
           <a:p>
-            <a:pPr indent="0" marL="0">
+            <a:pPr marL="0" indent="0">
               <a:buNone/>
             </a:pPr>
             <a:r>
@@ -13649,7 +13530,7 @@
             <a:endParaRPr lang="en-US" sz="950" dirty="0"/>
           </a:p>
           <a:p>
-            <a:pPr indent="0" marL="0">
+            <a:pPr marL="0" indent="0">
               <a:buNone/>
             </a:pPr>
             <a:r>
@@ -13666,13 +13547,13 @@
             <a:endParaRPr lang="en-US" sz="950" dirty="0"/>
           </a:p>
           <a:p>
-            <a:pPr indent="0" marL="0">
+            <a:pPr marL="0" indent="0">
               <a:buNone/>
             </a:pPr>
             <a:endParaRPr lang="en-US" sz="950" dirty="0"/>
           </a:p>
           <a:p>
-            <a:pPr indent="0" marL="0">
+            <a:pPr marL="0" indent="0">
               <a:buNone/>
             </a:pPr>
             <a:r>
@@ -13689,7 +13570,7 @@
             <a:endParaRPr lang="en-US" sz="950" dirty="0"/>
           </a:p>
           <a:p>
-            <a:pPr indent="0" marL="0">
+            <a:pPr marL="0" indent="0">
               <a:buNone/>
             </a:pPr>
             <a:r>
@@ -13706,7 +13587,7 @@
             <a:endParaRPr lang="en-US" sz="950" dirty="0"/>
           </a:p>
           <a:p>
-            <a:pPr indent="0" marL="0">
+            <a:pPr marL="0" indent="0">
               <a:buNone/>
             </a:pPr>
             <a:r>
@@ -13723,13 +13604,13 @@
             <a:endParaRPr lang="en-US" sz="950" dirty="0"/>
           </a:p>
           <a:p>
-            <a:pPr indent="0" marL="0">
+            <a:pPr marL="0" indent="0">
               <a:buNone/>
             </a:pPr>
             <a:endParaRPr lang="en-US" sz="950" dirty="0"/>
           </a:p>
           <a:p>
-            <a:pPr indent="0" marL="0">
+            <a:pPr marL="0" indent="0">
               <a:buNone/>
             </a:pPr>
             <a:r>
@@ -13746,7 +13627,7 @@
             <a:endParaRPr lang="en-US" sz="950" dirty="0"/>
           </a:p>
           <a:p>
-            <a:pPr indent="0" marL="0">
+            <a:pPr marL="0" indent="0">
               <a:buNone/>
             </a:pPr>
             <a:r>
@@ -13763,7 +13644,7 @@
             <a:endParaRPr lang="en-US" sz="950" dirty="0"/>
           </a:p>
           <a:p>
-            <a:pPr indent="0" marL="0">
+            <a:pPr marL="0" indent="0">
               <a:buNone/>
             </a:pPr>
             <a:r>
@@ -13780,7 +13661,7 @@
             <a:endParaRPr lang="en-US" sz="950" dirty="0"/>
           </a:p>
           <a:p>
-            <a:pPr indent="0" marL="0">
+            <a:pPr marL="0" indent="0">
               <a:buNone/>
             </a:pPr>
             <a:r>
@@ -13797,7 +13678,7 @@
             <a:endParaRPr lang="en-US" sz="950" dirty="0"/>
           </a:p>
           <a:p>
-            <a:pPr indent="0" marL="0">
+            <a:pPr marL="0" indent="0">
               <a:buNone/>
             </a:pPr>
             <a:r>
@@ -13814,7 +13695,7 @@
             <a:endParaRPr lang="en-US" sz="950" dirty="0"/>
           </a:p>
           <a:p>
-            <a:pPr indent="0" marL="0">
+            <a:pPr marL="0" indent="0">
               <a:buNone/>
             </a:pPr>
             <a:r>
@@ -13831,7 +13712,7 @@
             <a:endParaRPr lang="en-US" sz="950" dirty="0"/>
           </a:p>
           <a:p>
-            <a:pPr indent="0" marL="0">
+            <a:pPr marL="0" indent="0">
               <a:buNone/>
             </a:pPr>
             <a:r>
@@ -13858,31 +13739,49 @@
           <p:nvPr>
             <p:extLst>
               <p:ext uri="{D42A27DB-BD31-4B8C-83A1-F6EECF244321}">
-                <p14:modId xmlns:p14="http://schemas.microsoft.com/office/powerpoint/2010/main" val="1579011935"/>
+                <p14:modId xmlns:p14="http://schemas.microsoft.com/office/powerpoint/2010/main" val="93530214"/>
               </p:ext>
             </p:extLst>
           </p:nvPr>
         </p:nvGraphicFramePr>
         <p:xfrm>
-          <a:off x="320040" y="4572000"/>
-          <a:ext cx="8503920" cy="457200"/>
+          <a:off x="320040" y="4076700"/>
+          <a:ext cx="8503920" cy="1066800"/>
         </p:xfrm>
         <a:graphic>
           <a:graphicData uri="http://schemas.openxmlformats.org/drawingml/2006/table">
             <a:tbl>
               <a:tblPr/>
               <a:tblGrid>
-                <a:gridCol w="2194560"/>
-                <a:gridCol w="2194560"/>
-                <a:gridCol w="4114800"/>
+                <a:gridCol w="2194560">
+                  <a:extLst>
+                    <a:ext uri="{9D8B030D-6E8A-4147-A177-3AD203B41FA5}">
+                      <a16:colId xmlns:a16="http://schemas.microsoft.com/office/drawing/2014/main" val="20000"/>
+                    </a:ext>
+                  </a:extLst>
+                </a:gridCol>
+                <a:gridCol w="2194560">
+                  <a:extLst>
+                    <a:ext uri="{9D8B030D-6E8A-4147-A177-3AD203B41FA5}">
+                      <a16:colId xmlns:a16="http://schemas.microsoft.com/office/drawing/2014/main" val="20001"/>
+                    </a:ext>
+                  </a:extLst>
+                </a:gridCol>
+                <a:gridCol w="4114800">
+                  <a:extLst>
+                    <a:ext uri="{9D8B030D-6E8A-4147-A177-3AD203B41FA5}">
+                      <a16:colId xmlns:a16="http://schemas.microsoft.com/office/drawing/2014/main" val="20002"/>
+                    </a:ext>
+                  </a:extLst>
+                </a:gridCol>
               </a:tblGrid>
-              <a:tr h="91440">
+              <a:tr h="0">
                 <a:tc>
                   <a:txBody>
                     <a:bodyPr/>
                     <a:lstStyle/>
                     <a:p>
-                      <a:pPr indent="0" marL="0">
+                      <a:pPr marL="0" indent="0">
                         <a:buNone/>
                       </a:pPr>
                       <a:r>
@@ -13903,7 +13802,7 @@
                       </a:endParaRPr>
                     </a:p>
                   </a:txBody>
-                  <a:tcPr marL="91440" marR="91440" marT="45720" marB="45720">
+                  <a:tcPr>
                     <a:lnL w="6350" cap="flat" cmpd="sng" algn="ctr">
                       <a:solidFill>
                         <a:srgbClr val="CBD5E1"/>
@@ -13950,7 +13849,7 @@
                     <a:bodyPr/>
                     <a:lstStyle/>
                     <a:p>
-                      <a:pPr indent="0" marL="0">
+                      <a:pPr marL="0" indent="0">
                         <a:buNone/>
                       </a:pPr>
                       <a:r>
@@ -13971,7 +13870,7 @@
                       </a:endParaRPr>
                     </a:p>
                   </a:txBody>
-                  <a:tcPr marL="91440" marR="91440" marT="45720" marB="45720">
+                  <a:tcPr>
                     <a:lnL w="6350" cap="flat" cmpd="sng" algn="ctr">
                       <a:solidFill>
                         <a:srgbClr val="CBD5E1"/>
@@ -14018,7 +13917,7 @@
                     <a:bodyPr/>
                     <a:lstStyle/>
                     <a:p>
-                      <a:pPr indent="0" marL="0">
+                      <a:pPr marL="0" indent="0">
                         <a:buNone/>
                       </a:pPr>
                       <a:r>
@@ -14039,7 +13938,7 @@
                       </a:endParaRPr>
                     </a:p>
                   </a:txBody>
-                  <a:tcPr marL="91440" marR="91440" marT="45720" marB="45720">
+                  <a:tcPr>
                     <a:lnL w="6350" cap="flat" cmpd="sng" algn="ctr">
                       <a:solidFill>
                         <a:srgbClr val="CBD5E1"/>
@@ -14081,14 +13980,19 @@
                     </a:solidFill>
                   </a:tcPr>
                 </a:tc>
+                <a:extLst>
+                  <a:ext uri="{0D108BD9-81ED-4DB2-BD59-A6C34878D82A}">
+                    <a16:rowId xmlns:a16="http://schemas.microsoft.com/office/drawing/2014/main" val="10000"/>
+                  </a:ext>
+                </a:extLst>
               </a:tr>
-              <a:tr h="91440">
+              <a:tr h="0">
                 <a:tc>
                   <a:txBody>
                     <a:bodyPr/>
                     <a:lstStyle/>
                     <a:p>
-                      <a:pPr indent="0" marL="0">
+                      <a:pPr marL="0" indent="0">
                         <a:buNone/>
                       </a:pPr>
                       <a:r>
@@ -14109,7 +14013,7 @@
                       </a:endParaRPr>
                     </a:p>
                   </a:txBody>
-                  <a:tcPr marL="91440" marR="91440" marT="45720" marB="45720">
+                  <a:tcPr>
                     <a:lnL w="6350" cap="flat" cmpd="sng" algn="ctr">
                       <a:solidFill>
                         <a:srgbClr val="CBD5E1"/>
@@ -14156,7 +14060,7 @@
                     <a:bodyPr/>
                     <a:lstStyle/>
                     <a:p>
-                      <a:pPr indent="0" marL="0">
+                      <a:pPr marL="0" indent="0">
                         <a:buNone/>
                       </a:pPr>
                       <a:r>
@@ -14177,7 +14081,7 @@
                       </a:endParaRPr>
                     </a:p>
                   </a:txBody>
-                  <a:tcPr marL="91440" marR="91440" marT="45720" marB="45720">
+                  <a:tcPr>
                     <a:lnL w="6350" cap="flat" cmpd="sng" algn="ctr">
                       <a:solidFill>
                         <a:srgbClr val="CBD5E1"/>
@@ -14224,7 +14128,7 @@
                     <a:bodyPr/>
                     <a:lstStyle/>
                     <a:p>
-                      <a:pPr indent="0" marL="0">
+                      <a:pPr marL="0" indent="0">
                         <a:buNone/>
                       </a:pPr>
                       <a:r>
@@ -14245,7 +14149,7 @@
                       </a:endParaRPr>
                     </a:p>
                   </a:txBody>
-                  <a:tcPr marL="91440" marR="91440" marT="45720" marB="45720">
+                  <a:tcPr>
                     <a:lnL w="6350" cap="flat" cmpd="sng" algn="ctr">
                       <a:solidFill>
                         <a:srgbClr val="CBD5E1"/>
@@ -14287,14 +14191,19 @@
                     </a:solidFill>
                   </a:tcPr>
                 </a:tc>
+                <a:extLst>
+                  <a:ext uri="{0D108BD9-81ED-4DB2-BD59-A6C34878D82A}">
+                    <a16:rowId xmlns:a16="http://schemas.microsoft.com/office/drawing/2014/main" val="10001"/>
+                  </a:ext>
+                </a:extLst>
               </a:tr>
-              <a:tr h="91440">
+              <a:tr h="0">
                 <a:tc>
                   <a:txBody>
                     <a:bodyPr/>
                     <a:lstStyle/>
                     <a:p>
-                      <a:pPr indent="0" marL="0">
+                      <a:pPr marL="0" indent="0">
                         <a:buNone/>
                       </a:pPr>
                       <a:r>
@@ -14315,7 +14224,7 @@
                       </a:endParaRPr>
                     </a:p>
                   </a:txBody>
-                  <a:tcPr marL="91440" marR="91440" marT="45720" marB="45720">
+                  <a:tcPr>
                     <a:lnL w="6350" cap="flat" cmpd="sng" algn="ctr">
                       <a:solidFill>
                         <a:srgbClr val="CBD5E1"/>
@@ -14362,7 +14271,7 @@
                     <a:bodyPr/>
                     <a:lstStyle/>
                     <a:p>
-                      <a:pPr indent="0" marL="0">
+                      <a:pPr marL="0" indent="0">
                         <a:buNone/>
                       </a:pPr>
                       <a:r>
@@ -14383,7 +14292,7 @@
                       </a:endParaRPr>
                     </a:p>
                   </a:txBody>
-                  <a:tcPr marL="91440" marR="91440" marT="45720" marB="45720">
+                  <a:tcPr>
                     <a:lnL w="6350" cap="flat" cmpd="sng" algn="ctr">
                       <a:solidFill>
                         <a:srgbClr val="CBD5E1"/>
@@ -14430,7 +14339,7 @@
                     <a:bodyPr/>
                     <a:lstStyle/>
                     <a:p>
-                      <a:pPr indent="0" marL="0">
+                      <a:pPr marL="0" indent="0">
                         <a:buNone/>
                       </a:pPr>
                       <a:r>
@@ -14451,7 +14360,7 @@
                       </a:endParaRPr>
                     </a:p>
                   </a:txBody>
-                  <a:tcPr marL="91440" marR="91440" marT="45720" marB="45720">
+                  <a:tcPr>
                     <a:lnL w="6350" cap="flat" cmpd="sng" algn="ctr">
                       <a:solidFill>
                         <a:srgbClr val="CBD5E1"/>
@@ -14493,14 +14402,19 @@
                     </a:solidFill>
                   </a:tcPr>
                 </a:tc>
+                <a:extLst>
+                  <a:ext uri="{0D108BD9-81ED-4DB2-BD59-A6C34878D82A}">
+                    <a16:rowId xmlns:a16="http://schemas.microsoft.com/office/drawing/2014/main" val="10002"/>
+                  </a:ext>
+                </a:extLst>
               </a:tr>
-              <a:tr h="91440">
+              <a:tr h="0">
                 <a:tc>
                   <a:txBody>
                     <a:bodyPr/>
                     <a:lstStyle/>
                     <a:p>
-                      <a:pPr indent="0" marL="0">
+                      <a:pPr marL="0" indent="0">
                         <a:buNone/>
                       </a:pPr>
                       <a:r>
@@ -14521,7 +14435,7 @@
                       </a:endParaRPr>
                     </a:p>
                   </a:txBody>
-                  <a:tcPr marL="91440" marR="91440" marT="45720" marB="45720">
+                  <a:tcPr>
                     <a:lnL w="6350" cap="flat" cmpd="sng" algn="ctr">
                       <a:solidFill>
                         <a:srgbClr val="CBD5E1"/>
@@ -14568,7 +14482,7 @@
                     <a:bodyPr/>
                     <a:lstStyle/>
                     <a:p>
-                      <a:pPr indent="0" marL="0">
+                      <a:pPr marL="0" indent="0">
                         <a:buNone/>
                       </a:pPr>
                       <a:r>
@@ -14589,7 +14503,7 @@
                       </a:endParaRPr>
                     </a:p>
                   </a:txBody>
-                  <a:tcPr marL="91440" marR="91440" marT="45720" marB="45720">
+                  <a:tcPr>
                     <a:lnL w="6350" cap="flat" cmpd="sng" algn="ctr">
                       <a:solidFill>
                         <a:srgbClr val="CBD5E1"/>
@@ -14636,7 +14550,7 @@
                     <a:bodyPr/>
                     <a:lstStyle/>
                     <a:p>
-                      <a:pPr indent="0" marL="0">
+                      <a:pPr marL="0" indent="0">
                         <a:buNone/>
                       </a:pPr>
                       <a:r>
@@ -14657,7 +14571,7 @@
                       </a:endParaRPr>
                     </a:p>
                   </a:txBody>
-                  <a:tcPr marL="91440" marR="91440" marT="45720" marB="45720">
+                  <a:tcPr>
                     <a:lnL w="6350" cap="flat" cmpd="sng" algn="ctr">
                       <a:solidFill>
                         <a:srgbClr val="CBD5E1"/>
@@ -14699,14 +14613,19 @@
                     </a:solidFill>
                   </a:tcPr>
                 </a:tc>
+                <a:extLst>
+                  <a:ext uri="{0D108BD9-81ED-4DB2-BD59-A6C34878D82A}">
+                    <a16:rowId xmlns:a16="http://schemas.microsoft.com/office/drawing/2014/main" val="10003"/>
+                  </a:ext>
+                </a:extLst>
               </a:tr>
-              <a:tr h="91440">
+              <a:tr h="0">
                 <a:tc>
                   <a:txBody>
                     <a:bodyPr/>
                     <a:lstStyle/>
                     <a:p>
-                      <a:pPr indent="0" marL="0">
+                      <a:pPr marL="0" indent="0">
                         <a:buNone/>
                       </a:pPr>
                       <a:r>
@@ -14727,7 +14646,7 @@
                       </a:endParaRPr>
                     </a:p>
                   </a:txBody>
-                  <a:tcPr marL="91440" marR="91440" marT="45720" marB="45720">
+                  <a:tcPr>
                     <a:lnL w="6350" cap="flat" cmpd="sng" algn="ctr">
                       <a:solidFill>
                         <a:srgbClr val="CBD5E1"/>
@@ -14774,7 +14693,7 @@
                     <a:bodyPr/>
                     <a:lstStyle/>
                     <a:p>
-                      <a:pPr indent="0" marL="0">
+                      <a:pPr marL="0" indent="0">
                         <a:buNone/>
                       </a:pPr>
                       <a:r>
@@ -14795,7 +14714,7 @@
                       </a:endParaRPr>
                     </a:p>
                   </a:txBody>
-                  <a:tcPr marL="91440" marR="91440" marT="45720" marB="45720">
+                  <a:tcPr>
                     <a:lnL w="6350" cap="flat" cmpd="sng" algn="ctr">
                       <a:solidFill>
                         <a:srgbClr val="CBD5E1"/>
@@ -14842,7 +14761,7 @@
                     <a:bodyPr/>
                     <a:lstStyle/>
                     <a:p>
-                      <a:pPr indent="0" marL="0">
+                      <a:pPr marL="0" indent="0">
                         <a:buNone/>
                       </a:pPr>
                       <a:r>
@@ -14863,7 +14782,7 @@
                       </a:endParaRPr>
                     </a:p>
                   </a:txBody>
-                  <a:tcPr marL="91440" marR="91440" marT="45720" marB="45720">
+                  <a:tcPr>
                     <a:lnL w="6350" cap="flat" cmpd="sng" algn="ctr">
                       <a:solidFill>
                         <a:srgbClr val="CBD5E1"/>
@@ -14905,6 +14824,11 @@
                     </a:solidFill>
                   </a:tcPr>
                 </a:tc>
+                <a:extLst>
+                  <a:ext uri="{0D108BD9-81ED-4DB2-BD59-A6C34878D82A}">
+                    <a16:rowId xmlns:a16="http://schemas.microsoft.com/office/drawing/2014/main" val="10004"/>
+                  </a:ext>
+                </a:extLst>
               </a:tr>
             </a:tbl>
           </a:graphicData>
@@ -15211,4 +15135,319 @@
     </a:ext>
   </a:extLst>
 </a:theme>
+</file>
+
+<file path=ppt/theme/theme2.xml><?xml version="1.0" encoding="utf-8"?>
+<a:theme xmlns:a="http://schemas.openxmlformats.org/drawingml/2006/main" name="Office Theme">
+  <a:themeElements>
+    <a:clrScheme name="Office">
+      <a:dk1>
+        <a:sysClr val="windowText" lastClr="000000"/>
+      </a:dk1>
+      <a:lt1>
+        <a:sysClr val="window" lastClr="FFFFFF"/>
+      </a:lt1>
+      <a:dk2>
+        <a:srgbClr val="0E2841"/>
+      </a:dk2>
+      <a:lt2>
+        <a:srgbClr val="E8E8E8"/>
+      </a:lt2>
+      <a:accent1>
+        <a:srgbClr val="156082"/>
+      </a:accent1>
+      <a:accent2>
+        <a:srgbClr val="E97132"/>
+      </a:accent2>
+      <a:accent3>
+        <a:srgbClr val="196B24"/>
+      </a:accent3>
+      <a:accent4>
+        <a:srgbClr val="0F9ED5"/>
+      </a:accent4>
+      <a:accent5>
+        <a:srgbClr val="A02B93"/>
+      </a:accent5>
+      <a:accent6>
+        <a:srgbClr val="4EA72E"/>
+      </a:accent6>
+      <a:hlink>
+        <a:srgbClr val="467886"/>
+      </a:hlink>
+      <a:folHlink>
+        <a:srgbClr val="96607D"/>
+      </a:folHlink>
+    </a:clrScheme>
+    <a:fontScheme name="Office">
+      <a:majorFont>
+        <a:latin typeface="Aptos Display" panose="02110004020202020204"/>
+        <a:ea typeface=""/>
+        <a:cs typeface=""/>
+        <a:font script="Jpan" typeface="游ゴシック Light"/>
+        <a:font script="Hang" typeface="맑은 고딕"/>
+        <a:font script="Hans" typeface="等线 Light"/>
+        <a:font script="Hant" typeface="新細明體"/>
+        <a:font script="Arab" typeface="Times New Roman"/>
+        <a:font script="Hebr" typeface="Times New Roman"/>
+        <a:font script="Thai" typeface="Angsana New"/>
+        <a:font script="Ethi" typeface="Nyala"/>
+        <a:font script="Beng" typeface="Vrinda"/>
+        <a:font script="Gujr" typeface="Shruti"/>
+        <a:font script="Khmr" typeface="MoolBoran"/>
+        <a:font script="Knda" typeface="Tunga"/>
+        <a:font script="Guru" typeface="Raavi"/>
+        <a:font script="Cans" typeface="Euphemia"/>
+        <a:font script="Cher" typeface="Plantagenet Cherokee"/>
+        <a:font script="Yiii" typeface="Microsoft Yi Baiti"/>
+        <a:font script="Tibt" typeface="Microsoft Himalaya"/>
+        <a:font script="Thaa" typeface="MV Boli"/>
+        <a:font script="Deva" typeface="Mangal"/>
+        <a:font script="Telu" typeface="Gautami"/>
+        <a:font script="Taml" typeface="Latha"/>
+        <a:font script="Syrc" typeface="Estrangelo Edessa"/>
+        <a:font script="Orya" typeface="Kalinga"/>
+        <a:font script="Mlym" typeface="Kartika"/>
+        <a:font script="Laoo" typeface="DokChampa"/>
+        <a:font script="Sinh" typeface="Iskoola Pota"/>
+        <a:font script="Mong" typeface="Mongolian Baiti"/>
+        <a:font script="Viet" typeface="Times New Roman"/>
+        <a:font script="Uigh" typeface="Microsoft Uighur"/>
+        <a:font script="Geor" typeface="Sylfaen"/>
+        <a:font script="Armn" typeface="Arial"/>
+        <a:font script="Bugi" typeface="Leelawadee UI"/>
+        <a:font script="Bopo" typeface="Microsoft JhengHei"/>
+        <a:font script="Java" typeface="Javanese Text"/>
+        <a:font script="Lisu" typeface="Segoe UI"/>
+        <a:font script="Mymr" typeface="Myanmar Text"/>
+        <a:font script="Nkoo" typeface="Ebrima"/>
+        <a:font script="Olck" typeface="Nirmala UI"/>
+        <a:font script="Osma" typeface="Ebrima"/>
+        <a:font script="Phag" typeface="Phagspa"/>
+        <a:font script="Syrn" typeface="Estrangelo Edessa"/>
+        <a:font script="Syrj" typeface="Estrangelo Edessa"/>
+        <a:font script="Syre" typeface="Estrangelo Edessa"/>
+        <a:font script="Sora" typeface="Nirmala UI"/>
+        <a:font script="Tale" typeface="Microsoft Tai Le"/>
+        <a:font script="Talu" typeface="Microsoft New Tai Lue"/>
+        <a:font script="Tfng" typeface="Ebrima"/>
+      </a:majorFont>
+      <a:minorFont>
+        <a:latin typeface="Aptos" panose="02110004020202020204"/>
+        <a:ea typeface=""/>
+        <a:cs typeface=""/>
+        <a:font script="Jpan" typeface="游ゴシック"/>
+        <a:font script="Hang" typeface="맑은 고딕"/>
+        <a:font script="Hans" typeface="等线"/>
+        <a:font script="Hant" typeface="新細明體"/>
+        <a:font script="Arab" typeface="Arial"/>
+        <a:font script="Hebr" typeface="Arial"/>
+        <a:font script="Thai" typeface="Cordia New"/>
+        <a:font script="Ethi" typeface="Nyala"/>
+        <a:font script="Beng" typeface="Vrinda"/>
+        <a:font script="Gujr" typeface="Shruti"/>
+        <a:font script="Khmr" typeface="DaunPenh"/>
+        <a:font script="Knda" typeface="Tunga"/>
+        <a:font script="Guru" typeface="Raavi"/>
+        <a:font script="Cans" typeface="Euphemia"/>
+        <a:font script="Cher" typeface="Plantagenet Cherokee"/>
+        <a:font script="Yiii" typeface="Microsoft Yi Baiti"/>
+        <a:font script="Tibt" typeface="Microsoft Himalaya"/>
+        <a:font script="Thaa" typeface="MV Boli"/>
+        <a:font script="Deva" typeface="Mangal"/>
+        <a:font script="Telu" typeface="Gautami"/>
+        <a:font script="Taml" typeface="Latha"/>
+        <a:font script="Syrc" typeface="Estrangelo Edessa"/>
+        <a:font script="Orya" typeface="Kalinga"/>
+        <a:font script="Mlym" typeface="Kartika"/>
+        <a:font script="Laoo" typeface="DokChampa"/>
+        <a:font script="Sinh" typeface="Iskoola Pota"/>
+        <a:font script="Mong" typeface="Mongolian Baiti"/>
+        <a:font script="Viet" typeface="Arial"/>
+        <a:font script="Uigh" typeface="Microsoft Uighur"/>
+        <a:font script="Geor" typeface="Sylfaen"/>
+        <a:font script="Armn" typeface="Arial"/>
+        <a:font script="Bugi" typeface="Leelawadee UI"/>
+        <a:font script="Bopo" typeface="Microsoft JhengHei"/>
+        <a:font script="Java" typeface="Javanese Text"/>
+        <a:font script="Lisu" typeface="Segoe UI"/>
+        <a:font script="Mymr" typeface="Myanmar Text"/>
+        <a:font script="Nkoo" typeface="Ebrima"/>
+        <a:font script="Olck" typeface="Nirmala UI"/>
+        <a:font script="Osma" typeface="Ebrima"/>
+        <a:font script="Phag" typeface="Phagspa"/>
+        <a:font script="Syrn" typeface="Estrangelo Edessa"/>
+        <a:font script="Syrj" typeface="Estrangelo Edessa"/>
+        <a:font script="Syre" typeface="Estrangelo Edessa"/>
+        <a:font script="Sora" typeface="Nirmala UI"/>
+        <a:font script="Tale" typeface="Microsoft Tai Le"/>
+        <a:font script="Talu" typeface="Microsoft New Tai Lue"/>
+        <a:font script="Tfng" typeface="Ebrima"/>
+      </a:minorFont>
+    </a:fontScheme>
+    <a:fmtScheme name="Office">
+      <a:fillStyleLst>
+        <a:solidFill>
+          <a:schemeClr val="phClr"/>
+        </a:solidFill>
+        <a:gradFill rotWithShape="1">
+          <a:gsLst>
+            <a:gs pos="0">
+              <a:schemeClr val="phClr">
+                <a:lumMod val="110000"/>
+                <a:satMod val="105000"/>
+                <a:tint val="67000"/>
+              </a:schemeClr>
+            </a:gs>
+            <a:gs pos="50000">
+              <a:schemeClr val="phClr">
+                <a:lumMod val="105000"/>
+                <a:satMod val="103000"/>
+                <a:tint val="73000"/>
+              </a:schemeClr>
+            </a:gs>
+            <a:gs pos="100000">
+              <a:schemeClr val="phClr">
+                <a:lumMod val="105000"/>
+                <a:satMod val="109000"/>
+                <a:tint val="81000"/>
+              </a:schemeClr>
+            </a:gs>
+          </a:gsLst>
+          <a:lin ang="5400000" scaled="0"/>
+        </a:gradFill>
+        <a:gradFill rotWithShape="1">
+          <a:gsLst>
+            <a:gs pos="0">
+              <a:schemeClr val="phClr">
+                <a:satMod val="103000"/>
+                <a:lumMod val="102000"/>
+                <a:tint val="94000"/>
+              </a:schemeClr>
+            </a:gs>
+            <a:gs pos="50000">
+              <a:schemeClr val="phClr">
+                <a:satMod val="110000"/>
+                <a:lumMod val="100000"/>
+                <a:shade val="100000"/>
+              </a:schemeClr>
+            </a:gs>
+            <a:gs pos="100000">
+              <a:schemeClr val="phClr">
+                <a:lumMod val="99000"/>
+                <a:satMod val="120000"/>
+                <a:shade val="78000"/>
+              </a:schemeClr>
+            </a:gs>
+          </a:gsLst>
+          <a:lin ang="5400000" scaled="0"/>
+        </a:gradFill>
+      </a:fillStyleLst>
+      <a:lnStyleLst>
+        <a:ln w="12700" cap="flat" cmpd="sng" algn="ctr">
+          <a:solidFill>
+            <a:schemeClr val="phClr"/>
+          </a:solidFill>
+          <a:prstDash val="solid"/>
+          <a:miter lim="800000"/>
+        </a:ln>
+        <a:ln w="19050" cap="flat" cmpd="sng" algn="ctr">
+          <a:solidFill>
+            <a:schemeClr val="phClr"/>
+          </a:solidFill>
+          <a:prstDash val="solid"/>
+          <a:miter lim="800000"/>
+        </a:ln>
+        <a:ln w="25400" cap="flat" cmpd="sng" algn="ctr">
+          <a:solidFill>
+            <a:schemeClr val="phClr"/>
+          </a:solidFill>
+          <a:prstDash val="solid"/>
+          <a:miter lim="800000"/>
+        </a:ln>
+      </a:lnStyleLst>
+      <a:effectStyleLst>
+        <a:effectStyle>
+          <a:effectLst/>
+        </a:effectStyle>
+        <a:effectStyle>
+          <a:effectLst/>
+        </a:effectStyle>
+        <a:effectStyle>
+          <a:effectLst>
+            <a:outerShdw blurRad="57150" dist="19050" dir="5400000" algn="ctr" rotWithShape="0">
+              <a:srgbClr val="000000">
+                <a:alpha val="63000"/>
+              </a:srgbClr>
+            </a:outerShdw>
+          </a:effectLst>
+        </a:effectStyle>
+      </a:effectStyleLst>
+      <a:bgFillStyleLst>
+        <a:solidFill>
+          <a:schemeClr val="phClr"/>
+        </a:solidFill>
+        <a:solidFill>
+          <a:schemeClr val="phClr">
+            <a:tint val="95000"/>
+            <a:satMod val="170000"/>
+          </a:schemeClr>
+        </a:solidFill>
+        <a:gradFill rotWithShape="1">
+          <a:gsLst>
+            <a:gs pos="0">
+              <a:schemeClr val="phClr">
+                <a:tint val="93000"/>
+                <a:satMod val="150000"/>
+                <a:shade val="98000"/>
+                <a:lumMod val="102000"/>
+              </a:schemeClr>
+            </a:gs>
+            <a:gs pos="50000">
+              <a:schemeClr val="phClr">
+                <a:tint val="98000"/>
+                <a:satMod val="130000"/>
+                <a:shade val="90000"/>
+                <a:lumMod val="103000"/>
+              </a:schemeClr>
+            </a:gs>
+            <a:gs pos="100000">
+              <a:schemeClr val="phClr">
+                <a:shade val="63000"/>
+                <a:satMod val="120000"/>
+              </a:schemeClr>
+            </a:gs>
+          </a:gsLst>
+          <a:lin ang="5400000" scaled="0"/>
+        </a:gradFill>
+      </a:bgFillStyleLst>
+    </a:fmtScheme>
+  </a:themeElements>
+  <a:objectDefaults>
+    <a:lnDef>
+      <a:spPr/>
+      <a:bodyPr/>
+      <a:lstStyle/>
+      <a:style>
+        <a:lnRef idx="2">
+          <a:schemeClr val="accent1"/>
+        </a:lnRef>
+        <a:fillRef idx="0">
+          <a:schemeClr val="accent1"/>
+        </a:fillRef>
+        <a:effectRef idx="1">
+          <a:schemeClr val="accent1"/>
+        </a:effectRef>
+        <a:fontRef idx="minor">
+          <a:schemeClr val="tx1"/>
+        </a:fontRef>
+      </a:style>
+    </a:lnDef>
+  </a:objectDefaults>
+  <a:extraClrSchemeLst/>
+  <a:extLst>
+    <a:ext uri="{05A4C25C-085E-4340-85A3-A5531E510DB2}">
+      <thm15:themeFamily xmlns:thm15="http://schemas.microsoft.com/office/thememl/2012/main" name="Office Theme" id="{2E142A2C-CD16-42D6-873A-C26D2A0506FA}" vid="{1BDDFF52-6CD6-40A5-AB3C-68EB2F1E4D0A}"/>
+    </a:ext>
+  </a:extLst>
+</a:theme>
 </file>